--- a/ASAK_샐러드_스마트키오스크_발표.pptx
+++ b/ASAK_샐러드_스마트키오스크_발표.pptx
@@ -4,6 +4,9 @@
   <p:sldMasterIdLst>
     <p:sldMasterId id="2147483648" r:id="rId1"/>
   </p:sldMasterIdLst>
+  <p:notesMasterIdLst>
+    <p:notesMasterId r:id="rId24"/>
+  </p:notesMasterIdLst>
   <p:sldIdLst>
     <p:sldId id="256" r:id="rId2"/>
     <p:sldId id="257" r:id="rId3"/>
@@ -28,11 +31,8 @@
     <p:sldId id="276" r:id="rId22"/>
     <p:sldId id="277" r:id="rId23"/>
   </p:sldIdLst>
-  <p:notesMasterIdLst>
-    <p:notesMasterId r:id="rId24"/>
-  </p:notesMasterIdLst>
-  <p:sldSz cx="12191695" cy="6858000"/>
-  <p:notesSz cx="6858000" cy="12191695"/>
+  <p:sldSz cx="12192000" cy="6858000"/>
+  <p:notesSz cx="6858000" cy="12192000"/>
   <p:defaultTextStyle>
     <a:lvl1pPr marL="0" algn="l" defTabSz="914400" rtl="0" eaLnBrk="1" latinLnBrk="0" hangingPunct="1">
       <a:defRPr sz="1800" kern="1200">
@@ -125,6 +125,11 @@
       </a:defRPr>
     </a:lvl9pPr>
   </p:defaultTextStyle>
+  <p:extLst>
+    <p:ext uri="{EFAFB233-063F-42B5-8137-9DF3F51BA10A}">
+      <p15:sldGuideLst xmlns:p15="http://schemas.microsoft.com/office/powerpoint/2012/main"/>
+    </p:ext>
+  </p:extLst>
 </p:presentation>
 </file>
 
@@ -150,240 +155,16 @@
           <a:chExt cx="0" cy="0"/>
         </a:xfrm>
       </p:grpSpPr>
-      <p:sp>
-        <p:nvSpPr>
-          <p:cNvPr id="2" name="Header Placeholder 1"/>
-          <p:cNvSpPr>
-            <a:spLocks noGrp="1"/>
-          </p:cNvSpPr>
-          <p:nvPr>
-            <p:ph type="hdr" sz="quarter"/>
-          </p:nvPr>
-        </p:nvSpPr>
-        <p:spPr>
-          <a:xfrm>
-            <a:off x="0" y="0"/>
-            <a:ext cx="2971800" cy="458788"/>
-          </a:xfrm>
-          <a:prstGeom prst="rect">
-            <a:avLst/>
-          </a:prstGeom>
-        </p:spPr>
-        <p:txBody>
-          <a:bodyPr vert="horz" lIns="91440" tIns="45720" rIns="91440" bIns="45720" rtlCol="0"/>
-          <a:lstStyle>
-            <a:lvl1pPr algn="l">
-              <a:defRPr sz="1200"/>
-            </a:lvl1pPr>
-          </a:lstStyle>
-          <a:p>
-            <a:endParaRPr lang="en-US"/>
-          </a:p>
-        </p:txBody>
-      </p:sp>
-      <p:sp>
-        <p:nvSpPr>
-          <p:cNvPr id="3" name="Date Placeholder 2"/>
-          <p:cNvSpPr>
-            <a:spLocks noGrp="1"/>
-          </p:cNvSpPr>
-          <p:nvPr>
-            <p:ph type="dt" idx="1"/>
-          </p:nvPr>
-        </p:nvSpPr>
-        <p:spPr>
-          <a:xfrm>
-            <a:off x="3884613" y="0"/>
-            <a:ext cx="2971800" cy="458788"/>
-          </a:xfrm>
-          <a:prstGeom prst="rect">
-            <a:avLst/>
-          </a:prstGeom>
-        </p:spPr>
-        <p:txBody>
-          <a:bodyPr vert="horz" lIns="91440" tIns="45720" rIns="91440" bIns="45720" rtlCol="0"/>
-          <a:lstStyle>
-            <a:lvl1pPr algn="r">
-              <a:defRPr sz="1200"/>
-            </a:lvl1pPr>
-          </a:lstStyle>
-          <a:p>
-            <a:fld id="{5282F153-3F37-0F45-9E97-73ACFA13230C}" type="datetimeFigureOut">
-              <a:rPr lang="en-US"/>
-              <a:t>7/23/19</a:t>
-            </a:fld>
-            <a:endParaRPr lang="en-US"/>
-          </a:p>
-        </p:txBody>
-      </p:sp>
-      <p:sp>
-        <p:nvSpPr>
-          <p:cNvPr id="4" name="Slide Image Placeholder 3"/>
-          <p:cNvSpPr>
-            <a:spLocks noGrp="1" noRot="1" noChangeAspect="1"/>
-          </p:cNvSpPr>
-          <p:nvPr>
-            <p:ph type="sldImg" idx="2"/>
-          </p:nvPr>
-        </p:nvSpPr>
-        <p:spPr>
-          <a:xfrm>
-            <a:off x="685800" y="1143000"/>
-            <a:ext cx="5486400" cy="3086100"/>
-          </a:xfrm>
-          <a:prstGeom prst="rect">
-            <a:avLst/>
-          </a:prstGeom>
-          <a:noFill/>
-          <a:ln w="12700">
-            <a:solidFill>
-              <a:prstClr val="black"/>
-            </a:solidFill>
-          </a:ln>
-        </p:spPr>
-        <p:txBody>
-          <a:bodyPr vert="horz" lIns="91440" tIns="45720" rIns="91440" bIns="45720" rtlCol="0" anchor="ctr"/>
-          <a:lstStyle/>
-          <a:p>
-            <a:endParaRPr lang="en-US"/>
-          </a:p>
-        </p:txBody>
-      </p:sp>
-      <p:sp>
-        <p:nvSpPr>
-          <p:cNvPr id="5" name="Notes Placeholder 4"/>
-          <p:cNvSpPr>
-            <a:spLocks noGrp="1"/>
-          </p:cNvSpPr>
-          <p:nvPr>
-            <p:ph type="body" sz="quarter" idx="3"/>
-          </p:nvPr>
-        </p:nvSpPr>
-        <p:spPr>
-          <a:xfrm>
-            <a:off x="685800" y="4400550"/>
-            <a:ext cx="5486400" cy="3600450"/>
-          </a:xfrm>
-          <a:prstGeom prst="rect">
-            <a:avLst/>
-          </a:prstGeom>
-        </p:spPr>
-        <p:txBody>
-          <a:bodyPr vert="horz" lIns="91440" tIns="45720" rIns="91440" bIns="45720" rtlCol="0"/>
-          <a:lstStyle/>
-          <a:p>
-            <a:pPr lvl="0"/>
-            <a:r>
-              <a:rPr lang="en-US"/>
-              <a:t>Click to edit Master text styles</a:t>
-            </a:r>
-          </a:p>
-          <a:p>
-            <a:pPr lvl="1"/>
-            <a:r>
-              <a:rPr lang="en-US"/>
-              <a:t>Second level</a:t>
-            </a:r>
-          </a:p>
-          <a:p>
-            <a:pPr lvl="2"/>
-            <a:r>
-              <a:rPr lang="en-US"/>
-              <a:t>Third level</a:t>
-            </a:r>
-          </a:p>
-          <a:p>
-            <a:pPr lvl="3"/>
-            <a:r>
-              <a:rPr lang="en-US"/>
-              <a:t>Fourth level</a:t>
-            </a:r>
-          </a:p>
-          <a:p>
-            <a:pPr lvl="4"/>
-            <a:r>
-              <a:rPr lang="en-US"/>
-              <a:t>Fifth level</a:t>
-            </a:r>
-          </a:p>
-        </p:txBody>
-      </p:sp>
-      <p:sp>
-        <p:nvSpPr>
-          <p:cNvPr id="6" name="Footer Placeholder 5"/>
-          <p:cNvSpPr>
-            <a:spLocks noGrp="1"/>
-          </p:cNvSpPr>
-          <p:nvPr>
-            <p:ph type="ftr" sz="quarter" idx="4"/>
-          </p:nvPr>
-        </p:nvSpPr>
-        <p:spPr>
-          <a:xfrm>
-            <a:off x="0" y="8685213"/>
-            <a:ext cx="2971800" cy="458787"/>
-          </a:xfrm>
-          <a:prstGeom prst="rect">
-            <a:avLst/>
-          </a:prstGeom>
-        </p:spPr>
-        <p:txBody>
-          <a:bodyPr vert="horz" lIns="91440" tIns="45720" rIns="91440" bIns="45720" rtlCol="0" anchor="b"/>
-          <a:lstStyle>
-            <a:lvl1pPr algn="l">
-              <a:defRPr sz="1200"/>
-            </a:lvl1pPr>
-          </a:lstStyle>
-          <a:p>
-            <a:endParaRPr lang="en-US"/>
-          </a:p>
-        </p:txBody>
-      </p:sp>
-      <p:sp>
-        <p:nvSpPr>
-          <p:cNvPr id="7" name="Slide Number Placeholder 6"/>
-          <p:cNvSpPr>
-            <a:spLocks noGrp="1"/>
-          </p:cNvSpPr>
-          <p:nvPr>
-            <p:ph type="sldNum" sz="quarter" idx="5"/>
-          </p:nvPr>
-        </p:nvSpPr>
-        <p:spPr>
-          <a:xfrm>
-            <a:off x="3884613" y="8685213"/>
-            <a:ext cx="2971800" cy="458787"/>
-          </a:xfrm>
-          <a:prstGeom prst="rect">
-            <a:avLst/>
-          </a:prstGeom>
-        </p:spPr>
-        <p:txBody>
-          <a:bodyPr vert="horz" lIns="91440" tIns="45720" rIns="91440" bIns="45720" rtlCol="0" anchor="b"/>
-          <a:lstStyle>
-            <a:lvl1pPr algn="r">
-              <a:defRPr sz="1200"/>
-            </a:lvl1pPr>
-          </a:lstStyle>
-          <a:p>
-            <a:fld id="{CE5E9CC1-C706-0F49-92D6-E571CC5EEA8F}" type="slidenum">
-              <a:rPr lang="en-US"/>
-              <a:t>‹#›</a:t>
-            </a:fld>
-            <a:endParaRPr lang="en-US"/>
-          </a:p>
-        </p:txBody>
-      </p:sp>
     </p:spTree>
     <p:extLst>
       <p:ext uri="{BB962C8B-B14F-4D97-AF65-F5344CB8AC3E}">
-        <p14:creationId xmlns:p14="http://schemas.microsoft.com/office/powerpoint/2010/main" val="1024086991"/>
+        <p14:creationId xmlns:p14="http://schemas.microsoft.com/office/powerpoint/2010/main" val="2855720968"/>
       </p:ext>
     </p:extLst>
   </p:cSld>
   <p:clrMap bg1="lt1" tx1="dk1" bg2="lt2" tx2="dk2" accent1="accent1" accent2="accent2" accent3="accent3" accent4="accent4" accent5="accent5" accent6="accent6" hlink="hlink" folHlink="folHlink"/>
   <p:notesStyle>
-    <a:lvl1pPr marL="0" algn="l" defTabSz="914400" rtl="0" eaLnBrk="1" latinLnBrk="0" hangingPunct="1">
+    <a:lvl1pPr marL="0" algn="l" defTabSz="914400" rtl="0" eaLnBrk="1" latinLnBrk="1" hangingPunct="1">
       <a:defRPr sz="1200" kern="1200">
         <a:solidFill>
           <a:schemeClr val="tx1"/>
@@ -393,7 +174,7 @@
         <a:cs typeface="+mn-cs"/>
       </a:defRPr>
     </a:lvl1pPr>
-    <a:lvl2pPr marL="457200" algn="l" defTabSz="914400" rtl="0" eaLnBrk="1" latinLnBrk="0" hangingPunct="1">
+    <a:lvl2pPr marL="457200" algn="l" defTabSz="914400" rtl="0" eaLnBrk="1" latinLnBrk="1" hangingPunct="1">
       <a:defRPr sz="1200" kern="1200">
         <a:solidFill>
           <a:schemeClr val="tx1"/>
@@ -403,7 +184,7 @@
         <a:cs typeface="+mn-cs"/>
       </a:defRPr>
     </a:lvl2pPr>
-    <a:lvl3pPr marL="914400" algn="l" defTabSz="914400" rtl="0" eaLnBrk="1" latinLnBrk="0" hangingPunct="1">
+    <a:lvl3pPr marL="914400" algn="l" defTabSz="914400" rtl="0" eaLnBrk="1" latinLnBrk="1" hangingPunct="1">
       <a:defRPr sz="1200" kern="1200">
         <a:solidFill>
           <a:schemeClr val="tx1"/>
@@ -413,7 +194,7 @@
         <a:cs typeface="+mn-cs"/>
       </a:defRPr>
     </a:lvl3pPr>
-    <a:lvl4pPr marL="1371600" algn="l" defTabSz="914400" rtl="0" eaLnBrk="1" latinLnBrk="0" hangingPunct="1">
+    <a:lvl4pPr marL="1371600" algn="l" defTabSz="914400" rtl="0" eaLnBrk="1" latinLnBrk="1" hangingPunct="1">
       <a:defRPr sz="1200" kern="1200">
         <a:solidFill>
           <a:schemeClr val="tx1"/>
@@ -423,7 +204,7 @@
         <a:cs typeface="+mn-cs"/>
       </a:defRPr>
     </a:lvl4pPr>
-    <a:lvl5pPr marL="1828800" algn="l" defTabSz="914400" rtl="0" eaLnBrk="1" latinLnBrk="0" hangingPunct="1">
+    <a:lvl5pPr marL="1828800" algn="l" defTabSz="914400" rtl="0" eaLnBrk="1" latinLnBrk="1" hangingPunct="1">
       <a:defRPr sz="1200" kern="1200">
         <a:solidFill>
           <a:schemeClr val="tx1"/>
@@ -433,7 +214,7 @@
         <a:cs typeface="+mn-cs"/>
       </a:defRPr>
     </a:lvl5pPr>
-    <a:lvl6pPr marL="2286000" algn="l" defTabSz="914400" rtl="0" eaLnBrk="1" latinLnBrk="0" hangingPunct="1">
+    <a:lvl6pPr marL="2286000" algn="l" defTabSz="914400" rtl="0" eaLnBrk="1" latinLnBrk="1" hangingPunct="1">
       <a:defRPr sz="1200" kern="1200">
         <a:solidFill>
           <a:schemeClr val="tx1"/>
@@ -443,7 +224,7 @@
         <a:cs typeface="+mn-cs"/>
       </a:defRPr>
     </a:lvl6pPr>
-    <a:lvl7pPr marL="2743200" algn="l" defTabSz="914400" rtl="0" eaLnBrk="1" latinLnBrk="0" hangingPunct="1">
+    <a:lvl7pPr marL="2743200" algn="l" defTabSz="914400" rtl="0" eaLnBrk="1" latinLnBrk="1" hangingPunct="1">
       <a:defRPr sz="1200" kern="1200">
         <a:solidFill>
           <a:schemeClr val="tx1"/>
@@ -453,7 +234,7 @@
         <a:cs typeface="+mn-cs"/>
       </a:defRPr>
     </a:lvl7pPr>
-    <a:lvl8pPr marL="3200400" algn="l" defTabSz="914400" rtl="0" eaLnBrk="1" latinLnBrk="0" hangingPunct="1">
+    <a:lvl8pPr marL="3200400" algn="l" defTabSz="914400" rtl="0" eaLnBrk="1" latinLnBrk="1" hangingPunct="1">
       <a:defRPr sz="1200" kern="1200">
         <a:solidFill>
           <a:schemeClr val="tx1"/>
@@ -463,7 +244,7 @@
         <a:cs typeface="+mn-cs"/>
       </a:defRPr>
     </a:lvl8pPr>
-    <a:lvl9pPr marL="3657600" algn="l" defTabSz="914400" rtl="0" eaLnBrk="1" latinLnBrk="0" hangingPunct="1">
+    <a:lvl9pPr marL="3657600" algn="l" defTabSz="914400" rtl="0" eaLnBrk="1" latinLnBrk="1" hangingPunct="1">
       <a:defRPr sz="1200" kern="1200">
         <a:solidFill>
           <a:schemeClr val="tx1"/>
@@ -525,7 +306,6 @@
               <a:rPr lang="en-US" dirty="0"/>
               <a:t>표지. 팀명 다비치, 팀원 이하진·김나연. 멘토(강사) 이름만 확인해 채운다. 기간은 회의록 2026-W27~W32 기준.</a:t>
             </a:r>
-            <a:endParaRPr lang="en-US" dirty="0"/>
           </a:p>
         </p:txBody>
       </p:sp>
@@ -613,7 +393,6 @@
               <a:rPr lang="en-US" dirty="0"/>
               <a:t>ERD 2/2. 주문 상태·주문 유형·결제 수단·결제 상태는 모두 common_code를 참조하는 공통코드 구조다. code_group → common_code → orders/payment/pay_method_cfg 경로를 설명한다.</a:t>
             </a:r>
-            <a:endParaRPr lang="en-US" dirty="0"/>
           </a:p>
         </p:txBody>
       </p:sp>
@@ -701,7 +480,6 @@
               <a:rPr lang="en-US" dirty="0"/>
               <a:t>화면설계서. Figma 화면 흐름 캡처를 확보하면 3개 자리표시자를 교체한다.</a:t>
             </a:r>
-            <a:endParaRPr lang="en-US" dirty="0"/>
           </a:p>
         </p:txBody>
       </p:sp>
@@ -789,7 +567,6 @@
               <a:rPr lang="en-US" dirty="0"/>
               <a:t>메뉴 목록 화면. Kiosk 캡처 2장(기본 목록 / 카테고리 전환 또는 품절 상태)을 넣는다.</a:t>
             </a:r>
-            <a:endParaRPr lang="en-US" dirty="0"/>
           </a:p>
         </p:txBody>
       </p:sp>
@@ -877,7 +654,6 @@
               <a:rPr lang="en-US" dirty="0"/>
               <a:t>메뉴 상세 화면. 옵션 정책(min_select·max_select)과 제외 가능 재료(can_remove)가 화면에 반영되는 지점이다.</a:t>
             </a:r>
-            <a:endParaRPr lang="en-US" dirty="0"/>
           </a:p>
         </p:txBody>
       </p:sp>
@@ -965,7 +741,6 @@
               <a:rPr lang="en-US" dirty="0"/>
               <a:t>장바구니 화면. 결제 API 연결 전이면 "결제 화면으로 이동"까지만 말하고 결제 성공 결과는 언급하지 않는다.</a:t>
             </a:r>
-            <a:endParaRPr lang="en-US" dirty="0"/>
           </a:p>
         </p:txBody>
       </p:sp>
@@ -1053,7 +828,6 @@
               <a:rPr lang="en-US" dirty="0"/>
               <a:t>관리자 주문 관리. Live 주문 또는 주문 관리 화면 캡처를 넣는다.</a:t>
             </a:r>
-            <a:endParaRPr lang="en-US" dirty="0"/>
           </a:p>
         </p:txBody>
       </p:sp>
@@ -1141,7 +915,6 @@
               <a:rPr lang="en-US" dirty="0"/>
               <a:t>관리자 메뉴 관리. 조회만 구현했다면 제목을 "메뉴 정보 조회"로 바꾼다.</a:t>
             </a:r>
-            <a:endParaRPr lang="en-US" dirty="0"/>
           </a:p>
         </p:txBody>
       </p:sp>
@@ -1229,7 +1002,6 @@
               <a:rPr lang="en-US" dirty="0"/>
               <a:t>수행 프로세스. 06 1차 통합을 현재 단계로 강조했다. 실제 진행 단계에 맞춰 강조 위치를 옮긴다.</a:t>
             </a:r>
-            <a:endParaRPr lang="en-US" dirty="0"/>
           </a:p>
         </p:txBody>
       </p:sp>
@@ -1317,7 +1089,6 @@
               <a:rPr lang="en-US" dirty="0"/>
               <a:t>피드백. 4건 모두 회의록에 날짜와 함께 기록된 실제 강사 피드백이다. 8/4 항목의 주문 생성·결제 연동은 아직 진행 중임을 밝힌다.</a:t>
             </a:r>
-            <a:endParaRPr lang="en-US" dirty="0"/>
           </a:p>
         </p:txBody>
       </p:sp>
@@ -1405,7 +1176,6 @@
               <a:rPr lang="en-US" dirty="0"/>
               <a:t>결과물 1/2. 캡처 칸 크기는 동일하게 두고 이미지 비율은 유지한다. 늘려 맞추지 않는다.</a:t>
             </a:r>
-            <a:endParaRPr lang="en-US" dirty="0"/>
           </a:p>
         </p:txBody>
       </p:sp>
@@ -1493,7 +1263,6 @@
               <a:rPr lang="en-US" dirty="0"/>
               <a:t>목차. 5개 섹션은 결과보고서 표준 구성을 따른다.</a:t>
             </a:r>
-            <a:endParaRPr lang="en-US" dirty="0"/>
           </a:p>
         </p:txBody>
       </p:sp>
@@ -1581,7 +1350,6 @@
               <a:rPr lang="en-US" dirty="0"/>
               <a:t>결과물 2/2. 설계·검증 산출물. 실제 확보한 자료만 남기고 나머지 칸은 삭제한다.</a:t>
             </a:r>
-            <a:endParaRPr lang="en-US" dirty="0"/>
           </a:p>
         </p:txBody>
       </p:sp>
@@ -1669,7 +1437,6 @@
               <a:rPr lang="en-US" dirty="0"/>
               <a:t>자체 평가. current-status-baseline.md의 「mock 1차 연결은 DONE이 아니다」 원칙을 그대로 따라 보완할 점을 서술했다. 점수는 넣지 않았다.</a:t>
             </a:r>
-            <a:endParaRPr lang="en-US" dirty="0"/>
           </a:p>
         </p:txBody>
       </p:sp>
@@ -1757,7 +1524,6 @@
               <a:rPr lang="en-US" dirty="0"/>
               <a:t>마무리. 질의응답으로 이어진다.</a:t>
             </a:r>
-            <a:endParaRPr lang="en-US" dirty="0"/>
           </a:p>
         </p:txBody>
       </p:sp>
@@ -1845,7 +1611,6 @@
               <a:rPr lang="en-US" dirty="0"/>
               <a:t>개요. 실제로 구현하지 않은 결제 수단·AI 추천·하드웨어 제어는 쓰지 않는다. 기대 효과는 수치 없이 목표로만 서술한다.</a:t>
             </a:r>
-            <a:endParaRPr lang="en-US" dirty="0"/>
           </a:p>
         </p:txBody>
       </p:sp>
@@ -1933,7 +1698,6 @@
               <a:rPr lang="en-US" dirty="0"/>
               <a:t>팀 구성. WBS 담당 건수와 워크로그 entries 기준으로 작성했다. 이하진 26건 · 김나연 15건.</a:t>
             </a:r>
-            <a:endParaRPr lang="en-US" dirty="0"/>
           </a:p>
         </p:txBody>
       </p:sp>
@@ -2021,7 +1785,6 @@
               <a:rPr lang="en-US" dirty="0"/>
               <a:t>수행 절차. 1~6단계 완료, 7 실서버 연동·8 통합 검증은 진행 중이다. current-status-baseline.md 기준.</a:t>
             </a:r>
-            <a:endParaRPr lang="en-US" dirty="0"/>
           </a:p>
         </p:txBody>
       </p:sp>
@@ -2109,7 +1872,6 @@
               <a:rPr lang="en-US" dirty="0"/>
               <a:t>수행 경과 요약. 이후 7~20쪽에서 각 항목을 상세히 다룬다.</a:t>
             </a:r>
-            <a:endParaRPr lang="en-US" dirty="0"/>
           </a:p>
         </p:txBody>
       </p:sp>
@@ -2197,7 +1959,6 @@
               <a:rPr lang="en-US" dirty="0"/>
               <a:t>활용 기술. 표에 적은 기술은 실제 저장소에서 사용 중인 것만 기재한다.</a:t>
             </a:r>
-            <a:endParaRPr lang="en-US" dirty="0"/>
           </a:p>
         </p:txBody>
       </p:sp>
@@ -2285,7 +2046,6 @@
               <a:rPr lang="en-US" dirty="0"/>
               <a:t>전체 구조. RTOS·임베디드·카드리더기·프린터는 구현 범위가 아니므로 넣지 않았다.</a:t>
             </a:r>
-            <a:endParaRPr lang="en-US" dirty="0"/>
           </a:p>
         </p:txBody>
       </p:sp>
@@ -2373,7 +2133,6 @@
               <a:rPr lang="en-US" dirty="0"/>
               <a:t>ERD 1/2. 아삭_mysql.sql 정본 기준. 전체 24개 테이블 중 메뉴·옵션 핵심 9개만 표시했고 부가 테이블은 하단에 이름으로 남겼다.</a:t>
             </a:r>
-            <a:endParaRPr lang="en-US" dirty="0"/>
           </a:p>
         </p:txBody>
       </p:sp>
@@ -2446,6 +2205,11 @@
 <file path=ppt/slideMasters/slideMaster1.xml><?xml version="1.0" encoding="utf-8"?>
 <p:sldMaster xmlns:a="http://schemas.openxmlformats.org/drawingml/2006/main" xmlns:r="http://schemas.openxmlformats.org/officeDocument/2006/relationships" xmlns:p="http://schemas.openxmlformats.org/presentationml/2006/main">
   <p:cSld>
+    <p:bg>
+      <p:bgRef idx="1001">
+        <a:schemeClr val="bg1"/>
+      </p:bgRef>
+    </p:bg>
     <p:spTree>
       <p:nvGrpSpPr>
         <p:cNvPr id="1" name=""/>
@@ -2728,6 +2492,7 @@
         <a:solidFill>
           <a:srgbClr val="1A1A1A"/>
         </a:solidFill>
+        <a:effectLst/>
       </p:bgPr>
     </p:bg>
     <p:spTree>
@@ -2989,7 +2754,7 @@
           <a:bodyPr wrap="square" lIns="0" tIns="0" rIns="0" bIns="0" rtlCol="0" anchor="t"/>
           <a:lstStyle/>
           <a:p>
-            <a:pPr algn="ctr" indent="0" marL="0">
+            <a:pPr marL="0" indent="0" algn="ctr">
               <a:lnSpc>
                 <a:spcPct val="120000"/>
               </a:lnSpc>
@@ -3031,7 +2796,7 @@
           <a:bodyPr wrap="square" lIns="0" tIns="0" rIns="0" bIns="0" rtlCol="0" anchor="t"/>
           <a:lstStyle/>
           <a:p>
-            <a:pPr algn="ctr" indent="0" marL="0">
+            <a:pPr marL="0" indent="0" algn="ctr">
               <a:lnSpc>
                 <a:spcPct val="120000"/>
               </a:lnSpc>
@@ -3073,7 +2838,7 @@
           <a:bodyPr wrap="square" lIns="0" tIns="0" rIns="0" bIns="0" rtlCol="0" anchor="t"/>
           <a:lstStyle/>
           <a:p>
-            <a:pPr algn="ctr" indent="0" marL="0">
+            <a:pPr marL="0" indent="0" algn="ctr">
               <a:lnSpc>
                 <a:spcPct val="120000"/>
               </a:lnSpc>
@@ -3135,7 +2900,7 @@
           <a:bodyPr wrap="square" lIns="0" tIns="0" rIns="0" bIns="0" rtlCol="0" anchor="t"/>
           <a:lstStyle/>
           <a:p>
-            <a:pPr algn="ctr" indent="0" marL="0">
+            <a:pPr marL="0" indent="0" algn="ctr">
               <a:lnSpc>
                 <a:spcPct val="120000"/>
               </a:lnSpc>
@@ -3177,7 +2942,7 @@
           <a:bodyPr wrap="square" lIns="0" tIns="0" rIns="0" bIns="0" rtlCol="0" anchor="t"/>
           <a:lstStyle/>
           <a:p>
-            <a:pPr algn="ctr" indent="0" marL="0">
+            <a:pPr marL="0" indent="0" algn="ctr">
               <a:lnSpc>
                 <a:spcPct val="120000"/>
               </a:lnSpc>
@@ -3219,7 +2984,7 @@
           <a:bodyPr wrap="square" lIns="0" tIns="0" rIns="0" bIns="0" rtlCol="0" anchor="t"/>
           <a:lstStyle/>
           <a:p>
-            <a:pPr algn="ctr" indent="0" marL="0">
+            <a:pPr marL="0" indent="0" algn="ctr">
               <a:lnSpc>
                 <a:spcPct val="120000"/>
               </a:lnSpc>
@@ -3256,6 +3021,7 @@
         <a:solidFill>
           <a:srgbClr val="FFFFFF"/>
         </a:solidFill>
+        <a:effectLst/>
       </p:bgPr>
     </p:bg>
     <p:spTree>
@@ -3293,7 +3059,7 @@
           <a:bodyPr wrap="square" lIns="0" tIns="0" rIns="0" bIns="0" rtlCol="0" anchor="t"/>
           <a:lstStyle/>
           <a:p>
-            <a:pPr algn="l" indent="0" marL="0">
+            <a:pPr marL="0" indent="0" algn="l">
               <a:lnSpc>
                 <a:spcPct val="120000"/>
               </a:lnSpc>
@@ -3455,7 +3221,7 @@
           <a:bodyPr wrap="square" lIns="0" tIns="0" rIns="0" bIns="0" rtlCol="0" anchor="t"/>
           <a:lstStyle/>
           <a:p>
-            <a:pPr algn="r" indent="0" marL="0">
+            <a:pPr marL="0" indent="0" algn="r">
               <a:lnSpc>
                 <a:spcPct val="120000"/>
               </a:lnSpc>
@@ -3517,7 +3283,7 @@
           <a:bodyPr wrap="square" lIns="0" tIns="0" rIns="0" bIns="0" rtlCol="0" anchor="t"/>
           <a:lstStyle/>
           <a:p>
-            <a:pPr algn="l" indent="0" marL="0">
+            <a:pPr marL="0" indent="0" algn="l">
               <a:lnSpc>
                 <a:spcPct val="120000"/>
               </a:lnSpc>
@@ -3559,7 +3325,7 @@
           <a:bodyPr wrap="square" lIns="0" tIns="0" rIns="0" bIns="0" rtlCol="0" anchor="t"/>
           <a:lstStyle/>
           <a:p>
-            <a:pPr algn="r" indent="0" marL="0">
+            <a:pPr marL="0" indent="0" algn="r">
               <a:lnSpc>
                 <a:spcPct val="120000"/>
               </a:lnSpc>
@@ -3646,7 +3412,7 @@
           <a:bodyPr wrap="square" lIns="0" tIns="0" rIns="0" bIns="0" rtlCol="0" anchor="t"/>
           <a:lstStyle/>
           <a:p>
-            <a:pPr algn="l" indent="0" marL="0">
+            <a:pPr marL="0" indent="0" algn="l">
               <a:lnSpc>
                 <a:spcPct val="120000"/>
               </a:lnSpc>
@@ -3688,7 +3454,7 @@
           <a:bodyPr wrap="square" lIns="0" tIns="0" rIns="0" bIns="0" rtlCol="0" anchor="t"/>
           <a:lstStyle/>
           <a:p>
-            <a:pPr algn="l" indent="0" marL="0">
+            <a:pPr marL="0" indent="0" algn="l">
               <a:lnSpc>
                 <a:spcPct val="120000"/>
               </a:lnSpc>
@@ -3730,7 +3496,7 @@
           <a:bodyPr wrap="square" lIns="0" tIns="0" rIns="0" bIns="0" rtlCol="0" anchor="t"/>
           <a:lstStyle/>
           <a:p>
-            <a:pPr algn="l" indent="0" marL="0">
+            <a:pPr marL="0" indent="0" algn="l">
               <a:lnSpc>
                 <a:spcPct val="120000"/>
               </a:lnSpc>
@@ -3772,7 +3538,7 @@
           <a:bodyPr wrap="square" lIns="0" tIns="0" rIns="0" bIns="0" rtlCol="0" anchor="t"/>
           <a:lstStyle/>
           <a:p>
-            <a:pPr algn="l" indent="0" marL="0">
+            <a:pPr marL="0" indent="0" algn="l">
               <a:lnSpc>
                 <a:spcPct val="120000"/>
               </a:lnSpc>
@@ -3859,7 +3625,7 @@
           <a:bodyPr wrap="square" lIns="0" tIns="0" rIns="0" bIns="0" rtlCol="0" anchor="t"/>
           <a:lstStyle/>
           <a:p>
-            <a:pPr algn="l" indent="0" marL="0">
+            <a:pPr marL="0" indent="0" algn="l">
               <a:lnSpc>
                 <a:spcPct val="120000"/>
               </a:lnSpc>
@@ -3901,7 +3667,7 @@
           <a:bodyPr wrap="square" lIns="0" tIns="0" rIns="0" bIns="0" rtlCol="0" anchor="t"/>
           <a:lstStyle/>
           <a:p>
-            <a:pPr algn="l" indent="0" marL="0">
+            <a:pPr marL="0" indent="0" algn="l">
               <a:lnSpc>
                 <a:spcPct val="120000"/>
               </a:lnSpc>
@@ -3943,7 +3709,7 @@
           <a:bodyPr wrap="square" lIns="0" tIns="0" rIns="0" bIns="0" rtlCol="0" anchor="t"/>
           <a:lstStyle/>
           <a:p>
-            <a:pPr algn="l" indent="0" marL="0">
+            <a:pPr marL="0" indent="0" algn="l">
               <a:lnSpc>
                 <a:spcPct val="120000"/>
               </a:lnSpc>
@@ -3985,7 +3751,7 @@
           <a:bodyPr wrap="square" lIns="0" tIns="0" rIns="0" bIns="0" rtlCol="0" anchor="t"/>
           <a:lstStyle/>
           <a:p>
-            <a:pPr algn="l" indent="0" marL="0">
+            <a:pPr marL="0" indent="0" algn="l">
               <a:lnSpc>
                 <a:spcPct val="120000"/>
               </a:lnSpc>
@@ -4027,7 +3793,7 @@
           <a:bodyPr wrap="square" lIns="0" tIns="0" rIns="0" bIns="0" rtlCol="0" anchor="t"/>
           <a:lstStyle/>
           <a:p>
-            <a:pPr algn="l" indent="0" marL="0">
+            <a:pPr marL="0" indent="0" algn="l">
               <a:lnSpc>
                 <a:spcPct val="120000"/>
               </a:lnSpc>
@@ -4069,7 +3835,7 @@
           <a:bodyPr wrap="square" lIns="0" tIns="0" rIns="0" bIns="0" rtlCol="0" anchor="t"/>
           <a:lstStyle/>
           <a:p>
-            <a:pPr algn="l" indent="0" marL="0">
+            <a:pPr marL="0" indent="0" algn="l">
               <a:lnSpc>
                 <a:spcPct val="120000"/>
               </a:lnSpc>
@@ -4111,7 +3877,7 @@
           <a:bodyPr wrap="square" lIns="0" tIns="0" rIns="0" bIns="0" rtlCol="0" anchor="t"/>
           <a:lstStyle/>
           <a:p>
-            <a:pPr algn="l" indent="0" marL="0">
+            <a:pPr marL="0" indent="0" algn="l">
               <a:lnSpc>
                 <a:spcPct val="120000"/>
               </a:lnSpc>
@@ -4198,7 +3964,7 @@
           <a:bodyPr wrap="square" lIns="0" tIns="0" rIns="0" bIns="0" rtlCol="0" anchor="t"/>
           <a:lstStyle/>
           <a:p>
-            <a:pPr algn="l" indent="0" marL="0">
+            <a:pPr marL="0" indent="0" algn="l">
               <a:lnSpc>
                 <a:spcPct val="120000"/>
               </a:lnSpc>
@@ -4240,7 +4006,7 @@
           <a:bodyPr wrap="square" lIns="0" tIns="0" rIns="0" bIns="0" rtlCol="0" anchor="t"/>
           <a:lstStyle/>
           <a:p>
-            <a:pPr algn="l" indent="0" marL="0">
+            <a:pPr marL="0" indent="0" algn="l">
               <a:lnSpc>
                 <a:spcPct val="120000"/>
               </a:lnSpc>
@@ -4282,7 +4048,7 @@
           <a:bodyPr wrap="square" lIns="0" tIns="0" rIns="0" bIns="0" rtlCol="0" anchor="t"/>
           <a:lstStyle/>
           <a:p>
-            <a:pPr algn="l" indent="0" marL="0">
+            <a:pPr marL="0" indent="0" algn="l">
               <a:lnSpc>
                 <a:spcPct val="120000"/>
               </a:lnSpc>
@@ -4324,7 +4090,7 @@
           <a:bodyPr wrap="square" lIns="0" tIns="0" rIns="0" bIns="0" rtlCol="0" anchor="t"/>
           <a:lstStyle/>
           <a:p>
-            <a:pPr algn="l" indent="0" marL="0">
+            <a:pPr marL="0" indent="0" algn="l">
               <a:lnSpc>
                 <a:spcPct val="120000"/>
               </a:lnSpc>
@@ -4366,7 +4132,7 @@
           <a:bodyPr wrap="square" lIns="0" tIns="0" rIns="0" bIns="0" rtlCol="0" anchor="t"/>
           <a:lstStyle/>
           <a:p>
-            <a:pPr algn="l" indent="0" marL="0">
+            <a:pPr marL="0" indent="0" algn="l">
               <a:lnSpc>
                 <a:spcPct val="120000"/>
               </a:lnSpc>
@@ -4408,7 +4174,7 @@
           <a:bodyPr wrap="square" lIns="0" tIns="0" rIns="0" bIns="0" rtlCol="0" anchor="t"/>
           <a:lstStyle/>
           <a:p>
-            <a:pPr algn="l" indent="0" marL="0">
+            <a:pPr marL="0" indent="0" algn="l">
               <a:lnSpc>
                 <a:spcPct val="120000"/>
               </a:lnSpc>
@@ -4450,7 +4216,7 @@
           <a:bodyPr wrap="square" lIns="0" tIns="0" rIns="0" bIns="0" rtlCol="0" anchor="t"/>
           <a:lstStyle/>
           <a:p>
-            <a:pPr algn="l" indent="0" marL="0">
+            <a:pPr marL="0" indent="0" algn="l">
               <a:lnSpc>
                 <a:spcPct val="120000"/>
               </a:lnSpc>
@@ -4537,7 +4303,7 @@
           <a:bodyPr wrap="square" lIns="0" tIns="0" rIns="0" bIns="0" rtlCol="0" anchor="t"/>
           <a:lstStyle/>
           <a:p>
-            <a:pPr algn="l" indent="0" marL="0">
+            <a:pPr marL="0" indent="0" algn="l">
               <a:lnSpc>
                 <a:spcPct val="120000"/>
               </a:lnSpc>
@@ -4579,7 +4345,7 @@
           <a:bodyPr wrap="square" lIns="0" tIns="0" rIns="0" bIns="0" rtlCol="0" anchor="t"/>
           <a:lstStyle/>
           <a:p>
-            <a:pPr algn="l" indent="0" marL="0">
+            <a:pPr marL="0" indent="0" algn="l">
               <a:lnSpc>
                 <a:spcPct val="120000"/>
               </a:lnSpc>
@@ -4621,7 +4387,7 @@
           <a:bodyPr wrap="square" lIns="0" tIns="0" rIns="0" bIns="0" rtlCol="0" anchor="t"/>
           <a:lstStyle/>
           <a:p>
-            <a:pPr algn="l" indent="0" marL="0">
+            <a:pPr marL="0" indent="0" algn="l">
               <a:lnSpc>
                 <a:spcPct val="120000"/>
               </a:lnSpc>
@@ -4663,7 +4429,7 @@
           <a:bodyPr wrap="square" lIns="0" tIns="0" rIns="0" bIns="0" rtlCol="0" anchor="t"/>
           <a:lstStyle/>
           <a:p>
-            <a:pPr algn="l" indent="0" marL="0">
+            <a:pPr marL="0" indent="0" algn="l">
               <a:lnSpc>
                 <a:spcPct val="120000"/>
               </a:lnSpc>
@@ -4705,7 +4471,7 @@
           <a:bodyPr wrap="square" lIns="0" tIns="0" rIns="0" bIns="0" rtlCol="0" anchor="t"/>
           <a:lstStyle/>
           <a:p>
-            <a:pPr algn="l" indent="0" marL="0">
+            <a:pPr marL="0" indent="0" algn="l">
               <a:lnSpc>
                 <a:spcPct val="120000"/>
               </a:lnSpc>
@@ -4747,7 +4513,7 @@
           <a:bodyPr wrap="square" lIns="0" tIns="0" rIns="0" bIns="0" rtlCol="0" anchor="t"/>
           <a:lstStyle/>
           <a:p>
-            <a:pPr algn="l" indent="0" marL="0">
+            <a:pPr marL="0" indent="0" algn="l">
               <a:lnSpc>
                 <a:spcPct val="120000"/>
               </a:lnSpc>
@@ -4834,7 +4600,7 @@
           <a:bodyPr wrap="square" lIns="0" tIns="0" rIns="0" bIns="0" rtlCol="0" anchor="t"/>
           <a:lstStyle/>
           <a:p>
-            <a:pPr algn="l" indent="0" marL="0">
+            <a:pPr marL="0" indent="0" algn="l">
               <a:lnSpc>
                 <a:spcPct val="120000"/>
               </a:lnSpc>
@@ -4876,7 +4642,7 @@
           <a:bodyPr wrap="square" lIns="0" tIns="0" rIns="0" bIns="0" rtlCol="0" anchor="t"/>
           <a:lstStyle/>
           <a:p>
-            <a:pPr algn="l" indent="0" marL="0">
+            <a:pPr marL="0" indent="0" algn="l">
               <a:lnSpc>
                 <a:spcPct val="120000"/>
               </a:lnSpc>
@@ -4918,7 +4684,7 @@
           <a:bodyPr wrap="square" lIns="0" tIns="0" rIns="0" bIns="0" rtlCol="0" anchor="t"/>
           <a:lstStyle/>
           <a:p>
-            <a:pPr algn="l" indent="0" marL="0">
+            <a:pPr marL="0" indent="0" algn="l">
               <a:lnSpc>
                 <a:spcPct val="120000"/>
               </a:lnSpc>
@@ -4960,7 +4726,7 @@
           <a:bodyPr wrap="square" lIns="0" tIns="0" rIns="0" bIns="0" rtlCol="0" anchor="t"/>
           <a:lstStyle/>
           <a:p>
-            <a:pPr algn="l" indent="0" marL="0">
+            <a:pPr marL="0" indent="0" algn="l">
               <a:lnSpc>
                 <a:spcPct val="120000"/>
               </a:lnSpc>
@@ -5047,7 +4813,7 @@
           <a:bodyPr wrap="square" lIns="0" tIns="0" rIns="0" bIns="0" rtlCol="0" anchor="t"/>
           <a:lstStyle/>
           <a:p>
-            <a:pPr algn="l" indent="0" marL="0">
+            <a:pPr marL="0" indent="0" algn="l">
               <a:lnSpc>
                 <a:spcPct val="120000"/>
               </a:lnSpc>
@@ -5089,7 +4855,7 @@
           <a:bodyPr wrap="square" lIns="0" tIns="0" rIns="0" bIns="0" rtlCol="0" anchor="t"/>
           <a:lstStyle/>
           <a:p>
-            <a:pPr algn="l" indent="0" marL="0">
+            <a:pPr marL="0" indent="0" algn="l">
               <a:lnSpc>
                 <a:spcPct val="120000"/>
               </a:lnSpc>
@@ -5131,7 +4897,7 @@
           <a:bodyPr wrap="square" lIns="0" tIns="0" rIns="0" bIns="0" rtlCol="0" anchor="t"/>
           <a:lstStyle/>
           <a:p>
-            <a:pPr algn="l" indent="0" marL="0">
+            <a:pPr marL="0" indent="0" algn="l">
               <a:lnSpc>
                 <a:spcPct val="120000"/>
               </a:lnSpc>
@@ -5173,7 +4939,7 @@
           <a:bodyPr wrap="square" lIns="0" tIns="0" rIns="0" bIns="0" rtlCol="0" anchor="t"/>
           <a:lstStyle/>
           <a:p>
-            <a:pPr algn="l" indent="0" marL="0">
+            <a:pPr marL="0" indent="0" algn="l">
               <a:lnSpc>
                 <a:spcPct val="120000"/>
               </a:lnSpc>
@@ -5215,7 +4981,7 @@
           <a:bodyPr wrap="square" lIns="0" tIns="0" rIns="0" bIns="0" rtlCol="0" anchor="t"/>
           <a:lstStyle/>
           <a:p>
-            <a:pPr algn="l" indent="0" marL="0">
+            <a:pPr marL="0" indent="0" algn="l">
               <a:lnSpc>
                 <a:spcPct val="120000"/>
               </a:lnSpc>
@@ -5302,7 +5068,7 @@
           <a:bodyPr wrap="square" lIns="0" tIns="0" rIns="0" bIns="0" rtlCol="0" anchor="t"/>
           <a:lstStyle/>
           <a:p>
-            <a:pPr algn="l" indent="0" marL="0">
+            <a:pPr marL="0" indent="0" algn="l">
               <a:lnSpc>
                 <a:spcPct val="120000"/>
               </a:lnSpc>
@@ -5344,7 +5110,7 @@
           <a:bodyPr wrap="square" lIns="0" tIns="0" rIns="0" bIns="0" rtlCol="0" anchor="t"/>
           <a:lstStyle/>
           <a:p>
-            <a:pPr algn="l" indent="0" marL="0">
+            <a:pPr marL="0" indent="0" algn="l">
               <a:lnSpc>
                 <a:spcPct val="120000"/>
               </a:lnSpc>
@@ -5386,7 +5152,7 @@
           <a:bodyPr wrap="square" lIns="0" tIns="0" rIns="0" bIns="0" rtlCol="0" anchor="t"/>
           <a:lstStyle/>
           <a:p>
-            <a:pPr algn="l" indent="0" marL="0">
+            <a:pPr marL="0" indent="0" algn="l">
               <a:lnSpc>
                 <a:spcPct val="120000"/>
               </a:lnSpc>
@@ -5428,7 +5194,7 @@
           <a:bodyPr wrap="square" lIns="0" tIns="0" rIns="0" bIns="0" rtlCol="0" anchor="t"/>
           <a:lstStyle/>
           <a:p>
-            <a:pPr algn="l" indent="0" marL="0">
+            <a:pPr marL="0" indent="0" algn="l">
               <a:lnSpc>
                 <a:spcPct val="120000"/>
               </a:lnSpc>
@@ -5470,7 +5236,7 @@
           <a:bodyPr wrap="square" lIns="0" tIns="0" rIns="0" bIns="0" rtlCol="0" anchor="t"/>
           <a:lstStyle/>
           <a:p>
-            <a:pPr algn="l" indent="0" marL="0">
+            <a:pPr marL="0" indent="0" algn="l">
               <a:lnSpc>
                 <a:spcPct val="120000"/>
               </a:lnSpc>
@@ -5512,7 +5278,7 @@
           <a:bodyPr wrap="square" lIns="0" tIns="0" rIns="0" bIns="0" rtlCol="0" anchor="t"/>
           <a:lstStyle/>
           <a:p>
-            <a:pPr algn="l" indent="0" marL="0">
+            <a:pPr marL="0" indent="0" algn="l">
               <a:lnSpc>
                 <a:spcPct val="120000"/>
               </a:lnSpc>
@@ -5554,7 +5320,7 @@
           <a:bodyPr wrap="square" lIns="0" tIns="0" rIns="0" bIns="0" rtlCol="0" anchor="t"/>
           <a:lstStyle/>
           <a:p>
-            <a:pPr algn="l" indent="0" marL="0">
+            <a:pPr marL="0" indent="0" algn="l">
               <a:lnSpc>
                 <a:spcPct val="120000"/>
               </a:lnSpc>
@@ -5641,7 +5407,7 @@
           <a:bodyPr wrap="square" lIns="0" tIns="0" rIns="0" bIns="0" rtlCol="0" anchor="t"/>
           <a:lstStyle/>
           <a:p>
-            <a:pPr algn="l" indent="0" marL="0">
+            <a:pPr marL="0" indent="0" algn="l">
               <a:lnSpc>
                 <a:spcPct val="120000"/>
               </a:lnSpc>
@@ -5683,7 +5449,7 @@
           <a:bodyPr wrap="square" lIns="0" tIns="0" rIns="0" bIns="0" rtlCol="0" anchor="t"/>
           <a:lstStyle/>
           <a:p>
-            <a:pPr algn="l" indent="0" marL="0">
+            <a:pPr marL="0" indent="0" algn="l">
               <a:lnSpc>
                 <a:spcPct val="120000"/>
               </a:lnSpc>
@@ -5725,7 +5491,7 @@
           <a:bodyPr wrap="square" lIns="0" tIns="0" rIns="0" bIns="0" rtlCol="0" anchor="t"/>
           <a:lstStyle/>
           <a:p>
-            <a:pPr algn="l" indent="0" marL="0">
+            <a:pPr marL="0" indent="0" algn="l">
               <a:lnSpc>
                 <a:spcPct val="120000"/>
               </a:lnSpc>
@@ -5767,7 +5533,7 @@
           <a:bodyPr wrap="square" lIns="0" tIns="0" rIns="0" bIns="0" rtlCol="0" anchor="t"/>
           <a:lstStyle/>
           <a:p>
-            <a:pPr algn="l" indent="0" marL="0">
+            <a:pPr marL="0" indent="0" algn="l">
               <a:lnSpc>
                 <a:spcPct val="120000"/>
               </a:lnSpc>
@@ -5809,7 +5575,7 @@
           <a:bodyPr wrap="square" lIns="0" tIns="0" rIns="0" bIns="0" rtlCol="0" anchor="t"/>
           <a:lstStyle/>
           <a:p>
-            <a:pPr algn="l" indent="0" marL="0">
+            <a:pPr marL="0" indent="0" algn="l">
               <a:lnSpc>
                 <a:spcPct val="120000"/>
               </a:lnSpc>
@@ -5851,7 +5617,7 @@
           <a:bodyPr wrap="square" lIns="0" tIns="0" rIns="0" bIns="0" rtlCol="0" anchor="t"/>
           <a:lstStyle/>
           <a:p>
-            <a:pPr algn="l" indent="0" marL="0">
+            <a:pPr marL="0" indent="0" algn="l">
               <a:lnSpc>
                 <a:spcPct val="120000"/>
               </a:lnSpc>
@@ -5938,7 +5704,7 @@
           <a:bodyPr wrap="square" lIns="0" tIns="0" rIns="0" bIns="0" rtlCol="0" anchor="t"/>
           <a:lstStyle/>
           <a:p>
-            <a:pPr algn="l" indent="0" marL="0">
+            <a:pPr marL="0" indent="0" algn="l">
               <a:lnSpc>
                 <a:spcPct val="120000"/>
               </a:lnSpc>
@@ -5980,7 +5746,7 @@
           <a:bodyPr wrap="square" lIns="0" tIns="0" rIns="0" bIns="0" rtlCol="0" anchor="t"/>
           <a:lstStyle/>
           <a:p>
-            <a:pPr algn="l" indent="0" marL="0">
+            <a:pPr marL="0" indent="0" algn="l">
               <a:lnSpc>
                 <a:spcPct val="120000"/>
               </a:lnSpc>
@@ -6022,7 +5788,7 @@
           <a:bodyPr wrap="square" lIns="0" tIns="0" rIns="0" bIns="0" rtlCol="0" anchor="t"/>
           <a:lstStyle/>
           <a:p>
-            <a:pPr algn="l" indent="0" marL="0">
+            <a:pPr marL="0" indent="0" algn="l">
               <a:lnSpc>
                 <a:spcPct val="120000"/>
               </a:lnSpc>
@@ -6064,7 +5830,7 @@
           <a:bodyPr wrap="square" lIns="0" tIns="0" rIns="0" bIns="0" rtlCol="0" anchor="t"/>
           <a:lstStyle/>
           <a:p>
-            <a:pPr algn="l" indent="0" marL="0">
+            <a:pPr marL="0" indent="0" algn="l">
               <a:lnSpc>
                 <a:spcPct val="120000"/>
               </a:lnSpc>
@@ -6151,7 +5917,7 @@
           <a:bodyPr wrap="square" lIns="0" tIns="0" rIns="0" bIns="0" rtlCol="0" anchor="t"/>
           <a:lstStyle/>
           <a:p>
-            <a:pPr algn="l" indent="0" marL="0">
+            <a:pPr marL="0" indent="0" algn="l">
               <a:lnSpc>
                 <a:spcPct val="120000"/>
               </a:lnSpc>
@@ -6193,7 +5959,7 @@
           <a:bodyPr wrap="square" lIns="0" tIns="0" rIns="0" bIns="0" rtlCol="0" anchor="t"/>
           <a:lstStyle/>
           <a:p>
-            <a:pPr algn="l" indent="0" marL="0">
+            <a:pPr marL="0" indent="0" algn="l">
               <a:lnSpc>
                 <a:spcPct val="120000"/>
               </a:lnSpc>
@@ -6235,7 +6001,7 @@
           <a:bodyPr wrap="square" lIns="0" tIns="0" rIns="0" bIns="0" rtlCol="0" anchor="t"/>
           <a:lstStyle/>
           <a:p>
-            <a:pPr algn="l" indent="0" marL="0">
+            <a:pPr marL="0" indent="0" algn="l">
               <a:lnSpc>
                 <a:spcPct val="120000"/>
               </a:lnSpc>
@@ -6277,7 +6043,7 @@
           <a:bodyPr wrap="square" lIns="0" tIns="0" rIns="0" bIns="0" rtlCol="0" anchor="t"/>
           <a:lstStyle/>
           <a:p>
-            <a:pPr algn="l" indent="0" marL="0">
+            <a:pPr marL="0" indent="0" algn="l">
               <a:lnSpc>
                 <a:spcPct val="120000"/>
               </a:lnSpc>
@@ -6364,7 +6130,7 @@
           <a:bodyPr wrap="square" lIns="0" tIns="0" rIns="0" bIns="0" rtlCol="0" anchor="t"/>
           <a:lstStyle/>
           <a:p>
-            <a:pPr algn="l" indent="0" marL="0">
+            <a:pPr marL="0" indent="0" algn="l">
               <a:lnSpc>
                 <a:spcPct val="120000"/>
               </a:lnSpc>
@@ -6406,7 +6172,7 @@
           <a:bodyPr wrap="square" lIns="0" tIns="0" rIns="0" bIns="0" rtlCol="0" anchor="t"/>
           <a:lstStyle/>
           <a:p>
-            <a:pPr algn="l" indent="0" marL="0">
+            <a:pPr marL="0" indent="0" algn="l">
               <a:lnSpc>
                 <a:spcPct val="120000"/>
               </a:lnSpc>
@@ -6448,7 +6214,7 @@
           <a:bodyPr wrap="square" lIns="0" tIns="0" rIns="0" bIns="0" rtlCol="0" anchor="t"/>
           <a:lstStyle/>
           <a:p>
-            <a:pPr algn="l" indent="0" marL="0">
+            <a:pPr marL="0" indent="0" algn="l">
               <a:lnSpc>
                 <a:spcPct val="120000"/>
               </a:lnSpc>
@@ -6766,7 +6532,7 @@
           <a:bodyPr wrap="square" lIns="0" tIns="0" rIns="0" bIns="0" rtlCol="0" anchor="t"/>
           <a:lstStyle/>
           <a:p>
-            <a:pPr algn="ctr" indent="0" marL="0">
+            <a:pPr marL="0" indent="0" algn="ctr">
               <a:lnSpc>
                 <a:spcPct val="120000"/>
               </a:lnSpc>
@@ -6803,6 +6569,7 @@
         <a:solidFill>
           <a:srgbClr val="FFFFFF"/>
         </a:solidFill>
+        <a:effectLst/>
       </p:bgPr>
     </p:bg>
     <p:spTree>
@@ -6840,7 +6607,7 @@
           <a:bodyPr wrap="square" lIns="0" tIns="0" rIns="0" bIns="0" rtlCol="0" anchor="t"/>
           <a:lstStyle/>
           <a:p>
-            <a:pPr algn="l" indent="0" marL="0">
+            <a:pPr marL="0" indent="0" algn="l">
               <a:lnSpc>
                 <a:spcPct val="130000"/>
               </a:lnSpc>
@@ -6882,7 +6649,7 @@
           <a:bodyPr wrap="square" lIns="0" tIns="0" rIns="0" bIns="0" rtlCol="0" anchor="t"/>
           <a:lstStyle/>
           <a:p>
-            <a:pPr algn="l" indent="0" marL="0">
+            <a:pPr marL="0" indent="0" algn="l">
               <a:lnSpc>
                 <a:spcPct val="120000"/>
               </a:lnSpc>
@@ -7044,7 +6811,7 @@
           <a:bodyPr wrap="square" lIns="0" tIns="0" rIns="0" bIns="0" rtlCol="0" anchor="t"/>
           <a:lstStyle/>
           <a:p>
-            <a:pPr algn="r" indent="0" marL="0">
+            <a:pPr marL="0" indent="0" algn="r">
               <a:lnSpc>
                 <a:spcPct val="120000"/>
               </a:lnSpc>
@@ -7106,7 +6873,7 @@
           <a:bodyPr wrap="square" lIns="0" tIns="0" rIns="0" bIns="0" rtlCol="0" anchor="t"/>
           <a:lstStyle/>
           <a:p>
-            <a:pPr algn="l" indent="0" marL="0">
+            <a:pPr marL="0" indent="0" algn="l">
               <a:lnSpc>
                 <a:spcPct val="120000"/>
               </a:lnSpc>
@@ -7148,7 +6915,7 @@
           <a:bodyPr wrap="square" lIns="0" tIns="0" rIns="0" bIns="0" rtlCol="0" anchor="t"/>
           <a:lstStyle/>
           <a:p>
-            <a:pPr algn="r" indent="0" marL="0">
+            <a:pPr marL="0" indent="0" algn="r">
               <a:lnSpc>
                 <a:spcPct val="120000"/>
               </a:lnSpc>
@@ -7190,7 +6957,7 @@
           <a:bodyPr wrap="square" lIns="0" tIns="0" rIns="0" bIns="0" rtlCol="0" anchor="t"/>
           <a:lstStyle/>
           <a:p>
-            <a:pPr algn="l" indent="0" marL="0">
+            <a:pPr marL="0" indent="0" algn="l">
               <a:lnSpc>
                 <a:spcPct val="120000"/>
               </a:lnSpc>
@@ -7252,7 +7019,7 @@
           <a:bodyPr wrap="square" lIns="0" tIns="0" rIns="0" bIns="0" rtlCol="0" anchor="t"/>
           <a:lstStyle/>
           <a:p>
-            <a:pPr algn="l" indent="0" marL="0">
+            <a:pPr marL="0" indent="0" algn="l">
               <a:lnSpc>
                 <a:spcPct val="145000"/>
               </a:lnSpc>
@@ -7272,7 +7039,7 @@
             <a:endParaRPr lang="en-US" sz="1250" dirty="0"/>
           </a:p>
           <a:p>
-            <a:pPr algn="l" indent="0" marL="0">
+            <a:pPr marL="0" indent="0" algn="l">
               <a:lnSpc>
                 <a:spcPct val="145000"/>
               </a:lnSpc>
@@ -7292,7 +7059,7 @@
             <a:endParaRPr lang="en-US" sz="1250" dirty="0"/>
           </a:p>
           <a:p>
-            <a:pPr algn="l" indent="0" marL="0">
+            <a:pPr marL="0" indent="0" algn="l">
               <a:lnSpc>
                 <a:spcPct val="145000"/>
               </a:lnSpc>
@@ -7334,7 +7101,7 @@
           <a:bodyPr wrap="square" lIns="0" tIns="0" rIns="0" bIns="0" rtlCol="0" anchor="t"/>
           <a:lstStyle/>
           <a:p>
-            <a:pPr algn="l" indent="0" marL="0">
+            <a:pPr marL="0" indent="0" algn="l">
               <a:lnSpc>
                 <a:spcPct val="145000"/>
               </a:lnSpc>
@@ -7354,7 +7121,7 @@
             <a:endParaRPr lang="en-US" sz="1250" dirty="0"/>
           </a:p>
           <a:p>
-            <a:pPr algn="l" indent="0" marL="0">
+            <a:pPr marL="0" indent="0" algn="l">
               <a:lnSpc>
                 <a:spcPct val="145000"/>
               </a:lnSpc>
@@ -7421,7 +7188,7 @@
           <a:bodyPr wrap="square" lIns="0" tIns="0" rIns="0" bIns="0" rtlCol="0" anchor="t"/>
           <a:lstStyle/>
           <a:p>
-            <a:pPr algn="ctr" indent="0" marL="0">
+            <a:pPr marL="0" indent="0" algn="ctr">
               <a:lnSpc>
                 <a:spcPct val="120000"/>
               </a:lnSpc>
@@ -7488,7 +7255,7 @@
           <a:bodyPr wrap="square" lIns="0" tIns="0" rIns="0" bIns="0" rtlCol="0" anchor="t"/>
           <a:lstStyle/>
           <a:p>
-            <a:pPr algn="ctr" indent="0" marL="0">
+            <a:pPr marL="0" indent="0" algn="ctr">
               <a:lnSpc>
                 <a:spcPct val="120000"/>
               </a:lnSpc>
@@ -7555,7 +7322,7 @@
           <a:bodyPr wrap="square" lIns="0" tIns="0" rIns="0" bIns="0" rtlCol="0" anchor="t"/>
           <a:lstStyle/>
           <a:p>
-            <a:pPr algn="ctr" indent="0" marL="0">
+            <a:pPr marL="0" indent="0" algn="ctr">
               <a:lnSpc>
                 <a:spcPct val="120000"/>
               </a:lnSpc>
@@ -7642,7 +7409,7 @@
           <a:bodyPr wrap="square" lIns="0" tIns="0" rIns="0" bIns="0" rtlCol="0" anchor="t"/>
           <a:lstStyle/>
           <a:p>
-            <a:pPr algn="ctr" indent="0" marL="0">
+            <a:pPr marL="0" indent="0" algn="ctr">
               <a:lnSpc>
                 <a:spcPct val="120000"/>
               </a:lnSpc>
@@ -7684,7 +7451,7 @@
           <a:bodyPr wrap="square" lIns="0" tIns="0" rIns="0" bIns="0" rtlCol="0" anchor="t"/>
           <a:lstStyle/>
           <a:p>
-            <a:pPr algn="ctr" indent="0" marL="0">
+            <a:pPr marL="0" indent="0" algn="ctr">
               <a:lnSpc>
                 <a:spcPct val="120000"/>
               </a:lnSpc>
@@ -7771,7 +7538,7 @@
           <a:bodyPr wrap="square" lIns="0" tIns="0" rIns="0" bIns="0" rtlCol="0" anchor="t"/>
           <a:lstStyle/>
           <a:p>
-            <a:pPr algn="ctr" indent="0" marL="0">
+            <a:pPr marL="0" indent="0" algn="ctr">
               <a:lnSpc>
                 <a:spcPct val="120000"/>
               </a:lnSpc>
@@ -7813,7 +7580,7 @@
           <a:bodyPr wrap="square" lIns="0" tIns="0" rIns="0" bIns="0" rtlCol="0" anchor="t"/>
           <a:lstStyle/>
           <a:p>
-            <a:pPr algn="ctr" indent="0" marL="0">
+            <a:pPr marL="0" indent="0" algn="ctr">
               <a:lnSpc>
                 <a:spcPct val="120000"/>
               </a:lnSpc>
@@ -7900,7 +7667,7 @@
           <a:bodyPr wrap="square" lIns="0" tIns="0" rIns="0" bIns="0" rtlCol="0" anchor="t"/>
           <a:lstStyle/>
           <a:p>
-            <a:pPr algn="ctr" indent="0" marL="0">
+            <a:pPr marL="0" indent="0" algn="ctr">
               <a:lnSpc>
                 <a:spcPct val="120000"/>
               </a:lnSpc>
@@ -7942,7 +7709,7 @@
           <a:bodyPr wrap="square" lIns="0" tIns="0" rIns="0" bIns="0" rtlCol="0" anchor="t"/>
           <a:lstStyle/>
           <a:p>
-            <a:pPr algn="ctr" indent="0" marL="0">
+            <a:pPr marL="0" indent="0" algn="ctr">
               <a:lnSpc>
                 <a:spcPct val="120000"/>
               </a:lnSpc>
@@ -7984,7 +7751,7 @@
           <a:bodyPr wrap="square" lIns="0" tIns="0" rIns="0" bIns="0" rtlCol="0" anchor="t"/>
           <a:lstStyle/>
           <a:p>
-            <a:pPr algn="ctr" indent="0" marL="0">
+            <a:pPr marL="0" indent="0" algn="ctr">
               <a:lnSpc>
                 <a:spcPct val="120000"/>
               </a:lnSpc>
@@ -8046,7 +7813,7 @@
           <a:bodyPr wrap="square" lIns="0" tIns="0" rIns="0" bIns="0" rtlCol="0" anchor="t"/>
           <a:lstStyle/>
           <a:p>
-            <a:pPr algn="l" indent="0" marL="0">
+            <a:pPr marL="0" indent="0" algn="l">
               <a:lnSpc>
                 <a:spcPct val="120000"/>
               </a:lnSpc>
@@ -8083,6 +7850,7 @@
         <a:solidFill>
           <a:srgbClr val="FFFFFF"/>
         </a:solidFill>
+        <a:effectLst/>
       </p:bgPr>
     </p:bg>
     <p:spTree>
@@ -8120,7 +7888,7 @@
           <a:bodyPr wrap="square" lIns="0" tIns="0" rIns="0" bIns="0" rtlCol="0" anchor="t"/>
           <a:lstStyle/>
           <a:p>
-            <a:pPr algn="l" indent="0" marL="0">
+            <a:pPr marL="0" indent="0" algn="l">
               <a:lnSpc>
                 <a:spcPct val="130000"/>
               </a:lnSpc>
@@ -8162,7 +7930,7 @@
           <a:bodyPr wrap="square" lIns="0" tIns="0" rIns="0" bIns="0" rtlCol="0" anchor="t"/>
           <a:lstStyle/>
           <a:p>
-            <a:pPr algn="l" indent="0" marL="0">
+            <a:pPr marL="0" indent="0" algn="l">
               <a:lnSpc>
                 <a:spcPct val="120000"/>
               </a:lnSpc>
@@ -8324,7 +8092,7 @@
           <a:bodyPr wrap="square" lIns="0" tIns="0" rIns="0" bIns="0" rtlCol="0" anchor="t"/>
           <a:lstStyle/>
           <a:p>
-            <a:pPr algn="r" indent="0" marL="0">
+            <a:pPr marL="0" indent="0" algn="r">
               <a:lnSpc>
                 <a:spcPct val="120000"/>
               </a:lnSpc>
@@ -8386,7 +8154,7 @@
           <a:bodyPr wrap="square" lIns="0" tIns="0" rIns="0" bIns="0" rtlCol="0" anchor="t"/>
           <a:lstStyle/>
           <a:p>
-            <a:pPr algn="l" indent="0" marL="0">
+            <a:pPr marL="0" indent="0" algn="l">
               <a:lnSpc>
                 <a:spcPct val="120000"/>
               </a:lnSpc>
@@ -8428,7 +8196,7 @@
           <a:bodyPr wrap="square" lIns="0" tIns="0" rIns="0" bIns="0" rtlCol="0" anchor="t"/>
           <a:lstStyle/>
           <a:p>
-            <a:pPr algn="r" indent="0" marL="0">
+            <a:pPr marL="0" indent="0" algn="r">
               <a:lnSpc>
                 <a:spcPct val="120000"/>
               </a:lnSpc>
@@ -8470,7 +8238,7 @@
           <a:bodyPr wrap="square" lIns="0" tIns="0" rIns="0" bIns="0" rtlCol="0" anchor="t"/>
           <a:lstStyle/>
           <a:p>
-            <a:pPr algn="l" indent="0" marL="0">
+            <a:pPr marL="0" indent="0" algn="l">
               <a:lnSpc>
                 <a:spcPct val="120000"/>
               </a:lnSpc>
@@ -8532,7 +8300,7 @@
           <a:bodyPr wrap="square" lIns="0" tIns="0" rIns="0" bIns="0" rtlCol="0" anchor="t"/>
           <a:lstStyle/>
           <a:p>
-            <a:pPr algn="l" indent="0" marL="0">
+            <a:pPr marL="0" indent="0" algn="l">
               <a:lnSpc>
                 <a:spcPct val="145000"/>
               </a:lnSpc>
@@ -8552,7 +8320,7 @@
             <a:endParaRPr lang="en-US" sz="1300" dirty="0"/>
           </a:p>
           <a:p>
-            <a:pPr algn="l" indent="0" marL="0">
+            <a:pPr marL="0" indent="0" algn="l">
               <a:lnSpc>
                 <a:spcPct val="145000"/>
               </a:lnSpc>
@@ -8594,7 +8362,7 @@
           <a:bodyPr wrap="square" lIns="0" tIns="0" rIns="0" bIns="0" rtlCol="0" anchor="t"/>
           <a:lstStyle/>
           <a:p>
-            <a:pPr algn="l" indent="0" marL="0">
+            <a:pPr marL="0" indent="0" algn="l">
               <a:lnSpc>
                 <a:spcPct val="145000"/>
               </a:lnSpc>
@@ -8614,7 +8382,7 @@
             <a:endParaRPr lang="en-US" sz="1300" dirty="0"/>
           </a:p>
           <a:p>
-            <a:pPr algn="l" indent="0" marL="0">
+            <a:pPr marL="0" indent="0" algn="l">
               <a:lnSpc>
                 <a:spcPct val="145000"/>
               </a:lnSpc>
@@ -8681,7 +8449,7 @@
           <a:bodyPr wrap="square" lIns="0" tIns="0" rIns="0" bIns="0" rtlCol="0" anchor="t"/>
           <a:lstStyle/>
           <a:p>
-            <a:pPr algn="l" indent="0" marL="0">
+            <a:pPr marL="0" indent="0" algn="l">
               <a:lnSpc>
                 <a:spcPct val="145000"/>
               </a:lnSpc>
@@ -8701,7 +8469,7 @@
             <a:endParaRPr lang="en-US" sz="1200" dirty="0"/>
           </a:p>
           <a:p>
-            <a:pPr algn="l" indent="0" marL="0">
+            <a:pPr marL="0" indent="0" algn="l">
               <a:lnSpc>
                 <a:spcPct val="145000"/>
               </a:lnSpc>
@@ -8788,7 +8556,7 @@
           <a:bodyPr wrap="square" lIns="0" tIns="0" rIns="0" bIns="0" rtlCol="0" anchor="t"/>
           <a:lstStyle/>
           <a:p>
-            <a:pPr algn="ctr" indent="0" marL="0">
+            <a:pPr marL="0" indent="0" algn="ctr">
               <a:lnSpc>
                 <a:spcPct val="120000"/>
               </a:lnSpc>
@@ -8830,7 +8598,7 @@
           <a:bodyPr wrap="square" lIns="0" tIns="0" rIns="0" bIns="0" rtlCol="0" anchor="t"/>
           <a:lstStyle/>
           <a:p>
-            <a:pPr algn="ctr" indent="0" marL="0">
+            <a:pPr marL="0" indent="0" algn="ctr">
               <a:lnSpc>
                 <a:spcPct val="120000"/>
               </a:lnSpc>
@@ -8897,7 +8665,7 @@
           <a:bodyPr wrap="square" lIns="0" tIns="0" rIns="0" bIns="0" rtlCol="0" anchor="t"/>
           <a:lstStyle/>
           <a:p>
-            <a:pPr algn="ctr" indent="0" marL="0">
+            <a:pPr marL="0" indent="0" algn="ctr">
               <a:lnSpc>
                 <a:spcPct val="120000"/>
               </a:lnSpc>
@@ -8939,7 +8707,7 @@
           <a:bodyPr wrap="square" lIns="0" tIns="0" rIns="0" bIns="0" rtlCol="0" anchor="t"/>
           <a:lstStyle/>
           <a:p>
-            <a:pPr algn="ctr" indent="0" marL="0">
+            <a:pPr marL="0" indent="0" algn="ctr">
               <a:lnSpc>
                 <a:spcPct val="120000"/>
               </a:lnSpc>
@@ -8981,7 +8749,7 @@
           <a:bodyPr wrap="square" lIns="0" tIns="0" rIns="0" bIns="0" rtlCol="0" anchor="t"/>
           <a:lstStyle/>
           <a:p>
-            <a:pPr algn="ctr" indent="0" marL="0">
+            <a:pPr marL="0" indent="0" algn="ctr">
               <a:lnSpc>
                 <a:spcPct val="120000"/>
               </a:lnSpc>
@@ -9043,7 +8811,7 @@
           <a:bodyPr wrap="square" lIns="0" tIns="0" rIns="0" bIns="0" rtlCol="0" anchor="t"/>
           <a:lstStyle/>
           <a:p>
-            <a:pPr algn="l" indent="0" marL="0">
+            <a:pPr marL="0" indent="0" algn="l">
               <a:lnSpc>
                 <a:spcPct val="120000"/>
               </a:lnSpc>
@@ -9080,6 +8848,7 @@
         <a:solidFill>
           <a:srgbClr val="FFFFFF"/>
         </a:solidFill>
+        <a:effectLst/>
       </p:bgPr>
     </p:bg>
     <p:spTree>
@@ -9117,7 +8886,7 @@
           <a:bodyPr wrap="square" lIns="0" tIns="0" rIns="0" bIns="0" rtlCol="0" anchor="t"/>
           <a:lstStyle/>
           <a:p>
-            <a:pPr algn="l" indent="0" marL="0">
+            <a:pPr marL="0" indent="0" algn="l">
               <a:lnSpc>
                 <a:spcPct val="130000"/>
               </a:lnSpc>
@@ -9159,7 +8928,7 @@
           <a:bodyPr wrap="square" lIns="0" tIns="0" rIns="0" bIns="0" rtlCol="0" anchor="t"/>
           <a:lstStyle/>
           <a:p>
-            <a:pPr algn="l" indent="0" marL="0">
+            <a:pPr marL="0" indent="0" algn="l">
               <a:lnSpc>
                 <a:spcPct val="120000"/>
               </a:lnSpc>
@@ -9321,7 +9090,7 @@
           <a:bodyPr wrap="square" lIns="0" tIns="0" rIns="0" bIns="0" rtlCol="0" anchor="t"/>
           <a:lstStyle/>
           <a:p>
-            <a:pPr algn="r" indent="0" marL="0">
+            <a:pPr marL="0" indent="0" algn="r">
               <a:lnSpc>
                 <a:spcPct val="120000"/>
               </a:lnSpc>
@@ -9383,7 +9152,7 @@
           <a:bodyPr wrap="square" lIns="0" tIns="0" rIns="0" bIns="0" rtlCol="0" anchor="t"/>
           <a:lstStyle/>
           <a:p>
-            <a:pPr algn="l" indent="0" marL="0">
+            <a:pPr marL="0" indent="0" algn="l">
               <a:lnSpc>
                 <a:spcPct val="120000"/>
               </a:lnSpc>
@@ -9425,7 +9194,7 @@
           <a:bodyPr wrap="square" lIns="0" tIns="0" rIns="0" bIns="0" rtlCol="0" anchor="t"/>
           <a:lstStyle/>
           <a:p>
-            <a:pPr algn="r" indent="0" marL="0">
+            <a:pPr marL="0" indent="0" algn="r">
               <a:lnSpc>
                 <a:spcPct val="120000"/>
               </a:lnSpc>
@@ -9467,7 +9236,7 @@
           <a:bodyPr wrap="square" lIns="0" tIns="0" rIns="0" bIns="0" rtlCol="0" anchor="t"/>
           <a:lstStyle/>
           <a:p>
-            <a:pPr algn="l" indent="0" marL="0">
+            <a:pPr marL="0" indent="0" algn="l">
               <a:lnSpc>
                 <a:spcPct val="120000"/>
               </a:lnSpc>
@@ -9529,7 +9298,7 @@
           <a:bodyPr wrap="square" lIns="0" tIns="0" rIns="0" bIns="0" rtlCol="0" anchor="t"/>
           <a:lstStyle/>
           <a:p>
-            <a:pPr algn="l" indent="0" marL="0">
+            <a:pPr marL="0" indent="0" algn="l">
               <a:lnSpc>
                 <a:spcPct val="145000"/>
               </a:lnSpc>
@@ -9549,7 +9318,7 @@
             <a:endParaRPr lang="en-US" sz="1300" dirty="0"/>
           </a:p>
           <a:p>
-            <a:pPr algn="l" indent="0" marL="0">
+            <a:pPr marL="0" indent="0" algn="l">
               <a:lnSpc>
                 <a:spcPct val="145000"/>
               </a:lnSpc>
@@ -9591,7 +9360,7 @@
           <a:bodyPr wrap="square" lIns="0" tIns="0" rIns="0" bIns="0" rtlCol="0" anchor="t"/>
           <a:lstStyle/>
           <a:p>
-            <a:pPr algn="l" indent="0" marL="0">
+            <a:pPr marL="0" indent="0" algn="l">
               <a:lnSpc>
                 <a:spcPct val="145000"/>
               </a:lnSpc>
@@ -9611,7 +9380,7 @@
             <a:endParaRPr lang="en-US" sz="1300" dirty="0"/>
           </a:p>
           <a:p>
-            <a:pPr algn="l" indent="0" marL="0">
+            <a:pPr marL="0" indent="0" algn="l">
               <a:lnSpc>
                 <a:spcPct val="145000"/>
               </a:lnSpc>
@@ -9678,7 +9447,7 @@
           <a:bodyPr wrap="square" lIns="0" tIns="0" rIns="0" bIns="0" rtlCol="0" anchor="t"/>
           <a:lstStyle/>
           <a:p>
-            <a:pPr algn="l" indent="0" marL="0">
+            <a:pPr marL="0" indent="0" algn="l">
               <a:lnSpc>
                 <a:spcPct val="145000"/>
               </a:lnSpc>
@@ -9698,7 +9467,7 @@
             <a:endParaRPr lang="en-US" sz="1200" dirty="0"/>
           </a:p>
           <a:p>
-            <a:pPr algn="l" indent="0" marL="0">
+            <a:pPr marL="0" indent="0" algn="l">
               <a:lnSpc>
                 <a:spcPct val="145000"/>
               </a:lnSpc>
@@ -9785,7 +9554,7 @@
           <a:bodyPr wrap="square" lIns="0" tIns="0" rIns="0" bIns="0" rtlCol="0" anchor="t"/>
           <a:lstStyle/>
           <a:p>
-            <a:pPr algn="ctr" indent="0" marL="0">
+            <a:pPr marL="0" indent="0" algn="ctr">
               <a:lnSpc>
                 <a:spcPct val="120000"/>
               </a:lnSpc>
@@ -9827,7 +9596,7 @@
           <a:bodyPr wrap="square" lIns="0" tIns="0" rIns="0" bIns="0" rtlCol="0" anchor="t"/>
           <a:lstStyle/>
           <a:p>
-            <a:pPr algn="ctr" indent="0" marL="0">
+            <a:pPr marL="0" indent="0" algn="ctr">
               <a:lnSpc>
                 <a:spcPct val="120000"/>
               </a:lnSpc>
@@ -9894,7 +9663,7 @@
           <a:bodyPr wrap="square" lIns="0" tIns="0" rIns="0" bIns="0" rtlCol="0" anchor="t"/>
           <a:lstStyle/>
           <a:p>
-            <a:pPr algn="ctr" indent="0" marL="0">
+            <a:pPr marL="0" indent="0" algn="ctr">
               <a:lnSpc>
                 <a:spcPct val="120000"/>
               </a:lnSpc>
@@ -9936,7 +9705,7 @@
           <a:bodyPr wrap="square" lIns="0" tIns="0" rIns="0" bIns="0" rtlCol="0" anchor="t"/>
           <a:lstStyle/>
           <a:p>
-            <a:pPr algn="ctr" indent="0" marL="0">
+            <a:pPr marL="0" indent="0" algn="ctr">
               <a:lnSpc>
                 <a:spcPct val="120000"/>
               </a:lnSpc>
@@ -9978,7 +9747,7 @@
           <a:bodyPr wrap="square" lIns="0" tIns="0" rIns="0" bIns="0" rtlCol="0" anchor="t"/>
           <a:lstStyle/>
           <a:p>
-            <a:pPr algn="ctr" indent="0" marL="0">
+            <a:pPr marL="0" indent="0" algn="ctr">
               <a:lnSpc>
                 <a:spcPct val="120000"/>
               </a:lnSpc>
@@ -10040,7 +9809,7 @@
           <a:bodyPr wrap="square" lIns="0" tIns="0" rIns="0" bIns="0" rtlCol="0" anchor="t"/>
           <a:lstStyle/>
           <a:p>
-            <a:pPr algn="l" indent="0" marL="0">
+            <a:pPr marL="0" indent="0" algn="l">
               <a:lnSpc>
                 <a:spcPct val="120000"/>
               </a:lnSpc>
@@ -10077,6 +9846,7 @@
         <a:solidFill>
           <a:srgbClr val="FFFFFF"/>
         </a:solidFill>
+        <a:effectLst/>
       </p:bgPr>
     </p:bg>
     <p:spTree>
@@ -10114,7 +9884,7 @@
           <a:bodyPr wrap="square" lIns="0" tIns="0" rIns="0" bIns="0" rtlCol="0" anchor="t"/>
           <a:lstStyle/>
           <a:p>
-            <a:pPr algn="l" indent="0" marL="0">
+            <a:pPr marL="0" indent="0" algn="l">
               <a:lnSpc>
                 <a:spcPct val="130000"/>
               </a:lnSpc>
@@ -10156,7 +9926,7 @@
           <a:bodyPr wrap="square" lIns="0" tIns="0" rIns="0" bIns="0" rtlCol="0" anchor="t"/>
           <a:lstStyle/>
           <a:p>
-            <a:pPr algn="l" indent="0" marL="0">
+            <a:pPr marL="0" indent="0" algn="l">
               <a:lnSpc>
                 <a:spcPct val="120000"/>
               </a:lnSpc>
@@ -10318,7 +10088,7 @@
           <a:bodyPr wrap="square" lIns="0" tIns="0" rIns="0" bIns="0" rtlCol="0" anchor="t"/>
           <a:lstStyle/>
           <a:p>
-            <a:pPr algn="r" indent="0" marL="0">
+            <a:pPr marL="0" indent="0" algn="r">
               <a:lnSpc>
                 <a:spcPct val="120000"/>
               </a:lnSpc>
@@ -10380,7 +10150,7 @@
           <a:bodyPr wrap="square" lIns="0" tIns="0" rIns="0" bIns="0" rtlCol="0" anchor="t"/>
           <a:lstStyle/>
           <a:p>
-            <a:pPr algn="l" indent="0" marL="0">
+            <a:pPr marL="0" indent="0" algn="l">
               <a:lnSpc>
                 <a:spcPct val="120000"/>
               </a:lnSpc>
@@ -10422,7 +10192,7 @@
           <a:bodyPr wrap="square" lIns="0" tIns="0" rIns="0" bIns="0" rtlCol="0" anchor="t"/>
           <a:lstStyle/>
           <a:p>
-            <a:pPr algn="r" indent="0" marL="0">
+            <a:pPr marL="0" indent="0" algn="r">
               <a:lnSpc>
                 <a:spcPct val="120000"/>
               </a:lnSpc>
@@ -10464,7 +10234,7 @@
           <a:bodyPr wrap="square" lIns="0" tIns="0" rIns="0" bIns="0" rtlCol="0" anchor="t"/>
           <a:lstStyle/>
           <a:p>
-            <a:pPr algn="l" indent="0" marL="0">
+            <a:pPr marL="0" indent="0" algn="l">
               <a:lnSpc>
                 <a:spcPct val="120000"/>
               </a:lnSpc>
@@ -10526,7 +10296,7 @@
           <a:bodyPr wrap="square" lIns="0" tIns="0" rIns="0" bIns="0" rtlCol="0" anchor="t"/>
           <a:lstStyle/>
           <a:p>
-            <a:pPr algn="l" indent="0" marL="0">
+            <a:pPr marL="0" indent="0" algn="l">
               <a:lnSpc>
                 <a:spcPct val="145000"/>
               </a:lnSpc>
@@ -10546,7 +10316,7 @@
             <a:endParaRPr lang="en-US" sz="1300" dirty="0"/>
           </a:p>
           <a:p>
-            <a:pPr algn="l" indent="0" marL="0">
+            <a:pPr marL="0" indent="0" algn="l">
               <a:lnSpc>
                 <a:spcPct val="145000"/>
               </a:lnSpc>
@@ -10588,7 +10358,7 @@
           <a:bodyPr wrap="square" lIns="0" tIns="0" rIns="0" bIns="0" rtlCol="0" anchor="t"/>
           <a:lstStyle/>
           <a:p>
-            <a:pPr algn="l" indent="0" marL="0">
+            <a:pPr marL="0" indent="0" algn="l">
               <a:lnSpc>
                 <a:spcPct val="145000"/>
               </a:lnSpc>
@@ -10608,7 +10378,7 @@
             <a:endParaRPr lang="en-US" sz="1300" dirty="0"/>
           </a:p>
           <a:p>
-            <a:pPr algn="l" indent="0" marL="0">
+            <a:pPr marL="0" indent="0" algn="l">
               <a:lnSpc>
                 <a:spcPct val="145000"/>
               </a:lnSpc>
@@ -10675,7 +10445,7 @@
           <a:bodyPr wrap="square" lIns="0" tIns="0" rIns="0" bIns="0" rtlCol="0" anchor="t"/>
           <a:lstStyle/>
           <a:p>
-            <a:pPr algn="l" indent="0" marL="0">
+            <a:pPr marL="0" indent="0" algn="l">
               <a:lnSpc>
                 <a:spcPct val="145000"/>
               </a:lnSpc>
@@ -10695,7 +10465,7 @@
             <a:endParaRPr lang="en-US" sz="1200" dirty="0"/>
           </a:p>
           <a:p>
-            <a:pPr algn="l" indent="0" marL="0">
+            <a:pPr marL="0" indent="0" algn="l">
               <a:lnSpc>
                 <a:spcPct val="145000"/>
               </a:lnSpc>
@@ -10782,7 +10552,7 @@
           <a:bodyPr wrap="square" lIns="0" tIns="0" rIns="0" bIns="0" rtlCol="0" anchor="t"/>
           <a:lstStyle/>
           <a:p>
-            <a:pPr algn="ctr" indent="0" marL="0">
+            <a:pPr marL="0" indent="0" algn="ctr">
               <a:lnSpc>
                 <a:spcPct val="120000"/>
               </a:lnSpc>
@@ -10824,7 +10594,7 @@
           <a:bodyPr wrap="square" lIns="0" tIns="0" rIns="0" bIns="0" rtlCol="0" anchor="t"/>
           <a:lstStyle/>
           <a:p>
-            <a:pPr algn="ctr" indent="0" marL="0">
+            <a:pPr marL="0" indent="0" algn="ctr">
               <a:lnSpc>
                 <a:spcPct val="120000"/>
               </a:lnSpc>
@@ -10891,7 +10661,7 @@
           <a:bodyPr wrap="square" lIns="0" tIns="0" rIns="0" bIns="0" rtlCol="0" anchor="t"/>
           <a:lstStyle/>
           <a:p>
-            <a:pPr algn="ctr" indent="0" marL="0">
+            <a:pPr marL="0" indent="0" algn="ctr">
               <a:lnSpc>
                 <a:spcPct val="120000"/>
               </a:lnSpc>
@@ -10933,7 +10703,7 @@
           <a:bodyPr wrap="square" lIns="0" tIns="0" rIns="0" bIns="0" rtlCol="0" anchor="t"/>
           <a:lstStyle/>
           <a:p>
-            <a:pPr algn="ctr" indent="0" marL="0">
+            <a:pPr marL="0" indent="0" algn="ctr">
               <a:lnSpc>
                 <a:spcPct val="120000"/>
               </a:lnSpc>
@@ -10975,7 +10745,7 @@
           <a:bodyPr wrap="square" lIns="0" tIns="0" rIns="0" bIns="0" rtlCol="0" anchor="t"/>
           <a:lstStyle/>
           <a:p>
-            <a:pPr algn="ctr" indent="0" marL="0">
+            <a:pPr marL="0" indent="0" algn="ctr">
               <a:lnSpc>
                 <a:spcPct val="120000"/>
               </a:lnSpc>
@@ -11037,7 +10807,7 @@
           <a:bodyPr wrap="square" lIns="0" tIns="0" rIns="0" bIns="0" rtlCol="0" anchor="t"/>
           <a:lstStyle/>
           <a:p>
-            <a:pPr algn="l" indent="0" marL="0">
+            <a:pPr marL="0" indent="0" algn="l">
               <a:lnSpc>
                 <a:spcPct val="120000"/>
               </a:lnSpc>
@@ -11074,6 +10844,7 @@
         <a:solidFill>
           <a:srgbClr val="FFFFFF"/>
         </a:solidFill>
+        <a:effectLst/>
       </p:bgPr>
     </p:bg>
     <p:spTree>
@@ -11111,7 +10882,7 @@
           <a:bodyPr wrap="square" lIns="0" tIns="0" rIns="0" bIns="0" rtlCol="0" anchor="t"/>
           <a:lstStyle/>
           <a:p>
-            <a:pPr algn="l" indent="0" marL="0">
+            <a:pPr marL="0" indent="0" algn="l">
               <a:lnSpc>
                 <a:spcPct val="130000"/>
               </a:lnSpc>
@@ -11153,7 +10924,7 @@
           <a:bodyPr wrap="square" lIns="0" tIns="0" rIns="0" bIns="0" rtlCol="0" anchor="t"/>
           <a:lstStyle/>
           <a:p>
-            <a:pPr algn="l" indent="0" marL="0">
+            <a:pPr marL="0" indent="0" algn="l">
               <a:lnSpc>
                 <a:spcPct val="120000"/>
               </a:lnSpc>
@@ -11315,7 +11086,7 @@
           <a:bodyPr wrap="square" lIns="0" tIns="0" rIns="0" bIns="0" rtlCol="0" anchor="t"/>
           <a:lstStyle/>
           <a:p>
-            <a:pPr algn="r" indent="0" marL="0">
+            <a:pPr marL="0" indent="0" algn="r">
               <a:lnSpc>
                 <a:spcPct val="120000"/>
               </a:lnSpc>
@@ -11377,7 +11148,7 @@
           <a:bodyPr wrap="square" lIns="0" tIns="0" rIns="0" bIns="0" rtlCol="0" anchor="t"/>
           <a:lstStyle/>
           <a:p>
-            <a:pPr algn="l" indent="0" marL="0">
+            <a:pPr marL="0" indent="0" algn="l">
               <a:lnSpc>
                 <a:spcPct val="120000"/>
               </a:lnSpc>
@@ -11419,7 +11190,7 @@
           <a:bodyPr wrap="square" lIns="0" tIns="0" rIns="0" bIns="0" rtlCol="0" anchor="t"/>
           <a:lstStyle/>
           <a:p>
-            <a:pPr algn="r" indent="0" marL="0">
+            <a:pPr marL="0" indent="0" algn="r">
               <a:lnSpc>
                 <a:spcPct val="120000"/>
               </a:lnSpc>
@@ -11461,7 +11232,7 @@
           <a:bodyPr wrap="square" lIns="0" tIns="0" rIns="0" bIns="0" rtlCol="0" anchor="t"/>
           <a:lstStyle/>
           <a:p>
-            <a:pPr algn="l" indent="0" marL="0">
+            <a:pPr marL="0" indent="0" algn="l">
               <a:lnSpc>
                 <a:spcPct val="120000"/>
               </a:lnSpc>
@@ -11523,7 +11294,7 @@
           <a:bodyPr wrap="square" lIns="0" tIns="0" rIns="0" bIns="0" rtlCol="0" anchor="t"/>
           <a:lstStyle/>
           <a:p>
-            <a:pPr algn="l" indent="0" marL="0">
+            <a:pPr marL="0" indent="0" algn="l">
               <a:lnSpc>
                 <a:spcPct val="145000"/>
               </a:lnSpc>
@@ -11543,7 +11314,7 @@
             <a:endParaRPr lang="en-US" sz="1300" dirty="0"/>
           </a:p>
           <a:p>
-            <a:pPr algn="l" indent="0" marL="0">
+            <a:pPr marL="0" indent="0" algn="l">
               <a:lnSpc>
                 <a:spcPct val="145000"/>
               </a:lnSpc>
@@ -11585,7 +11356,7 @@
           <a:bodyPr wrap="square" lIns="0" tIns="0" rIns="0" bIns="0" rtlCol="0" anchor="t"/>
           <a:lstStyle/>
           <a:p>
-            <a:pPr algn="l" indent="0" marL="0">
+            <a:pPr marL="0" indent="0" algn="l">
               <a:lnSpc>
                 <a:spcPct val="145000"/>
               </a:lnSpc>
@@ -11605,7 +11376,7 @@
             <a:endParaRPr lang="en-US" sz="1300" dirty="0"/>
           </a:p>
           <a:p>
-            <a:pPr algn="l" indent="0" marL="0">
+            <a:pPr marL="0" indent="0" algn="l">
               <a:lnSpc>
                 <a:spcPct val="145000"/>
               </a:lnSpc>
@@ -11672,7 +11443,7 @@
           <a:bodyPr wrap="square" lIns="0" tIns="0" rIns="0" bIns="0" rtlCol="0" anchor="t"/>
           <a:lstStyle/>
           <a:p>
-            <a:pPr algn="l" indent="0" marL="0">
+            <a:pPr marL="0" indent="0" algn="l">
               <a:lnSpc>
                 <a:spcPct val="150000"/>
               </a:lnSpc>
@@ -11692,7 +11463,7 @@
             <a:endParaRPr lang="en-US" sz="1200" dirty="0"/>
           </a:p>
           <a:p>
-            <a:pPr algn="l" indent="0" marL="0">
+            <a:pPr marL="0" indent="0" algn="l">
               <a:lnSpc>
                 <a:spcPct val="150000"/>
               </a:lnSpc>
@@ -11779,7 +11550,7 @@
           <a:bodyPr wrap="square" lIns="0" tIns="0" rIns="0" bIns="0" rtlCol="0" anchor="t"/>
           <a:lstStyle/>
           <a:p>
-            <a:pPr algn="ctr" indent="0" marL="0">
+            <a:pPr marL="0" indent="0" algn="ctr">
               <a:lnSpc>
                 <a:spcPct val="120000"/>
               </a:lnSpc>
@@ -11821,7 +11592,7 @@
           <a:bodyPr wrap="square" lIns="0" tIns="0" rIns="0" bIns="0" rtlCol="0" anchor="t"/>
           <a:lstStyle/>
           <a:p>
-            <a:pPr algn="ctr" indent="0" marL="0">
+            <a:pPr marL="0" indent="0" algn="ctr">
               <a:lnSpc>
                 <a:spcPct val="120000"/>
               </a:lnSpc>
@@ -11863,7 +11634,7 @@
           <a:bodyPr wrap="square" lIns="0" tIns="0" rIns="0" bIns="0" rtlCol="0" anchor="t"/>
           <a:lstStyle/>
           <a:p>
-            <a:pPr algn="ctr" indent="0" marL="0">
+            <a:pPr marL="0" indent="0" algn="ctr">
               <a:lnSpc>
                 <a:spcPct val="120000"/>
               </a:lnSpc>
@@ -11925,7 +11696,7 @@
           <a:bodyPr wrap="square" lIns="0" tIns="0" rIns="0" bIns="0" rtlCol="0" anchor="t"/>
           <a:lstStyle/>
           <a:p>
-            <a:pPr algn="l" indent="0" marL="0">
+            <a:pPr marL="0" indent="0" algn="l">
               <a:lnSpc>
                 <a:spcPct val="120000"/>
               </a:lnSpc>
@@ -11962,6 +11733,7 @@
         <a:solidFill>
           <a:srgbClr val="FFFFFF"/>
         </a:solidFill>
+        <a:effectLst/>
       </p:bgPr>
     </p:bg>
     <p:spTree>
@@ -11999,7 +11771,7 @@
           <a:bodyPr wrap="square" lIns="0" tIns="0" rIns="0" bIns="0" rtlCol="0" anchor="t"/>
           <a:lstStyle/>
           <a:p>
-            <a:pPr algn="l" indent="0" marL="0">
+            <a:pPr marL="0" indent="0" algn="l">
               <a:lnSpc>
                 <a:spcPct val="130000"/>
               </a:lnSpc>
@@ -12041,7 +11813,7 @@
           <a:bodyPr wrap="square" lIns="0" tIns="0" rIns="0" bIns="0" rtlCol="0" anchor="t"/>
           <a:lstStyle/>
           <a:p>
-            <a:pPr algn="l" indent="0" marL="0">
+            <a:pPr marL="0" indent="0" algn="l">
               <a:lnSpc>
                 <a:spcPct val="120000"/>
               </a:lnSpc>
@@ -12203,7 +11975,7 @@
           <a:bodyPr wrap="square" lIns="0" tIns="0" rIns="0" bIns="0" rtlCol="0" anchor="t"/>
           <a:lstStyle/>
           <a:p>
-            <a:pPr algn="r" indent="0" marL="0">
+            <a:pPr marL="0" indent="0" algn="r">
               <a:lnSpc>
                 <a:spcPct val="120000"/>
               </a:lnSpc>
@@ -12265,7 +12037,7 @@
           <a:bodyPr wrap="square" lIns="0" tIns="0" rIns="0" bIns="0" rtlCol="0" anchor="t"/>
           <a:lstStyle/>
           <a:p>
-            <a:pPr algn="l" indent="0" marL="0">
+            <a:pPr marL="0" indent="0" algn="l">
               <a:lnSpc>
                 <a:spcPct val="120000"/>
               </a:lnSpc>
@@ -12307,7 +12079,7 @@
           <a:bodyPr wrap="square" lIns="0" tIns="0" rIns="0" bIns="0" rtlCol="0" anchor="t"/>
           <a:lstStyle/>
           <a:p>
-            <a:pPr algn="r" indent="0" marL="0">
+            <a:pPr marL="0" indent="0" algn="r">
               <a:lnSpc>
                 <a:spcPct val="120000"/>
               </a:lnSpc>
@@ -12349,7 +12121,7 @@
           <a:bodyPr wrap="square" lIns="0" tIns="0" rIns="0" bIns="0" rtlCol="0" anchor="t"/>
           <a:lstStyle/>
           <a:p>
-            <a:pPr algn="l" indent="0" marL="0">
+            <a:pPr marL="0" indent="0" algn="l">
               <a:lnSpc>
                 <a:spcPct val="120000"/>
               </a:lnSpc>
@@ -12411,7 +12183,7 @@
           <a:bodyPr wrap="square" lIns="0" tIns="0" rIns="0" bIns="0" rtlCol="0" anchor="t"/>
           <a:lstStyle/>
           <a:p>
-            <a:pPr algn="l" indent="0" marL="0">
+            <a:pPr marL="0" indent="0" algn="l">
               <a:lnSpc>
                 <a:spcPct val="145000"/>
               </a:lnSpc>
@@ -12431,7 +12203,7 @@
             <a:endParaRPr lang="en-US" sz="1300" dirty="0"/>
           </a:p>
           <a:p>
-            <a:pPr algn="l" indent="0" marL="0">
+            <a:pPr marL="0" indent="0" algn="l">
               <a:lnSpc>
                 <a:spcPct val="145000"/>
               </a:lnSpc>
@@ -12473,7 +12245,7 @@
           <a:bodyPr wrap="square" lIns="0" tIns="0" rIns="0" bIns="0" rtlCol="0" anchor="t"/>
           <a:lstStyle/>
           <a:p>
-            <a:pPr algn="l" indent="0" marL="0">
+            <a:pPr marL="0" indent="0" algn="l">
               <a:lnSpc>
                 <a:spcPct val="145000"/>
               </a:lnSpc>
@@ -12493,7 +12265,7 @@
             <a:endParaRPr lang="en-US" sz="1300" dirty="0"/>
           </a:p>
           <a:p>
-            <a:pPr algn="l" indent="0" marL="0">
+            <a:pPr marL="0" indent="0" algn="l">
               <a:lnSpc>
                 <a:spcPct val="145000"/>
               </a:lnSpc>
@@ -12560,7 +12332,7 @@
           <a:bodyPr wrap="square" lIns="0" tIns="0" rIns="0" bIns="0" rtlCol="0" anchor="t"/>
           <a:lstStyle/>
           <a:p>
-            <a:pPr algn="l" indent="0" marL="0">
+            <a:pPr marL="0" indent="0" algn="l">
               <a:lnSpc>
                 <a:spcPct val="150000"/>
               </a:lnSpc>
@@ -12580,7 +12352,7 @@
             <a:endParaRPr lang="en-US" sz="1200" dirty="0"/>
           </a:p>
           <a:p>
-            <a:pPr algn="l" indent="0" marL="0">
+            <a:pPr marL="0" indent="0" algn="l">
               <a:lnSpc>
                 <a:spcPct val="150000"/>
               </a:lnSpc>
@@ -12667,7 +12439,7 @@
           <a:bodyPr wrap="square" lIns="0" tIns="0" rIns="0" bIns="0" rtlCol="0" anchor="t"/>
           <a:lstStyle/>
           <a:p>
-            <a:pPr algn="ctr" indent="0" marL="0">
+            <a:pPr marL="0" indent="0" algn="ctr">
               <a:lnSpc>
                 <a:spcPct val="120000"/>
               </a:lnSpc>
@@ -12709,7 +12481,7 @@
           <a:bodyPr wrap="square" lIns="0" tIns="0" rIns="0" bIns="0" rtlCol="0" anchor="t"/>
           <a:lstStyle/>
           <a:p>
-            <a:pPr algn="ctr" indent="0" marL="0">
+            <a:pPr marL="0" indent="0" algn="ctr">
               <a:lnSpc>
                 <a:spcPct val="120000"/>
               </a:lnSpc>
@@ -12751,7 +12523,7 @@
           <a:bodyPr wrap="square" lIns="0" tIns="0" rIns="0" bIns="0" rtlCol="0" anchor="t"/>
           <a:lstStyle/>
           <a:p>
-            <a:pPr algn="ctr" indent="0" marL="0">
+            <a:pPr marL="0" indent="0" algn="ctr">
               <a:lnSpc>
                 <a:spcPct val="120000"/>
               </a:lnSpc>
@@ -12813,7 +12585,7 @@
           <a:bodyPr wrap="square" lIns="0" tIns="0" rIns="0" bIns="0" rtlCol="0" anchor="t"/>
           <a:lstStyle/>
           <a:p>
-            <a:pPr algn="l" indent="0" marL="0">
+            <a:pPr marL="0" indent="0" algn="l">
               <a:lnSpc>
                 <a:spcPct val="120000"/>
               </a:lnSpc>
@@ -12850,6 +12622,7 @@
         <a:solidFill>
           <a:srgbClr val="FFFFFF"/>
         </a:solidFill>
+        <a:effectLst/>
       </p:bgPr>
     </p:bg>
     <p:spTree>
@@ -12887,7 +12660,7 @@
           <a:bodyPr wrap="square" lIns="0" tIns="0" rIns="0" bIns="0" rtlCol="0" anchor="t"/>
           <a:lstStyle/>
           <a:p>
-            <a:pPr algn="l" indent="0" marL="0">
+            <a:pPr marL="0" indent="0" algn="l">
               <a:lnSpc>
                 <a:spcPct val="130000"/>
               </a:lnSpc>
@@ -13049,7 +12822,7 @@
           <a:bodyPr wrap="square" lIns="0" tIns="0" rIns="0" bIns="0" rtlCol="0" anchor="t"/>
           <a:lstStyle/>
           <a:p>
-            <a:pPr algn="r" indent="0" marL="0">
+            <a:pPr marL="0" indent="0" algn="r">
               <a:lnSpc>
                 <a:spcPct val="120000"/>
               </a:lnSpc>
@@ -13111,7 +12884,7 @@
           <a:bodyPr wrap="square" lIns="0" tIns="0" rIns="0" bIns="0" rtlCol="0" anchor="t"/>
           <a:lstStyle/>
           <a:p>
-            <a:pPr algn="l" indent="0" marL="0">
+            <a:pPr marL="0" indent="0" algn="l">
               <a:lnSpc>
                 <a:spcPct val="120000"/>
               </a:lnSpc>
@@ -13153,7 +12926,7 @@
           <a:bodyPr wrap="square" lIns="0" tIns="0" rIns="0" bIns="0" rtlCol="0" anchor="t"/>
           <a:lstStyle/>
           <a:p>
-            <a:pPr algn="r" indent="0" marL="0">
+            <a:pPr marL="0" indent="0" algn="r">
               <a:lnSpc>
                 <a:spcPct val="120000"/>
               </a:lnSpc>
@@ -13182,7 +12955,7 @@
         </p:nvSpPr>
         <p:spPr>
           <a:xfrm>
-            <a:off x="438912" y="1691640"/>
+            <a:off x="1195431" y="1710096"/>
             <a:ext cx="1737360" cy="1188720"/>
           </a:xfrm>
           <a:prstGeom prst="rect">
@@ -13207,7 +12980,7 @@
         </p:nvSpPr>
         <p:spPr>
           <a:xfrm>
-            <a:off x="621792" y="1837944"/>
+            <a:off x="1378311" y="1856400"/>
             <a:ext cx="1188720" cy="292608"/>
           </a:xfrm>
           <a:prstGeom prst="rect">
@@ -13220,7 +12993,7 @@
           <a:bodyPr wrap="square" lIns="0" tIns="0" rIns="0" bIns="0" rtlCol="0" anchor="t"/>
           <a:lstStyle/>
           <a:p>
-            <a:pPr algn="l" indent="0" marL="0">
+            <a:pPr marL="0" indent="0" algn="l">
               <a:lnSpc>
                 <a:spcPct val="120000"/>
               </a:lnSpc>
@@ -13249,7 +13022,7 @@
         </p:nvSpPr>
         <p:spPr>
           <a:xfrm>
-            <a:off x="621792" y="2276856"/>
+            <a:off x="1378311" y="2295312"/>
             <a:ext cx="1371600" cy="237744"/>
           </a:xfrm>
           <a:prstGeom prst="rect">
@@ -13262,7 +13035,7 @@
           <a:bodyPr wrap="square" lIns="0" tIns="0" rIns="0" bIns="0" rtlCol="0" anchor="t"/>
           <a:lstStyle/>
           <a:p>
-            <a:pPr algn="l" indent="0" marL="0">
+            <a:pPr marL="0" indent="0" algn="l">
               <a:lnSpc>
                 <a:spcPct val="120000"/>
               </a:lnSpc>
@@ -13291,7 +13064,7 @@
         </p:nvSpPr>
         <p:spPr>
           <a:xfrm>
-            <a:off x="621792" y="2551176"/>
+            <a:off x="1378311" y="2569632"/>
             <a:ext cx="1371600" cy="201168"/>
           </a:xfrm>
           <a:prstGeom prst="rect">
@@ -13304,7 +13077,7 @@
           <a:bodyPr wrap="square" lIns="0" tIns="0" rIns="0" bIns="0" rtlCol="0" anchor="t"/>
           <a:lstStyle/>
           <a:p>
-            <a:pPr algn="l" indent="0" marL="0">
+            <a:pPr marL="0" indent="0" algn="l">
               <a:lnSpc>
                 <a:spcPct val="120000"/>
               </a:lnSpc>
@@ -13333,7 +13106,7 @@
         </p:nvSpPr>
         <p:spPr>
           <a:xfrm>
-            <a:off x="2176272" y="2258568"/>
+            <a:off x="2932791" y="2277024"/>
             <a:ext cx="201168" cy="54864"/>
           </a:xfrm>
           <a:prstGeom prst="rect">
@@ -13353,7 +13126,7 @@
         </p:nvSpPr>
         <p:spPr>
           <a:xfrm>
-            <a:off x="2377440" y="1691640"/>
+            <a:off x="3133959" y="1710096"/>
             <a:ext cx="1737360" cy="1188720"/>
           </a:xfrm>
           <a:prstGeom prst="rect">
@@ -13378,7 +13151,7 @@
         </p:nvSpPr>
         <p:spPr>
           <a:xfrm>
-            <a:off x="2560320" y="1837944"/>
+            <a:off x="3316839" y="1856400"/>
             <a:ext cx="1188720" cy="292608"/>
           </a:xfrm>
           <a:prstGeom prst="rect">
@@ -13391,7 +13164,7 @@
           <a:bodyPr wrap="square" lIns="0" tIns="0" rIns="0" bIns="0" rtlCol="0" anchor="t"/>
           <a:lstStyle/>
           <a:p>
-            <a:pPr algn="l" indent="0" marL="0">
+            <a:pPr marL="0" indent="0" algn="l">
               <a:lnSpc>
                 <a:spcPct val="120000"/>
               </a:lnSpc>
@@ -13420,7 +13193,7 @@
         </p:nvSpPr>
         <p:spPr>
           <a:xfrm>
-            <a:off x="2560320" y="2276856"/>
+            <a:off x="3316839" y="2295312"/>
             <a:ext cx="1371600" cy="237744"/>
           </a:xfrm>
           <a:prstGeom prst="rect">
@@ -13433,7 +13206,7 @@
           <a:bodyPr wrap="square" lIns="0" tIns="0" rIns="0" bIns="0" rtlCol="0" anchor="t"/>
           <a:lstStyle/>
           <a:p>
-            <a:pPr algn="l" indent="0" marL="0">
+            <a:pPr marL="0" indent="0" algn="l">
               <a:lnSpc>
                 <a:spcPct val="120000"/>
               </a:lnSpc>
@@ -13462,7 +13235,7 @@
         </p:nvSpPr>
         <p:spPr>
           <a:xfrm>
-            <a:off x="2560320" y="2551176"/>
+            <a:off x="3316839" y="2569632"/>
             <a:ext cx="1371600" cy="201168"/>
           </a:xfrm>
           <a:prstGeom prst="rect">
@@ -13475,7 +13248,7 @@
           <a:bodyPr wrap="square" lIns="0" tIns="0" rIns="0" bIns="0" rtlCol="0" anchor="t"/>
           <a:lstStyle/>
           <a:p>
-            <a:pPr algn="l" indent="0" marL="0">
+            <a:pPr marL="0" indent="0" algn="l">
               <a:lnSpc>
                 <a:spcPct val="120000"/>
               </a:lnSpc>
@@ -13504,7 +13277,7 @@
         </p:nvSpPr>
         <p:spPr>
           <a:xfrm>
-            <a:off x="4114800" y="2258568"/>
+            <a:off x="4871319" y="2277024"/>
             <a:ext cx="201168" cy="54864"/>
           </a:xfrm>
           <a:prstGeom prst="rect">
@@ -13524,7 +13297,7 @@
         </p:nvSpPr>
         <p:spPr>
           <a:xfrm>
-            <a:off x="4315968" y="1691640"/>
+            <a:off x="5072487" y="1710096"/>
             <a:ext cx="1737360" cy="1188720"/>
           </a:xfrm>
           <a:prstGeom prst="rect">
@@ -13549,7 +13322,7 @@
         </p:nvSpPr>
         <p:spPr>
           <a:xfrm>
-            <a:off x="4498848" y="1837944"/>
+            <a:off x="5255367" y="1856400"/>
             <a:ext cx="1188720" cy="292608"/>
           </a:xfrm>
           <a:prstGeom prst="rect">
@@ -13562,7 +13335,7 @@
           <a:bodyPr wrap="square" lIns="0" tIns="0" rIns="0" bIns="0" rtlCol="0" anchor="t"/>
           <a:lstStyle/>
           <a:p>
-            <a:pPr algn="l" indent="0" marL="0">
+            <a:pPr marL="0" indent="0" algn="l">
               <a:lnSpc>
                 <a:spcPct val="120000"/>
               </a:lnSpc>
@@ -13591,7 +13364,7 @@
         </p:nvSpPr>
         <p:spPr>
           <a:xfrm>
-            <a:off x="4498848" y="2276856"/>
+            <a:off x="5255367" y="2295312"/>
             <a:ext cx="1371600" cy="237744"/>
           </a:xfrm>
           <a:prstGeom prst="rect">
@@ -13604,7 +13377,7 @@
           <a:bodyPr wrap="square" lIns="0" tIns="0" rIns="0" bIns="0" rtlCol="0" anchor="t"/>
           <a:lstStyle/>
           <a:p>
-            <a:pPr algn="l" indent="0" marL="0">
+            <a:pPr marL="0" indent="0" algn="l">
               <a:lnSpc>
                 <a:spcPct val="120000"/>
               </a:lnSpc>
@@ -13633,7 +13406,7 @@
         </p:nvSpPr>
         <p:spPr>
           <a:xfrm>
-            <a:off x="4498848" y="2551176"/>
+            <a:off x="5255367" y="2569632"/>
             <a:ext cx="1371600" cy="201168"/>
           </a:xfrm>
           <a:prstGeom prst="rect">
@@ -13646,7 +13419,7 @@
           <a:bodyPr wrap="square" lIns="0" tIns="0" rIns="0" bIns="0" rtlCol="0" anchor="t"/>
           <a:lstStyle/>
           <a:p>
-            <a:pPr algn="l" indent="0" marL="0">
+            <a:pPr marL="0" indent="0" algn="l">
               <a:lnSpc>
                 <a:spcPct val="120000"/>
               </a:lnSpc>
@@ -13675,7 +13448,7 @@
         </p:nvSpPr>
         <p:spPr>
           <a:xfrm>
-            <a:off x="6053328" y="2258568"/>
+            <a:off x="6809847" y="2277024"/>
             <a:ext cx="201168" cy="54864"/>
           </a:xfrm>
           <a:prstGeom prst="rect">
@@ -13695,7 +13468,7 @@
         </p:nvSpPr>
         <p:spPr>
           <a:xfrm>
-            <a:off x="6254496" y="1691640"/>
+            <a:off x="7011015" y="1710096"/>
             <a:ext cx="1737360" cy="1188720"/>
           </a:xfrm>
           <a:prstGeom prst="rect">
@@ -13720,7 +13493,7 @@
         </p:nvSpPr>
         <p:spPr>
           <a:xfrm>
-            <a:off x="6437376" y="1837944"/>
+            <a:off x="7193895" y="1856400"/>
             <a:ext cx="1188720" cy="292608"/>
           </a:xfrm>
           <a:prstGeom prst="rect">
@@ -13733,7 +13506,7 @@
           <a:bodyPr wrap="square" lIns="0" tIns="0" rIns="0" bIns="0" rtlCol="0" anchor="t"/>
           <a:lstStyle/>
           <a:p>
-            <a:pPr algn="l" indent="0" marL="0">
+            <a:pPr marL="0" indent="0" algn="l">
               <a:lnSpc>
                 <a:spcPct val="120000"/>
               </a:lnSpc>
@@ -13762,7 +13535,7 @@
         </p:nvSpPr>
         <p:spPr>
           <a:xfrm>
-            <a:off x="6437376" y="2276856"/>
+            <a:off x="7193895" y="2295312"/>
             <a:ext cx="1371600" cy="237744"/>
           </a:xfrm>
           <a:prstGeom prst="rect">
@@ -13775,7 +13548,7 @@
           <a:bodyPr wrap="square" lIns="0" tIns="0" rIns="0" bIns="0" rtlCol="0" anchor="t"/>
           <a:lstStyle/>
           <a:p>
-            <a:pPr algn="l" indent="0" marL="0">
+            <a:pPr marL="0" indent="0" algn="l">
               <a:lnSpc>
                 <a:spcPct val="120000"/>
               </a:lnSpc>
@@ -13804,7 +13577,7 @@
         </p:nvSpPr>
         <p:spPr>
           <a:xfrm>
-            <a:off x="6437376" y="2551176"/>
+            <a:off x="7193895" y="2569632"/>
             <a:ext cx="1371600" cy="201168"/>
           </a:xfrm>
           <a:prstGeom prst="rect">
@@ -13817,7 +13590,7 @@
           <a:bodyPr wrap="square" lIns="0" tIns="0" rIns="0" bIns="0" rtlCol="0" anchor="t"/>
           <a:lstStyle/>
           <a:p>
-            <a:pPr algn="l" indent="0" marL="0">
+            <a:pPr marL="0" indent="0" algn="l">
               <a:lnSpc>
                 <a:spcPct val="120000"/>
               </a:lnSpc>
@@ -13846,7 +13619,7 @@
         </p:nvSpPr>
         <p:spPr>
           <a:xfrm>
-            <a:off x="7991856" y="2258568"/>
+            <a:off x="8748375" y="2277024"/>
             <a:ext cx="201168" cy="54864"/>
           </a:xfrm>
           <a:prstGeom prst="rect">
@@ -13866,7 +13639,7 @@
         </p:nvSpPr>
         <p:spPr>
           <a:xfrm>
-            <a:off x="8193024" y="1691640"/>
+            <a:off x="8949543" y="1710096"/>
             <a:ext cx="1737360" cy="1188720"/>
           </a:xfrm>
           <a:prstGeom prst="rect">
@@ -13891,7 +13664,7 @@
         </p:nvSpPr>
         <p:spPr>
           <a:xfrm>
-            <a:off x="8375904" y="1837944"/>
+            <a:off x="9132423" y="1856400"/>
             <a:ext cx="1188720" cy="292608"/>
           </a:xfrm>
           <a:prstGeom prst="rect">
@@ -13904,7 +13677,7 @@
           <a:bodyPr wrap="square" lIns="0" tIns="0" rIns="0" bIns="0" rtlCol="0" anchor="t"/>
           <a:lstStyle/>
           <a:p>
-            <a:pPr algn="l" indent="0" marL="0">
+            <a:pPr marL="0" indent="0" algn="l">
               <a:lnSpc>
                 <a:spcPct val="120000"/>
               </a:lnSpc>
@@ -13933,7 +13706,7 @@
         </p:nvSpPr>
         <p:spPr>
           <a:xfrm>
-            <a:off x="8375904" y="2276856"/>
+            <a:off x="9132423" y="2295312"/>
             <a:ext cx="1371600" cy="237744"/>
           </a:xfrm>
           <a:prstGeom prst="rect">
@@ -13946,7 +13719,7 @@
           <a:bodyPr wrap="square" lIns="0" tIns="0" rIns="0" bIns="0" rtlCol="0" anchor="t"/>
           <a:lstStyle/>
           <a:p>
-            <a:pPr algn="l" indent="0" marL="0">
+            <a:pPr marL="0" indent="0" algn="l">
               <a:lnSpc>
                 <a:spcPct val="120000"/>
               </a:lnSpc>
@@ -13975,7 +13748,7 @@
         </p:nvSpPr>
         <p:spPr>
           <a:xfrm>
-            <a:off x="8375904" y="2551176"/>
+            <a:off x="9132423" y="2569632"/>
             <a:ext cx="1371600" cy="201168"/>
           </a:xfrm>
           <a:prstGeom prst="rect">
@@ -13988,7 +13761,7 @@
           <a:bodyPr wrap="square" lIns="0" tIns="0" rIns="0" bIns="0" rtlCol="0" anchor="t"/>
           <a:lstStyle/>
           <a:p>
-            <a:pPr algn="l" indent="0" marL="0">
+            <a:pPr marL="0" indent="0" algn="l">
               <a:lnSpc>
                 <a:spcPct val="120000"/>
               </a:lnSpc>
@@ -14017,7 +13790,7 @@
         </p:nvSpPr>
         <p:spPr>
           <a:xfrm>
-            <a:off x="1408176" y="3246120"/>
+            <a:off x="2164695" y="3264576"/>
             <a:ext cx="1737360" cy="1188720"/>
           </a:xfrm>
           <a:prstGeom prst="rect">
@@ -14042,7 +13815,7 @@
         </p:nvSpPr>
         <p:spPr>
           <a:xfrm>
-            <a:off x="1591056" y="3392424"/>
+            <a:off x="2347575" y="3410880"/>
             <a:ext cx="1188720" cy="292608"/>
           </a:xfrm>
           <a:prstGeom prst="rect">
@@ -14055,7 +13828,7 @@
           <a:bodyPr wrap="square" lIns="0" tIns="0" rIns="0" bIns="0" rtlCol="0" anchor="t"/>
           <a:lstStyle/>
           <a:p>
-            <a:pPr algn="l" indent="0" marL="0">
+            <a:pPr marL="0" indent="0" algn="l">
               <a:lnSpc>
                 <a:spcPct val="120000"/>
               </a:lnSpc>
@@ -14084,7 +13857,7 @@
         </p:nvSpPr>
         <p:spPr>
           <a:xfrm>
-            <a:off x="1591056" y="3831336"/>
+            <a:off x="2347575" y="3849792"/>
             <a:ext cx="1371600" cy="237744"/>
           </a:xfrm>
           <a:prstGeom prst="rect">
@@ -14097,7 +13870,7 @@
           <a:bodyPr wrap="square" lIns="0" tIns="0" rIns="0" bIns="0" rtlCol="0" anchor="t"/>
           <a:lstStyle/>
           <a:p>
-            <a:pPr algn="l" indent="0" marL="0">
+            <a:pPr marL="0" indent="0" algn="l">
               <a:lnSpc>
                 <a:spcPct val="120000"/>
               </a:lnSpc>
@@ -14126,7 +13899,7 @@
         </p:nvSpPr>
         <p:spPr>
           <a:xfrm>
-            <a:off x="1591056" y="4105656"/>
+            <a:off x="2347575" y="4124112"/>
             <a:ext cx="1371600" cy="201168"/>
           </a:xfrm>
           <a:prstGeom prst="rect">
@@ -14139,7 +13912,7 @@
           <a:bodyPr wrap="square" lIns="0" tIns="0" rIns="0" bIns="0" rtlCol="0" anchor="t"/>
           <a:lstStyle/>
           <a:p>
-            <a:pPr algn="l" indent="0" marL="0">
+            <a:pPr marL="0" indent="0" algn="l">
               <a:lnSpc>
                 <a:spcPct val="120000"/>
               </a:lnSpc>
@@ -14168,7 +13941,7 @@
         </p:nvSpPr>
         <p:spPr>
           <a:xfrm>
-            <a:off x="3145536" y="3813048"/>
+            <a:off x="3902055" y="3831504"/>
             <a:ext cx="201168" cy="54864"/>
           </a:xfrm>
           <a:prstGeom prst="rect">
@@ -14188,7 +13961,7 @@
         </p:nvSpPr>
         <p:spPr>
           <a:xfrm>
-            <a:off x="3346704" y="3246120"/>
+            <a:off x="4103223" y="3264576"/>
             <a:ext cx="1737360" cy="1188720"/>
           </a:xfrm>
           <a:prstGeom prst="rect">
@@ -14213,7 +13986,7 @@
         </p:nvSpPr>
         <p:spPr>
           <a:xfrm>
-            <a:off x="3529584" y="3392424"/>
+            <a:off x="4286103" y="3410880"/>
             <a:ext cx="1188720" cy="292608"/>
           </a:xfrm>
           <a:prstGeom prst="rect">
@@ -14226,7 +13999,7 @@
           <a:bodyPr wrap="square" lIns="0" tIns="0" rIns="0" bIns="0" rtlCol="0" anchor="t"/>
           <a:lstStyle/>
           <a:p>
-            <a:pPr algn="l" indent="0" marL="0">
+            <a:pPr marL="0" indent="0" algn="l">
               <a:lnSpc>
                 <a:spcPct val="120000"/>
               </a:lnSpc>
@@ -14255,7 +14028,7 @@
         </p:nvSpPr>
         <p:spPr>
           <a:xfrm>
-            <a:off x="3529584" y="3831336"/>
+            <a:off x="4286103" y="3849792"/>
             <a:ext cx="1371600" cy="237744"/>
           </a:xfrm>
           <a:prstGeom prst="rect">
@@ -14268,7 +14041,7 @@
           <a:bodyPr wrap="square" lIns="0" tIns="0" rIns="0" bIns="0" rtlCol="0" anchor="t"/>
           <a:lstStyle/>
           <a:p>
-            <a:pPr algn="l" indent="0" marL="0">
+            <a:pPr marL="0" indent="0" algn="l">
               <a:lnSpc>
                 <a:spcPct val="120000"/>
               </a:lnSpc>
@@ -14297,7 +14070,7 @@
         </p:nvSpPr>
         <p:spPr>
           <a:xfrm>
-            <a:off x="3529584" y="4105656"/>
+            <a:off x="4286103" y="4124112"/>
             <a:ext cx="1371600" cy="201168"/>
           </a:xfrm>
           <a:prstGeom prst="rect">
@@ -14310,7 +14083,7 @@
           <a:bodyPr wrap="square" lIns="0" tIns="0" rIns="0" bIns="0" rtlCol="0" anchor="t"/>
           <a:lstStyle/>
           <a:p>
-            <a:pPr algn="l" indent="0" marL="0">
+            <a:pPr marL="0" indent="0" algn="l">
               <a:lnSpc>
                 <a:spcPct val="120000"/>
               </a:lnSpc>
@@ -14339,7 +14112,7 @@
         </p:nvSpPr>
         <p:spPr>
           <a:xfrm>
-            <a:off x="5084064" y="3813048"/>
+            <a:off x="5840583" y="3831504"/>
             <a:ext cx="201168" cy="54864"/>
           </a:xfrm>
           <a:prstGeom prst="rect">
@@ -14359,7 +14132,7 @@
         </p:nvSpPr>
         <p:spPr>
           <a:xfrm>
-            <a:off x="5285232" y="3246120"/>
+            <a:off x="6041751" y="3264576"/>
             <a:ext cx="1737360" cy="1188720"/>
           </a:xfrm>
           <a:prstGeom prst="rect">
@@ -14384,7 +14157,7 @@
         </p:nvSpPr>
         <p:spPr>
           <a:xfrm>
-            <a:off x="5468112" y="3392424"/>
+            <a:off x="6224631" y="3410880"/>
             <a:ext cx="1188720" cy="292608"/>
           </a:xfrm>
           <a:prstGeom prst="rect">
@@ -14397,7 +14170,7 @@
           <a:bodyPr wrap="square" lIns="0" tIns="0" rIns="0" bIns="0" rtlCol="0" anchor="t"/>
           <a:lstStyle/>
           <a:p>
-            <a:pPr algn="l" indent="0" marL="0">
+            <a:pPr marL="0" indent="0" algn="l">
               <a:lnSpc>
                 <a:spcPct val="120000"/>
               </a:lnSpc>
@@ -14426,7 +14199,7 @@
         </p:nvSpPr>
         <p:spPr>
           <a:xfrm>
-            <a:off x="5468112" y="3831336"/>
+            <a:off x="6224631" y="3849792"/>
             <a:ext cx="1371600" cy="237744"/>
           </a:xfrm>
           <a:prstGeom prst="rect">
@@ -14439,7 +14212,7 @@
           <a:bodyPr wrap="square" lIns="0" tIns="0" rIns="0" bIns="0" rtlCol="0" anchor="t"/>
           <a:lstStyle/>
           <a:p>
-            <a:pPr algn="l" indent="0" marL="0">
+            <a:pPr marL="0" indent="0" algn="l">
               <a:lnSpc>
                 <a:spcPct val="120000"/>
               </a:lnSpc>
@@ -14468,7 +14241,7 @@
         </p:nvSpPr>
         <p:spPr>
           <a:xfrm>
-            <a:off x="5468112" y="4105656"/>
+            <a:off x="6224631" y="4124112"/>
             <a:ext cx="1371600" cy="201168"/>
           </a:xfrm>
           <a:prstGeom prst="rect">
@@ -14481,7 +14254,7 @@
           <a:bodyPr wrap="square" lIns="0" tIns="0" rIns="0" bIns="0" rtlCol="0" anchor="t"/>
           <a:lstStyle/>
           <a:p>
-            <a:pPr algn="l" indent="0" marL="0">
+            <a:pPr marL="0" indent="0" algn="l">
               <a:lnSpc>
                 <a:spcPct val="120000"/>
               </a:lnSpc>
@@ -14510,7 +14283,7 @@
         </p:nvSpPr>
         <p:spPr>
           <a:xfrm>
-            <a:off x="7022592" y="3813048"/>
+            <a:off x="7779111" y="3831504"/>
             <a:ext cx="201168" cy="54864"/>
           </a:xfrm>
           <a:prstGeom prst="rect">
@@ -14530,7 +14303,7 @@
         </p:nvSpPr>
         <p:spPr>
           <a:xfrm>
-            <a:off x="7223760" y="3246120"/>
+            <a:off x="7980279" y="3264576"/>
             <a:ext cx="1737360" cy="1188720"/>
           </a:xfrm>
           <a:prstGeom prst="rect">
@@ -14555,7 +14328,7 @@
         </p:nvSpPr>
         <p:spPr>
           <a:xfrm>
-            <a:off x="7406640" y="3392424"/>
+            <a:off x="8163159" y="3410880"/>
             <a:ext cx="1188720" cy="292608"/>
           </a:xfrm>
           <a:prstGeom prst="rect">
@@ -14568,7 +14341,7 @@
           <a:bodyPr wrap="square" lIns="0" tIns="0" rIns="0" bIns="0" rtlCol="0" anchor="t"/>
           <a:lstStyle/>
           <a:p>
-            <a:pPr algn="l" indent="0" marL="0">
+            <a:pPr marL="0" indent="0" algn="l">
               <a:lnSpc>
                 <a:spcPct val="120000"/>
               </a:lnSpc>
@@ -14597,7 +14370,7 @@
         </p:nvSpPr>
         <p:spPr>
           <a:xfrm>
-            <a:off x="7406640" y="3831336"/>
+            <a:off x="8163159" y="3849792"/>
             <a:ext cx="1371600" cy="237744"/>
           </a:xfrm>
           <a:prstGeom prst="rect">
@@ -14610,7 +14383,7 @@
           <a:bodyPr wrap="square" lIns="0" tIns="0" rIns="0" bIns="0" rtlCol="0" anchor="t"/>
           <a:lstStyle/>
           <a:p>
-            <a:pPr algn="l" indent="0" marL="0">
+            <a:pPr marL="0" indent="0" algn="l">
               <a:lnSpc>
                 <a:spcPct val="120000"/>
               </a:lnSpc>
@@ -14639,7 +14412,7 @@
         </p:nvSpPr>
         <p:spPr>
           <a:xfrm>
-            <a:off x="7406640" y="4105656"/>
+            <a:off x="8163159" y="4124112"/>
             <a:ext cx="1371600" cy="201168"/>
           </a:xfrm>
           <a:prstGeom prst="rect">
@@ -14652,7 +14425,7 @@
           <a:bodyPr wrap="square" lIns="0" tIns="0" rIns="0" bIns="0" rtlCol="0" anchor="t"/>
           <a:lstStyle/>
           <a:p>
-            <a:pPr algn="l" indent="0" marL="0">
+            <a:pPr marL="0" indent="0" algn="l">
               <a:lnSpc>
                 <a:spcPct val="120000"/>
               </a:lnSpc>
@@ -14714,7 +14487,7 @@
           <a:bodyPr wrap="square" lIns="0" tIns="0" rIns="0" bIns="0" rtlCol="0" anchor="t"/>
           <a:lstStyle/>
           <a:p>
-            <a:pPr algn="ctr" indent="0" marL="0">
+            <a:pPr marL="0" indent="0" algn="ctr">
               <a:lnSpc>
                 <a:spcPct val="120000"/>
               </a:lnSpc>
@@ -14751,6 +14524,7 @@
         <a:solidFill>
           <a:srgbClr val="FFFFFF"/>
         </a:solidFill>
+        <a:effectLst/>
       </p:bgPr>
     </p:bg>
     <p:spTree>
@@ -14788,7 +14562,7 @@
           <a:bodyPr wrap="square" lIns="0" tIns="0" rIns="0" bIns="0" rtlCol="0" anchor="t"/>
           <a:lstStyle/>
           <a:p>
-            <a:pPr algn="l" indent="0" marL="0">
+            <a:pPr marL="0" indent="0" algn="l">
               <a:lnSpc>
                 <a:spcPct val="130000"/>
               </a:lnSpc>
@@ -14950,7 +14724,7 @@
           <a:bodyPr wrap="square" lIns="0" tIns="0" rIns="0" bIns="0" rtlCol="0" anchor="t"/>
           <a:lstStyle/>
           <a:p>
-            <a:pPr algn="r" indent="0" marL="0">
+            <a:pPr marL="0" indent="0" algn="r">
               <a:lnSpc>
                 <a:spcPct val="120000"/>
               </a:lnSpc>
@@ -15012,7 +14786,7 @@
           <a:bodyPr wrap="square" lIns="0" tIns="0" rIns="0" bIns="0" rtlCol="0" anchor="t"/>
           <a:lstStyle/>
           <a:p>
-            <a:pPr algn="l" indent="0" marL="0">
+            <a:pPr marL="0" indent="0" algn="l">
               <a:lnSpc>
                 <a:spcPct val="120000"/>
               </a:lnSpc>
@@ -15054,7 +14828,7 @@
           <a:bodyPr wrap="square" lIns="0" tIns="0" rIns="0" bIns="0" rtlCol="0" anchor="t"/>
           <a:lstStyle/>
           <a:p>
-            <a:pPr algn="r" indent="0" marL="0">
+            <a:pPr marL="0" indent="0" algn="r">
               <a:lnSpc>
                 <a:spcPct val="120000"/>
               </a:lnSpc>
@@ -15116,7 +14890,7 @@
           <a:bodyPr wrap="square" lIns="0" tIns="0" rIns="0" bIns="0" rtlCol="0" anchor="t"/>
           <a:lstStyle/>
           <a:p>
-            <a:pPr algn="ctr" indent="0" marL="0">
+            <a:pPr marL="0" indent="0" algn="ctr">
               <a:lnSpc>
                 <a:spcPct val="120000"/>
               </a:lnSpc>
@@ -15183,7 +14957,7 @@
           <a:bodyPr wrap="square" lIns="0" tIns="0" rIns="0" bIns="0" rtlCol="0" anchor="t"/>
           <a:lstStyle/>
           <a:p>
-            <a:pPr algn="l" indent="0" marL="0">
+            <a:pPr marL="0" indent="0" algn="l">
               <a:lnSpc>
                 <a:spcPct val="120000"/>
               </a:lnSpc>
@@ -15225,7 +14999,7 @@
           <a:bodyPr wrap="square" lIns="0" tIns="0" rIns="0" bIns="0" rtlCol="0" anchor="t"/>
           <a:lstStyle/>
           <a:p>
-            <a:pPr algn="l" indent="0" marL="0">
+            <a:pPr marL="0" indent="0" algn="l">
               <a:lnSpc>
                 <a:spcPct val="140000"/>
               </a:lnSpc>
@@ -15245,7 +15019,7 @@
             <a:endParaRPr lang="en-US" sz="1200" dirty="0"/>
           </a:p>
           <a:p>
-            <a:pPr algn="l" indent="0" marL="0">
+            <a:pPr marL="0" indent="0" algn="l">
               <a:lnSpc>
                 <a:spcPct val="140000"/>
               </a:lnSpc>
@@ -15332,7 +15106,7 @@
           <a:bodyPr wrap="square" lIns="0" tIns="0" rIns="0" bIns="0" rtlCol="0" anchor="t"/>
           <a:lstStyle/>
           <a:p>
-            <a:pPr algn="l" indent="0" marL="0">
+            <a:pPr marL="0" indent="0" algn="l">
               <a:lnSpc>
                 <a:spcPct val="120000"/>
               </a:lnSpc>
@@ -15374,7 +15148,7 @@
           <a:bodyPr wrap="square" lIns="0" tIns="0" rIns="0" bIns="0" rtlCol="0" anchor="t"/>
           <a:lstStyle/>
           <a:p>
-            <a:pPr algn="l" indent="0" marL="0">
+            <a:pPr marL="0" indent="0" algn="l">
               <a:lnSpc>
                 <a:spcPct val="140000"/>
               </a:lnSpc>
@@ -15394,7 +15168,7 @@
             <a:endParaRPr lang="en-US" sz="1200" dirty="0"/>
           </a:p>
           <a:p>
-            <a:pPr algn="l" indent="0" marL="0">
+            <a:pPr marL="0" indent="0" algn="l">
               <a:lnSpc>
                 <a:spcPct val="140000"/>
               </a:lnSpc>
@@ -15456,7 +15230,7 @@
           <a:bodyPr wrap="square" lIns="0" tIns="0" rIns="0" bIns="0" rtlCol="0" anchor="t"/>
           <a:lstStyle/>
           <a:p>
-            <a:pPr algn="ctr" indent="0" marL="0">
+            <a:pPr marL="0" indent="0" algn="ctr">
               <a:lnSpc>
                 <a:spcPct val="120000"/>
               </a:lnSpc>
@@ -15523,7 +15297,7 @@
           <a:bodyPr wrap="square" lIns="0" tIns="0" rIns="0" bIns="0" rtlCol="0" anchor="t"/>
           <a:lstStyle/>
           <a:p>
-            <a:pPr algn="l" indent="0" marL="0">
+            <a:pPr marL="0" indent="0" algn="l">
               <a:lnSpc>
                 <a:spcPct val="120000"/>
               </a:lnSpc>
@@ -15565,7 +15339,7 @@
           <a:bodyPr wrap="square" lIns="0" tIns="0" rIns="0" bIns="0" rtlCol="0" anchor="t"/>
           <a:lstStyle/>
           <a:p>
-            <a:pPr algn="l" indent="0" marL="0">
+            <a:pPr marL="0" indent="0" algn="l">
               <a:lnSpc>
                 <a:spcPct val="140000"/>
               </a:lnSpc>
@@ -15585,7 +15359,7 @@
             <a:endParaRPr lang="en-US" sz="1200" dirty="0"/>
           </a:p>
           <a:p>
-            <a:pPr algn="l" indent="0" marL="0">
+            <a:pPr marL="0" indent="0" algn="l">
               <a:lnSpc>
                 <a:spcPct val="140000"/>
               </a:lnSpc>
@@ -15672,7 +15446,7 @@
           <a:bodyPr wrap="square" lIns="0" tIns="0" rIns="0" bIns="0" rtlCol="0" anchor="t"/>
           <a:lstStyle/>
           <a:p>
-            <a:pPr algn="l" indent="0" marL="0">
+            <a:pPr marL="0" indent="0" algn="l">
               <a:lnSpc>
                 <a:spcPct val="120000"/>
               </a:lnSpc>
@@ -15714,7 +15488,7 @@
           <a:bodyPr wrap="square" lIns="0" tIns="0" rIns="0" bIns="0" rtlCol="0" anchor="t"/>
           <a:lstStyle/>
           <a:p>
-            <a:pPr algn="l" indent="0" marL="0">
+            <a:pPr marL="0" indent="0" algn="l">
               <a:lnSpc>
                 <a:spcPct val="140000"/>
               </a:lnSpc>
@@ -15734,7 +15508,7 @@
             <a:endParaRPr lang="en-US" sz="1200" dirty="0"/>
           </a:p>
           <a:p>
-            <a:pPr algn="l" indent="0" marL="0">
+            <a:pPr marL="0" indent="0" algn="l">
               <a:lnSpc>
                 <a:spcPct val="140000"/>
               </a:lnSpc>
@@ -15796,7 +15570,7 @@
           <a:bodyPr wrap="square" lIns="0" tIns="0" rIns="0" bIns="0" rtlCol="0" anchor="t"/>
           <a:lstStyle/>
           <a:p>
-            <a:pPr algn="ctr" indent="0" marL="0">
+            <a:pPr marL="0" indent="0" algn="ctr">
               <a:lnSpc>
                 <a:spcPct val="120000"/>
               </a:lnSpc>
@@ -15863,7 +15637,7 @@
           <a:bodyPr wrap="square" lIns="0" tIns="0" rIns="0" bIns="0" rtlCol="0" anchor="t"/>
           <a:lstStyle/>
           <a:p>
-            <a:pPr algn="l" indent="0" marL="0">
+            <a:pPr marL="0" indent="0" algn="l">
               <a:lnSpc>
                 <a:spcPct val="120000"/>
               </a:lnSpc>
@@ -15905,7 +15679,7 @@
           <a:bodyPr wrap="square" lIns="0" tIns="0" rIns="0" bIns="0" rtlCol="0" anchor="t"/>
           <a:lstStyle/>
           <a:p>
-            <a:pPr algn="l" indent="0" marL="0">
+            <a:pPr marL="0" indent="0" algn="l">
               <a:lnSpc>
                 <a:spcPct val="140000"/>
               </a:lnSpc>
@@ -15925,7 +15699,7 @@
             <a:endParaRPr lang="en-US" sz="1200" dirty="0"/>
           </a:p>
           <a:p>
-            <a:pPr algn="l" indent="0" marL="0">
+            <a:pPr marL="0" indent="0" algn="l">
               <a:lnSpc>
                 <a:spcPct val="140000"/>
               </a:lnSpc>
@@ -16012,7 +15786,7 @@
           <a:bodyPr wrap="square" lIns="0" tIns="0" rIns="0" bIns="0" rtlCol="0" anchor="t"/>
           <a:lstStyle/>
           <a:p>
-            <a:pPr algn="l" indent="0" marL="0">
+            <a:pPr marL="0" indent="0" algn="l">
               <a:lnSpc>
                 <a:spcPct val="120000"/>
               </a:lnSpc>
@@ -16054,7 +15828,7 @@
           <a:bodyPr wrap="square" lIns="0" tIns="0" rIns="0" bIns="0" rtlCol="0" anchor="t"/>
           <a:lstStyle/>
           <a:p>
-            <a:pPr algn="l" indent="0" marL="0">
+            <a:pPr marL="0" indent="0" algn="l">
               <a:lnSpc>
                 <a:spcPct val="140000"/>
               </a:lnSpc>
@@ -16074,7 +15848,7 @@
             <a:endParaRPr lang="en-US" sz="1200" dirty="0"/>
           </a:p>
           <a:p>
-            <a:pPr algn="l" indent="0" marL="0">
+            <a:pPr marL="0" indent="0" algn="l">
               <a:lnSpc>
                 <a:spcPct val="140000"/>
               </a:lnSpc>
@@ -16136,7 +15910,7 @@
           <a:bodyPr wrap="square" lIns="0" tIns="0" rIns="0" bIns="0" rtlCol="0" anchor="t"/>
           <a:lstStyle/>
           <a:p>
-            <a:pPr algn="ctr" indent="0" marL="0">
+            <a:pPr marL="0" indent="0" algn="ctr">
               <a:lnSpc>
                 <a:spcPct val="120000"/>
               </a:lnSpc>
@@ -16203,7 +15977,7 @@
           <a:bodyPr wrap="square" lIns="0" tIns="0" rIns="0" bIns="0" rtlCol="0" anchor="t"/>
           <a:lstStyle/>
           <a:p>
-            <a:pPr algn="l" indent="0" marL="0">
+            <a:pPr marL="0" indent="0" algn="l">
               <a:lnSpc>
                 <a:spcPct val="120000"/>
               </a:lnSpc>
@@ -16245,7 +16019,7 @@
           <a:bodyPr wrap="square" lIns="0" tIns="0" rIns="0" bIns="0" rtlCol="0" anchor="t"/>
           <a:lstStyle/>
           <a:p>
-            <a:pPr algn="l" indent="0" marL="0">
+            <a:pPr marL="0" indent="0" algn="l">
               <a:lnSpc>
                 <a:spcPct val="140000"/>
               </a:lnSpc>
@@ -16265,7 +16039,7 @@
             <a:endParaRPr lang="en-US" sz="1200" dirty="0"/>
           </a:p>
           <a:p>
-            <a:pPr algn="l" indent="0" marL="0">
+            <a:pPr marL="0" indent="0" algn="l">
               <a:lnSpc>
                 <a:spcPct val="140000"/>
               </a:lnSpc>
@@ -16352,7 +16126,7 @@
           <a:bodyPr wrap="square" lIns="0" tIns="0" rIns="0" bIns="0" rtlCol="0" anchor="t"/>
           <a:lstStyle/>
           <a:p>
-            <a:pPr algn="l" indent="0" marL="0">
+            <a:pPr marL="0" indent="0" algn="l">
               <a:lnSpc>
                 <a:spcPct val="120000"/>
               </a:lnSpc>
@@ -16394,7 +16168,7 @@
           <a:bodyPr wrap="square" lIns="0" tIns="0" rIns="0" bIns="0" rtlCol="0" anchor="t"/>
           <a:lstStyle/>
           <a:p>
-            <a:pPr algn="l" indent="0" marL="0">
+            <a:pPr marL="0" indent="0" algn="l">
               <a:lnSpc>
                 <a:spcPct val="140000"/>
               </a:lnSpc>
@@ -16414,7 +16188,7 @@
             <a:endParaRPr lang="en-US" sz="1200" dirty="0"/>
           </a:p>
           <a:p>
-            <a:pPr algn="l" indent="0" marL="0">
+            <a:pPr marL="0" indent="0" algn="l">
               <a:lnSpc>
                 <a:spcPct val="140000"/>
               </a:lnSpc>
@@ -16456,7 +16230,7 @@
           <a:bodyPr wrap="square" lIns="0" tIns="0" rIns="0" bIns="0" rtlCol="0" anchor="t"/>
           <a:lstStyle/>
           <a:p>
-            <a:pPr algn="l" indent="0" marL="0">
+            <a:pPr marL="0" indent="0" algn="l">
               <a:lnSpc>
                 <a:spcPct val="120000"/>
               </a:lnSpc>
@@ -16493,6 +16267,7 @@
         <a:solidFill>
           <a:srgbClr val="FFFFFF"/>
         </a:solidFill>
+        <a:effectLst/>
       </p:bgPr>
     </p:bg>
     <p:spTree>
@@ -16530,7 +16305,7 @@
           <a:bodyPr wrap="square" lIns="0" tIns="0" rIns="0" bIns="0" rtlCol="0" anchor="t"/>
           <a:lstStyle/>
           <a:p>
-            <a:pPr algn="l" indent="0" marL="0">
+            <a:pPr marL="0" indent="0" algn="l">
               <a:lnSpc>
                 <a:spcPct val="130000"/>
               </a:lnSpc>
@@ -16572,7 +16347,7 @@
           <a:bodyPr wrap="square" lIns="0" tIns="0" rIns="0" bIns="0" rtlCol="0" anchor="t"/>
           <a:lstStyle/>
           <a:p>
-            <a:pPr algn="l" indent="0" marL="0">
+            <a:pPr marL="0" indent="0" algn="l">
               <a:lnSpc>
                 <a:spcPct val="120000"/>
               </a:lnSpc>
@@ -16734,7 +16509,7 @@
           <a:bodyPr wrap="square" lIns="0" tIns="0" rIns="0" bIns="0" rtlCol="0" anchor="t"/>
           <a:lstStyle/>
           <a:p>
-            <a:pPr algn="r" indent="0" marL="0">
+            <a:pPr marL="0" indent="0" algn="r">
               <a:lnSpc>
                 <a:spcPct val="120000"/>
               </a:lnSpc>
@@ -16796,7 +16571,7 @@
           <a:bodyPr wrap="square" lIns="0" tIns="0" rIns="0" bIns="0" rtlCol="0" anchor="t"/>
           <a:lstStyle/>
           <a:p>
-            <a:pPr algn="l" indent="0" marL="0">
+            <a:pPr marL="0" indent="0" algn="l">
               <a:lnSpc>
                 <a:spcPct val="120000"/>
               </a:lnSpc>
@@ -16838,7 +16613,7 @@
           <a:bodyPr wrap="square" lIns="0" tIns="0" rIns="0" bIns="0" rtlCol="0" anchor="t"/>
           <a:lstStyle/>
           <a:p>
-            <a:pPr algn="r" indent="0" marL="0">
+            <a:pPr marL="0" indent="0" algn="r">
               <a:lnSpc>
                 <a:spcPct val="120000"/>
               </a:lnSpc>
@@ -16925,7 +16700,7 @@
           <a:bodyPr wrap="square" lIns="0" tIns="0" rIns="0" bIns="0" rtlCol="0" anchor="t"/>
           <a:lstStyle/>
           <a:p>
-            <a:pPr algn="ctr" indent="0" marL="0">
+            <a:pPr marL="0" indent="0" algn="ctr">
               <a:lnSpc>
                 <a:spcPct val="120000"/>
               </a:lnSpc>
@@ -16967,7 +16742,7 @@
           <a:bodyPr wrap="square" lIns="0" tIns="0" rIns="0" bIns="0" rtlCol="0" anchor="t"/>
           <a:lstStyle/>
           <a:p>
-            <a:pPr algn="ctr" indent="0" marL="0">
+            <a:pPr marL="0" indent="0" algn="ctr">
               <a:lnSpc>
                 <a:spcPct val="120000"/>
               </a:lnSpc>
@@ -17009,7 +16784,7 @@
           <a:bodyPr wrap="square" lIns="0" tIns="0" rIns="0" bIns="0" rtlCol="0" anchor="t"/>
           <a:lstStyle/>
           <a:p>
-            <a:pPr algn="ctr" indent="0" marL="0">
+            <a:pPr marL="0" indent="0" algn="ctr">
               <a:lnSpc>
                 <a:spcPct val="120000"/>
               </a:lnSpc>
@@ -17096,7 +16871,7 @@
           <a:bodyPr wrap="square" lIns="0" tIns="0" rIns="0" bIns="0" rtlCol="0" anchor="t"/>
           <a:lstStyle/>
           <a:p>
-            <a:pPr algn="ctr" indent="0" marL="0">
+            <a:pPr marL="0" indent="0" algn="ctr">
               <a:lnSpc>
                 <a:spcPct val="120000"/>
               </a:lnSpc>
@@ -17138,7 +16913,7 @@
           <a:bodyPr wrap="square" lIns="0" tIns="0" rIns="0" bIns="0" rtlCol="0" anchor="t"/>
           <a:lstStyle/>
           <a:p>
-            <a:pPr algn="ctr" indent="0" marL="0">
+            <a:pPr marL="0" indent="0" algn="ctr">
               <a:lnSpc>
                 <a:spcPct val="120000"/>
               </a:lnSpc>
@@ -17180,7 +16955,7 @@
           <a:bodyPr wrap="square" lIns="0" tIns="0" rIns="0" bIns="0" rtlCol="0" anchor="t"/>
           <a:lstStyle/>
           <a:p>
-            <a:pPr algn="ctr" indent="0" marL="0">
+            <a:pPr marL="0" indent="0" algn="ctr">
               <a:lnSpc>
                 <a:spcPct val="120000"/>
               </a:lnSpc>
@@ -17267,7 +17042,7 @@
           <a:bodyPr wrap="square" lIns="0" tIns="0" rIns="0" bIns="0" rtlCol="0" anchor="t"/>
           <a:lstStyle/>
           <a:p>
-            <a:pPr algn="ctr" indent="0" marL="0">
+            <a:pPr marL="0" indent="0" algn="ctr">
               <a:lnSpc>
                 <a:spcPct val="120000"/>
               </a:lnSpc>
@@ -17309,7 +17084,7 @@
           <a:bodyPr wrap="square" lIns="0" tIns="0" rIns="0" bIns="0" rtlCol="0" anchor="t"/>
           <a:lstStyle/>
           <a:p>
-            <a:pPr algn="ctr" indent="0" marL="0">
+            <a:pPr marL="0" indent="0" algn="ctr">
               <a:lnSpc>
                 <a:spcPct val="120000"/>
               </a:lnSpc>
@@ -17351,7 +17126,7 @@
           <a:bodyPr wrap="square" lIns="0" tIns="0" rIns="0" bIns="0" rtlCol="0" anchor="t"/>
           <a:lstStyle/>
           <a:p>
-            <a:pPr algn="ctr" indent="0" marL="0">
+            <a:pPr marL="0" indent="0" algn="ctr">
               <a:lnSpc>
                 <a:spcPct val="120000"/>
               </a:lnSpc>
@@ -17438,7 +17213,7 @@
           <a:bodyPr wrap="square" lIns="0" tIns="0" rIns="0" bIns="0" rtlCol="0" anchor="t"/>
           <a:lstStyle/>
           <a:p>
-            <a:pPr algn="ctr" indent="0" marL="0">
+            <a:pPr marL="0" indent="0" algn="ctr">
               <a:lnSpc>
                 <a:spcPct val="120000"/>
               </a:lnSpc>
@@ -17480,7 +17255,7 @@
           <a:bodyPr wrap="square" lIns="0" tIns="0" rIns="0" bIns="0" rtlCol="0" anchor="t"/>
           <a:lstStyle/>
           <a:p>
-            <a:pPr algn="ctr" indent="0" marL="0">
+            <a:pPr marL="0" indent="0" algn="ctr">
               <a:lnSpc>
                 <a:spcPct val="120000"/>
               </a:lnSpc>
@@ -17522,7 +17297,7 @@
           <a:bodyPr wrap="square" lIns="0" tIns="0" rIns="0" bIns="0" rtlCol="0" anchor="t"/>
           <a:lstStyle/>
           <a:p>
-            <a:pPr algn="ctr" indent="0" marL="0">
+            <a:pPr marL="0" indent="0" algn="ctr">
               <a:lnSpc>
                 <a:spcPct val="120000"/>
               </a:lnSpc>
@@ -17584,7 +17359,7 @@
           <a:bodyPr wrap="square" lIns="0" tIns="0" rIns="0" bIns="0" rtlCol="0" anchor="t"/>
           <a:lstStyle/>
           <a:p>
-            <a:pPr algn="l" indent="0" marL="0">
+            <a:pPr marL="0" indent="0" algn="l">
               <a:lnSpc>
                 <a:spcPct val="120000"/>
               </a:lnSpc>
@@ -17626,7 +17401,7 @@
           <a:bodyPr wrap="square" lIns="0" tIns="0" rIns="0" bIns="0" rtlCol="0" anchor="t"/>
           <a:lstStyle/>
           <a:p>
-            <a:pPr algn="l" indent="0" marL="0">
+            <a:pPr marL="0" indent="0" algn="l">
               <a:lnSpc>
                 <a:spcPct val="150000"/>
               </a:lnSpc>
@@ -17646,7 +17421,7 @@
             <a:endParaRPr lang="en-US" sz="1200" dirty="0"/>
           </a:p>
           <a:p>
-            <a:pPr algn="l" indent="0" marL="0">
+            <a:pPr marL="0" indent="0" algn="l">
               <a:lnSpc>
                 <a:spcPct val="150000"/>
               </a:lnSpc>
@@ -17688,7 +17463,7 @@
           <a:bodyPr wrap="square" lIns="0" tIns="0" rIns="0" bIns="0" rtlCol="0" anchor="t"/>
           <a:lstStyle/>
           <a:p>
-            <a:pPr algn="l" indent="0" marL="0">
+            <a:pPr marL="0" indent="0" algn="l">
               <a:lnSpc>
                 <a:spcPct val="120000"/>
               </a:lnSpc>
@@ -17755,7 +17530,7 @@
           <a:bodyPr wrap="square" lIns="0" tIns="0" rIns="0" bIns="0" rtlCol="0" anchor="t"/>
           <a:lstStyle/>
           <a:p>
-            <a:pPr algn="l" indent="0" marL="0">
+            <a:pPr marL="0" indent="0" algn="l">
               <a:lnSpc>
                 <a:spcPct val="120000"/>
               </a:lnSpc>
@@ -17797,7 +17572,7 @@
           <a:bodyPr wrap="square" lIns="0" tIns="0" rIns="0" bIns="0" rtlCol="0" anchor="t"/>
           <a:lstStyle/>
           <a:p>
-            <a:pPr algn="l" indent="0" marL="0">
+            <a:pPr marL="0" indent="0" algn="l">
               <a:lnSpc>
                 <a:spcPct val="150000"/>
               </a:lnSpc>
@@ -17817,7 +17592,7 @@
             <a:endParaRPr lang="en-US" sz="1200" dirty="0"/>
           </a:p>
           <a:p>
-            <a:pPr algn="l" indent="0" marL="0">
+            <a:pPr marL="0" indent="0" algn="l">
               <a:lnSpc>
                 <a:spcPct val="150000"/>
               </a:lnSpc>
@@ -17837,7 +17612,7 @@
             <a:endParaRPr lang="en-US" sz="1200" dirty="0"/>
           </a:p>
           <a:p>
-            <a:pPr algn="l" indent="0" marL="0">
+            <a:pPr marL="0" indent="0" algn="l">
               <a:lnSpc>
                 <a:spcPct val="150000"/>
               </a:lnSpc>
@@ -17874,6 +17649,7 @@
         <a:solidFill>
           <a:srgbClr val="FFFFFF"/>
         </a:solidFill>
+        <a:effectLst/>
       </p:bgPr>
     </p:bg>
     <p:spTree>
@@ -17911,7 +17687,7 @@
           <a:bodyPr wrap="square" lIns="0" tIns="0" rIns="0" bIns="0" rtlCol="0" anchor="t"/>
           <a:lstStyle/>
           <a:p>
-            <a:pPr algn="l" indent="0" marL="0">
+            <a:pPr marL="0" indent="0" algn="l">
               <a:lnSpc>
                 <a:spcPct val="120000"/>
               </a:lnSpc>
@@ -17993,7 +17769,7 @@
           <a:bodyPr wrap="square" lIns="0" tIns="0" rIns="0" bIns="0" rtlCol="0" anchor="t"/>
           <a:lstStyle/>
           <a:p>
-            <a:pPr algn="ctr" indent="0" marL="0">
+            <a:pPr marL="0" indent="0" algn="ctr">
               <a:lnSpc>
                 <a:spcPct val="120000"/>
               </a:lnSpc>
@@ -18035,7 +17811,7 @@
           <a:bodyPr wrap="square" lIns="0" tIns="0" rIns="0" bIns="0" rtlCol="0" anchor="t"/>
           <a:lstStyle/>
           <a:p>
-            <a:pPr algn="l" indent="0" marL="0">
+            <a:pPr marL="0" indent="0" algn="l">
               <a:lnSpc>
                 <a:spcPct val="120000"/>
               </a:lnSpc>
@@ -18077,7 +17853,7 @@
           <a:bodyPr wrap="square" lIns="0" tIns="0" rIns="0" bIns="0" rtlCol="0" anchor="t"/>
           <a:lstStyle/>
           <a:p>
-            <a:pPr algn="r" indent="0" marL="0">
+            <a:pPr marL="0" indent="0" algn="r">
               <a:lnSpc>
                 <a:spcPct val="120000"/>
               </a:lnSpc>
@@ -18159,7 +17935,7 @@
           <a:bodyPr wrap="square" lIns="0" tIns="0" rIns="0" bIns="0" rtlCol="0" anchor="t"/>
           <a:lstStyle/>
           <a:p>
-            <a:pPr algn="ctr" indent="0" marL="0">
+            <a:pPr marL="0" indent="0" algn="ctr">
               <a:lnSpc>
                 <a:spcPct val="120000"/>
               </a:lnSpc>
@@ -18201,7 +17977,7 @@
           <a:bodyPr wrap="square" lIns="0" tIns="0" rIns="0" bIns="0" rtlCol="0" anchor="t"/>
           <a:lstStyle/>
           <a:p>
-            <a:pPr algn="l" indent="0" marL="0">
+            <a:pPr marL="0" indent="0" algn="l">
               <a:lnSpc>
                 <a:spcPct val="120000"/>
               </a:lnSpc>
@@ -18243,7 +18019,7 @@
           <a:bodyPr wrap="square" lIns="0" tIns="0" rIns="0" bIns="0" rtlCol="0" anchor="t"/>
           <a:lstStyle/>
           <a:p>
-            <a:pPr algn="r" indent="0" marL="0">
+            <a:pPr marL="0" indent="0" algn="r">
               <a:lnSpc>
                 <a:spcPct val="120000"/>
               </a:lnSpc>
@@ -18325,7 +18101,7 @@
           <a:bodyPr wrap="square" lIns="0" tIns="0" rIns="0" bIns="0" rtlCol="0" anchor="t"/>
           <a:lstStyle/>
           <a:p>
-            <a:pPr algn="ctr" indent="0" marL="0">
+            <a:pPr marL="0" indent="0" algn="ctr">
               <a:lnSpc>
                 <a:spcPct val="120000"/>
               </a:lnSpc>
@@ -18367,7 +18143,7 @@
           <a:bodyPr wrap="square" lIns="0" tIns="0" rIns="0" bIns="0" rtlCol="0" anchor="t"/>
           <a:lstStyle/>
           <a:p>
-            <a:pPr algn="l" indent="0" marL="0">
+            <a:pPr marL="0" indent="0" algn="l">
               <a:lnSpc>
                 <a:spcPct val="120000"/>
               </a:lnSpc>
@@ -18409,7 +18185,7 @@
           <a:bodyPr wrap="square" lIns="0" tIns="0" rIns="0" bIns="0" rtlCol="0" anchor="t"/>
           <a:lstStyle/>
           <a:p>
-            <a:pPr algn="r" indent="0" marL="0">
+            <a:pPr marL="0" indent="0" algn="r">
               <a:lnSpc>
                 <a:spcPct val="120000"/>
               </a:lnSpc>
@@ -18491,7 +18267,7 @@
           <a:bodyPr wrap="square" lIns="0" tIns="0" rIns="0" bIns="0" rtlCol="0" anchor="t"/>
           <a:lstStyle/>
           <a:p>
-            <a:pPr algn="ctr" indent="0" marL="0">
+            <a:pPr marL="0" indent="0" algn="ctr">
               <a:lnSpc>
                 <a:spcPct val="120000"/>
               </a:lnSpc>
@@ -18533,7 +18309,7 @@
           <a:bodyPr wrap="square" lIns="0" tIns="0" rIns="0" bIns="0" rtlCol="0" anchor="t"/>
           <a:lstStyle/>
           <a:p>
-            <a:pPr algn="l" indent="0" marL="0">
+            <a:pPr marL="0" indent="0" algn="l">
               <a:lnSpc>
                 <a:spcPct val="120000"/>
               </a:lnSpc>
@@ -18575,7 +18351,7 @@
           <a:bodyPr wrap="square" lIns="0" tIns="0" rIns="0" bIns="0" rtlCol="0" anchor="t"/>
           <a:lstStyle/>
           <a:p>
-            <a:pPr algn="r" indent="0" marL="0">
+            <a:pPr marL="0" indent="0" algn="r">
               <a:lnSpc>
                 <a:spcPct val="120000"/>
               </a:lnSpc>
@@ -18657,7 +18433,7 @@
           <a:bodyPr wrap="square" lIns="0" tIns="0" rIns="0" bIns="0" rtlCol="0" anchor="t"/>
           <a:lstStyle/>
           <a:p>
-            <a:pPr algn="ctr" indent="0" marL="0">
+            <a:pPr marL="0" indent="0" algn="ctr">
               <a:lnSpc>
                 <a:spcPct val="120000"/>
               </a:lnSpc>
@@ -18699,7 +18475,7 @@
           <a:bodyPr wrap="square" lIns="0" tIns="0" rIns="0" bIns="0" rtlCol="0" anchor="t"/>
           <a:lstStyle/>
           <a:p>
-            <a:pPr algn="l" indent="0" marL="0">
+            <a:pPr marL="0" indent="0" algn="l">
               <a:lnSpc>
                 <a:spcPct val="120000"/>
               </a:lnSpc>
@@ -18741,7 +18517,7 @@
           <a:bodyPr wrap="square" lIns="0" tIns="0" rIns="0" bIns="0" rtlCol="0" anchor="t"/>
           <a:lstStyle/>
           <a:p>
-            <a:pPr algn="r" indent="0" marL="0">
+            <a:pPr marL="0" indent="0" algn="r">
               <a:lnSpc>
                 <a:spcPct val="120000"/>
               </a:lnSpc>
@@ -18798,6 +18574,7 @@
         <a:solidFill>
           <a:srgbClr val="FFFFFF"/>
         </a:solidFill>
+        <a:effectLst/>
       </p:bgPr>
     </p:bg>
     <p:spTree>
@@ -18835,7 +18612,7 @@
           <a:bodyPr wrap="square" lIns="0" tIns="0" rIns="0" bIns="0" rtlCol="0" anchor="t"/>
           <a:lstStyle/>
           <a:p>
-            <a:pPr algn="l" indent="0" marL="0">
+            <a:pPr marL="0" indent="0" algn="l">
               <a:lnSpc>
                 <a:spcPct val="130000"/>
               </a:lnSpc>
@@ -18877,7 +18654,7 @@
           <a:bodyPr wrap="square" lIns="0" tIns="0" rIns="0" bIns="0" rtlCol="0" anchor="t"/>
           <a:lstStyle/>
           <a:p>
-            <a:pPr algn="l" indent="0" marL="0">
+            <a:pPr marL="0" indent="0" algn="l">
               <a:lnSpc>
                 <a:spcPct val="120000"/>
               </a:lnSpc>
@@ -19039,7 +18816,7 @@
           <a:bodyPr wrap="square" lIns="0" tIns="0" rIns="0" bIns="0" rtlCol="0" anchor="t"/>
           <a:lstStyle/>
           <a:p>
-            <a:pPr algn="r" indent="0" marL="0">
+            <a:pPr marL="0" indent="0" algn="r">
               <a:lnSpc>
                 <a:spcPct val="120000"/>
               </a:lnSpc>
@@ -19101,7 +18878,7 @@
           <a:bodyPr wrap="square" lIns="0" tIns="0" rIns="0" bIns="0" rtlCol="0" anchor="t"/>
           <a:lstStyle/>
           <a:p>
-            <a:pPr algn="l" indent="0" marL="0">
+            <a:pPr marL="0" indent="0" algn="l">
               <a:lnSpc>
                 <a:spcPct val="120000"/>
               </a:lnSpc>
@@ -19143,7 +18920,7 @@
           <a:bodyPr wrap="square" lIns="0" tIns="0" rIns="0" bIns="0" rtlCol="0" anchor="t"/>
           <a:lstStyle/>
           <a:p>
-            <a:pPr algn="r" indent="0" marL="0">
+            <a:pPr marL="0" indent="0" algn="r">
               <a:lnSpc>
                 <a:spcPct val="120000"/>
               </a:lnSpc>
@@ -19230,7 +19007,7 @@
           <a:bodyPr wrap="square" lIns="0" tIns="0" rIns="0" bIns="0" rtlCol="0" anchor="t"/>
           <a:lstStyle/>
           <a:p>
-            <a:pPr algn="ctr" indent="0" marL="0">
+            <a:pPr marL="0" indent="0" algn="ctr">
               <a:lnSpc>
                 <a:spcPct val="120000"/>
               </a:lnSpc>
@@ -19272,7 +19049,7 @@
           <a:bodyPr wrap="square" lIns="0" tIns="0" rIns="0" bIns="0" rtlCol="0" anchor="t"/>
           <a:lstStyle/>
           <a:p>
-            <a:pPr algn="ctr" indent="0" marL="0">
+            <a:pPr marL="0" indent="0" algn="ctr">
               <a:lnSpc>
                 <a:spcPct val="120000"/>
               </a:lnSpc>
@@ -19314,7 +19091,7 @@
           <a:bodyPr wrap="square" lIns="0" tIns="0" rIns="0" bIns="0" rtlCol="0" anchor="t"/>
           <a:lstStyle/>
           <a:p>
-            <a:pPr algn="ctr" indent="0" marL="0">
+            <a:pPr marL="0" indent="0" algn="ctr">
               <a:lnSpc>
                 <a:spcPct val="120000"/>
               </a:lnSpc>
@@ -19401,7 +19178,7 @@
           <a:bodyPr wrap="square" lIns="0" tIns="0" rIns="0" bIns="0" rtlCol="0" anchor="t"/>
           <a:lstStyle/>
           <a:p>
-            <a:pPr algn="ctr" indent="0" marL="0">
+            <a:pPr marL="0" indent="0" algn="ctr">
               <a:lnSpc>
                 <a:spcPct val="120000"/>
               </a:lnSpc>
@@ -19443,7 +19220,7 @@
           <a:bodyPr wrap="square" lIns="0" tIns="0" rIns="0" bIns="0" rtlCol="0" anchor="t"/>
           <a:lstStyle/>
           <a:p>
-            <a:pPr algn="ctr" indent="0" marL="0">
+            <a:pPr marL="0" indent="0" algn="ctr">
               <a:lnSpc>
                 <a:spcPct val="120000"/>
               </a:lnSpc>
@@ -19485,7 +19262,7 @@
           <a:bodyPr wrap="square" lIns="0" tIns="0" rIns="0" bIns="0" rtlCol="0" anchor="t"/>
           <a:lstStyle/>
           <a:p>
-            <a:pPr algn="ctr" indent="0" marL="0">
+            <a:pPr marL="0" indent="0" algn="ctr">
               <a:lnSpc>
                 <a:spcPct val="120000"/>
               </a:lnSpc>
@@ -19572,7 +19349,7 @@
           <a:bodyPr wrap="square" lIns="0" tIns="0" rIns="0" bIns="0" rtlCol="0" anchor="t"/>
           <a:lstStyle/>
           <a:p>
-            <a:pPr algn="ctr" indent="0" marL="0">
+            <a:pPr marL="0" indent="0" algn="ctr">
               <a:lnSpc>
                 <a:spcPct val="120000"/>
               </a:lnSpc>
@@ -19614,7 +19391,7 @@
           <a:bodyPr wrap="square" lIns="0" tIns="0" rIns="0" bIns="0" rtlCol="0" anchor="t"/>
           <a:lstStyle/>
           <a:p>
-            <a:pPr algn="ctr" indent="0" marL="0">
+            <a:pPr marL="0" indent="0" algn="ctr">
               <a:lnSpc>
                 <a:spcPct val="120000"/>
               </a:lnSpc>
@@ -19656,7 +19433,7 @@
           <a:bodyPr wrap="square" lIns="0" tIns="0" rIns="0" bIns="0" rtlCol="0" anchor="t"/>
           <a:lstStyle/>
           <a:p>
-            <a:pPr algn="ctr" indent="0" marL="0">
+            <a:pPr marL="0" indent="0" algn="ctr">
               <a:lnSpc>
                 <a:spcPct val="120000"/>
               </a:lnSpc>
@@ -19743,7 +19520,7 @@
           <a:bodyPr wrap="square" lIns="0" tIns="0" rIns="0" bIns="0" rtlCol="0" anchor="t"/>
           <a:lstStyle/>
           <a:p>
-            <a:pPr algn="ctr" indent="0" marL="0">
+            <a:pPr marL="0" indent="0" algn="ctr">
               <a:lnSpc>
                 <a:spcPct val="120000"/>
               </a:lnSpc>
@@ -19785,7 +19562,7 @@
           <a:bodyPr wrap="square" lIns="0" tIns="0" rIns="0" bIns="0" rtlCol="0" anchor="t"/>
           <a:lstStyle/>
           <a:p>
-            <a:pPr algn="ctr" indent="0" marL="0">
+            <a:pPr marL="0" indent="0" algn="ctr">
               <a:lnSpc>
                 <a:spcPct val="120000"/>
               </a:lnSpc>
@@ -19827,7 +19604,7 @@
           <a:bodyPr wrap="square" lIns="0" tIns="0" rIns="0" bIns="0" rtlCol="0" anchor="t"/>
           <a:lstStyle/>
           <a:p>
-            <a:pPr algn="ctr" indent="0" marL="0">
+            <a:pPr marL="0" indent="0" algn="ctr">
               <a:lnSpc>
                 <a:spcPct val="120000"/>
               </a:lnSpc>
@@ -19889,7 +19666,7 @@
           <a:bodyPr wrap="square" lIns="0" tIns="0" rIns="0" bIns="0" rtlCol="0" anchor="t"/>
           <a:lstStyle/>
           <a:p>
-            <a:pPr algn="l" indent="0" marL="0">
+            <a:pPr marL="0" indent="0" algn="l">
               <a:lnSpc>
                 <a:spcPct val="120000"/>
               </a:lnSpc>
@@ -19931,7 +19708,7 @@
           <a:bodyPr wrap="square" lIns="0" tIns="0" rIns="0" bIns="0" rtlCol="0" anchor="t"/>
           <a:lstStyle/>
           <a:p>
-            <a:pPr algn="l" indent="0" marL="0">
+            <a:pPr marL="0" indent="0" algn="l">
               <a:lnSpc>
                 <a:spcPct val="150000"/>
               </a:lnSpc>
@@ -19951,7 +19728,7 @@
             <a:endParaRPr lang="en-US" sz="1200" dirty="0"/>
           </a:p>
           <a:p>
-            <a:pPr algn="l" indent="0" marL="0">
+            <a:pPr marL="0" indent="0" algn="l">
               <a:lnSpc>
                 <a:spcPct val="150000"/>
               </a:lnSpc>
@@ -19993,7 +19770,7 @@
           <a:bodyPr wrap="square" lIns="0" tIns="0" rIns="0" bIns="0" rtlCol="0" anchor="t"/>
           <a:lstStyle/>
           <a:p>
-            <a:pPr algn="l" indent="0" marL="0">
+            <a:pPr marL="0" indent="0" algn="l">
               <a:lnSpc>
                 <a:spcPct val="120000"/>
               </a:lnSpc>
@@ -20060,7 +19837,7 @@
           <a:bodyPr wrap="square" lIns="0" tIns="0" rIns="0" bIns="0" rtlCol="0" anchor="t"/>
           <a:lstStyle/>
           <a:p>
-            <a:pPr algn="l" indent="0" marL="0">
+            <a:pPr marL="0" indent="0" algn="l">
               <a:lnSpc>
                 <a:spcPct val="120000"/>
               </a:lnSpc>
@@ -20102,7 +19879,7 @@
           <a:bodyPr wrap="square" lIns="0" tIns="0" rIns="0" bIns="0" rtlCol="0" anchor="t"/>
           <a:lstStyle/>
           <a:p>
-            <a:pPr algn="l" indent="0" marL="0">
+            <a:pPr marL="0" indent="0" algn="l">
               <a:lnSpc>
                 <a:spcPct val="150000"/>
               </a:lnSpc>
@@ -20122,7 +19899,7 @@
             <a:endParaRPr lang="en-US" sz="1200" dirty="0"/>
           </a:p>
           <a:p>
-            <a:pPr algn="l" indent="0" marL="0">
+            <a:pPr marL="0" indent="0" algn="l">
               <a:lnSpc>
                 <a:spcPct val="150000"/>
               </a:lnSpc>
@@ -20142,7 +19919,7 @@
             <a:endParaRPr lang="en-US" sz="1200" dirty="0"/>
           </a:p>
           <a:p>
-            <a:pPr algn="l" indent="0" marL="0">
+            <a:pPr marL="0" indent="0" algn="l">
               <a:lnSpc>
                 <a:spcPct val="150000"/>
               </a:lnSpc>
@@ -20179,6 +19956,7 @@
         <a:solidFill>
           <a:srgbClr val="FFFFFF"/>
         </a:solidFill>
+        <a:effectLst/>
       </p:bgPr>
     </p:bg>
     <p:spTree>
@@ -20216,7 +19994,7 @@
           <a:bodyPr wrap="square" lIns="0" tIns="0" rIns="0" bIns="0" rtlCol="0" anchor="t"/>
           <a:lstStyle/>
           <a:p>
-            <a:pPr algn="l" indent="0" marL="0">
+            <a:pPr marL="0" indent="0" algn="l">
               <a:lnSpc>
                 <a:spcPct val="130000"/>
               </a:lnSpc>
@@ -20378,7 +20156,7 @@
           <a:bodyPr wrap="square" lIns="0" tIns="0" rIns="0" bIns="0" rtlCol="0" anchor="t"/>
           <a:lstStyle/>
           <a:p>
-            <a:pPr algn="r" indent="0" marL="0">
+            <a:pPr marL="0" indent="0" algn="r">
               <a:lnSpc>
                 <a:spcPct val="120000"/>
               </a:lnSpc>
@@ -20440,7 +20218,7 @@
           <a:bodyPr wrap="square" lIns="0" tIns="0" rIns="0" bIns="0" rtlCol="0" anchor="t"/>
           <a:lstStyle/>
           <a:p>
-            <a:pPr algn="l" indent="0" marL="0">
+            <a:pPr marL="0" indent="0" algn="l">
               <a:lnSpc>
                 <a:spcPct val="120000"/>
               </a:lnSpc>
@@ -20482,7 +20260,7 @@
           <a:bodyPr wrap="square" lIns="0" tIns="0" rIns="0" bIns="0" rtlCol="0" anchor="t"/>
           <a:lstStyle/>
           <a:p>
-            <a:pPr algn="r" indent="0" marL="0">
+            <a:pPr marL="0" indent="0" algn="r">
               <a:lnSpc>
                 <a:spcPct val="120000"/>
               </a:lnSpc>
@@ -20544,7 +20322,7 @@
           <a:bodyPr wrap="square" lIns="0" tIns="0" rIns="0" bIns="0" rtlCol="0" anchor="t"/>
           <a:lstStyle/>
           <a:p>
-            <a:pPr algn="l" indent="0" marL="0">
+            <a:pPr marL="0" indent="0" algn="l">
               <a:lnSpc>
                 <a:spcPct val="120000"/>
               </a:lnSpc>
@@ -20586,7 +20364,7 @@
           <a:bodyPr wrap="square" lIns="0" tIns="0" rIns="0" bIns="0" rtlCol="0" anchor="t"/>
           <a:lstStyle/>
           <a:p>
-            <a:pPr algn="l" indent="0" marL="0">
+            <a:pPr marL="0" indent="0" algn="l">
               <a:lnSpc>
                 <a:spcPct val="120000"/>
               </a:lnSpc>
@@ -20606,7 +20384,7 @@
             <a:endParaRPr lang="en-US" sz="2600" dirty="0"/>
           </a:p>
           <a:p>
-            <a:pPr algn="l" indent="0" marL="0">
+            <a:pPr marL="0" indent="0" algn="l">
               <a:lnSpc>
                 <a:spcPct val="120000"/>
               </a:lnSpc>
@@ -20668,7 +20446,7 @@
           <a:bodyPr wrap="square" lIns="0" tIns="0" rIns="0" bIns="0" rtlCol="0" anchor="t"/>
           <a:lstStyle/>
           <a:p>
-            <a:pPr algn="l" indent="0" marL="0">
+            <a:pPr marL="0" indent="0" algn="l">
               <a:lnSpc>
                 <a:spcPct val="120000"/>
               </a:lnSpc>
@@ -20710,7 +20488,7 @@
           <a:bodyPr wrap="square" lIns="0" tIns="0" rIns="0" bIns="0" rtlCol="0" anchor="t"/>
           <a:lstStyle/>
           <a:p>
-            <a:pPr algn="l" indent="0" marL="0">
+            <a:pPr marL="0" indent="0" algn="l">
               <a:lnSpc>
                 <a:spcPct val="120000"/>
               </a:lnSpc>
@@ -20752,7 +20530,7 @@
           <a:bodyPr wrap="square" lIns="0" tIns="0" rIns="0" bIns="0" rtlCol="0" anchor="t"/>
           <a:lstStyle/>
           <a:p>
-            <a:pPr algn="l" indent="0" marL="0">
+            <a:pPr marL="0" indent="0" algn="l">
               <a:lnSpc>
                 <a:spcPct val="120000"/>
               </a:lnSpc>
@@ -20794,7 +20572,7 @@
           <a:bodyPr wrap="square" lIns="0" tIns="0" rIns="0" bIns="0" rtlCol="0" anchor="t"/>
           <a:lstStyle/>
           <a:p>
-            <a:pPr algn="l" indent="0" marL="0">
+            <a:pPr marL="0" indent="0" algn="l">
               <a:lnSpc>
                 <a:spcPct val="120000"/>
               </a:lnSpc>
@@ -20836,7 +20614,7 @@
           <a:bodyPr wrap="square" lIns="0" tIns="0" rIns="0" bIns="0" rtlCol="0" anchor="t"/>
           <a:lstStyle/>
           <a:p>
-            <a:pPr algn="l" indent="0" marL="0">
+            <a:pPr marL="0" indent="0" algn="l">
               <a:lnSpc>
                 <a:spcPct val="120000"/>
               </a:lnSpc>
@@ -20878,7 +20656,7 @@
           <a:bodyPr wrap="square" lIns="0" tIns="0" rIns="0" bIns="0" rtlCol="0" anchor="t"/>
           <a:lstStyle/>
           <a:p>
-            <a:pPr algn="l" indent="0" marL="0">
+            <a:pPr marL="0" indent="0" algn="l">
               <a:lnSpc>
                 <a:spcPct val="120000"/>
               </a:lnSpc>
@@ -20920,7 +20698,7 @@
           <a:bodyPr wrap="square" lIns="0" tIns="0" rIns="0" bIns="0" rtlCol="0" anchor="t"/>
           <a:lstStyle/>
           <a:p>
-            <a:pPr algn="l" indent="0" marL="0">
+            <a:pPr marL="0" indent="0" algn="l">
               <a:lnSpc>
                 <a:spcPct val="120000"/>
               </a:lnSpc>
@@ -20987,7 +20765,7 @@
           <a:bodyPr wrap="square" lIns="0" tIns="0" rIns="0" bIns="0" rtlCol="0" anchor="t"/>
           <a:lstStyle/>
           <a:p>
-            <a:pPr algn="l" indent="0" marL="0">
+            <a:pPr marL="0" indent="0" algn="l">
               <a:lnSpc>
                 <a:spcPct val="120000"/>
               </a:lnSpc>
@@ -21029,7 +20807,7 @@
           <a:bodyPr wrap="square" lIns="0" tIns="0" rIns="0" bIns="0" rtlCol="0" anchor="t"/>
           <a:lstStyle/>
           <a:p>
-            <a:pPr algn="l" indent="0" marL="0">
+            <a:pPr marL="0" indent="0" algn="l">
               <a:lnSpc>
                 <a:spcPct val="150000"/>
               </a:lnSpc>
@@ -21049,7 +20827,7 @@
             <a:endParaRPr lang="en-US" sz="1250" dirty="0"/>
           </a:p>
           <a:p>
-            <a:pPr algn="l" indent="0" marL="0">
+            <a:pPr marL="0" indent="0" algn="l">
               <a:lnSpc>
                 <a:spcPct val="150000"/>
               </a:lnSpc>
@@ -21136,7 +20914,7 @@
           <a:bodyPr wrap="square" lIns="0" tIns="0" rIns="0" bIns="0" rtlCol="0" anchor="t"/>
           <a:lstStyle/>
           <a:p>
-            <a:pPr algn="l" indent="0" marL="0">
+            <a:pPr marL="0" indent="0" algn="l">
               <a:lnSpc>
                 <a:spcPct val="120000"/>
               </a:lnSpc>
@@ -21178,7 +20956,7 @@
           <a:bodyPr wrap="square" lIns="0" tIns="0" rIns="0" bIns="0" rtlCol="0" anchor="t"/>
           <a:lstStyle/>
           <a:p>
-            <a:pPr algn="l" indent="0" marL="0">
+            <a:pPr marL="0" indent="0" algn="l">
               <a:lnSpc>
                 <a:spcPct val="150000"/>
               </a:lnSpc>
@@ -21198,7 +20976,7 @@
             <a:endParaRPr lang="en-US" sz="1250" dirty="0"/>
           </a:p>
           <a:p>
-            <a:pPr algn="l" indent="0" marL="0">
+            <a:pPr marL="0" indent="0" algn="l">
               <a:lnSpc>
                 <a:spcPct val="150000"/>
               </a:lnSpc>
@@ -21285,7 +21063,7 @@
           <a:bodyPr wrap="square" lIns="0" tIns="0" rIns="0" bIns="0" rtlCol="0" anchor="t"/>
           <a:lstStyle/>
           <a:p>
-            <a:pPr algn="l" indent="0" marL="0">
+            <a:pPr marL="0" indent="0" algn="l">
               <a:lnSpc>
                 <a:spcPct val="120000"/>
               </a:lnSpc>
@@ -21327,7 +21105,7 @@
           <a:bodyPr wrap="square" lIns="0" tIns="0" rIns="0" bIns="0" rtlCol="0" anchor="t"/>
           <a:lstStyle/>
           <a:p>
-            <a:pPr algn="l" indent="0" marL="0">
+            <a:pPr marL="0" indent="0" algn="l">
               <a:lnSpc>
                 <a:spcPct val="150000"/>
               </a:lnSpc>
@@ -21347,7 +21125,7 @@
             <a:endParaRPr lang="en-US" sz="1250" dirty="0"/>
           </a:p>
           <a:p>
-            <a:pPr algn="l" indent="0" marL="0">
+            <a:pPr marL="0" indent="0" algn="l">
               <a:lnSpc>
                 <a:spcPct val="150000"/>
               </a:lnSpc>
@@ -21384,6 +21162,7 @@
         <a:solidFill>
           <a:srgbClr val="243300"/>
         </a:solidFill>
+        <a:effectLst/>
       </p:bgPr>
     </p:bg>
     <p:spTree>
@@ -21507,7 +21286,7 @@
           <a:bodyPr wrap="square" lIns="0" tIns="0" rIns="0" bIns="0" rtlCol="0" anchor="t"/>
           <a:lstStyle/>
           <a:p>
-            <a:pPr algn="ctr" indent="0" marL="0">
+            <a:pPr marL="0" indent="0" algn="ctr">
               <a:lnSpc>
                 <a:spcPct val="120000"/>
               </a:lnSpc>
@@ -21549,7 +21328,7 @@
           <a:bodyPr wrap="square" lIns="0" tIns="0" rIns="0" bIns="0" rtlCol="0" anchor="t"/>
           <a:lstStyle/>
           <a:p>
-            <a:pPr algn="ctr" indent="0" marL="0">
+            <a:pPr marL="0" indent="0" algn="ctr">
               <a:lnSpc>
                 <a:spcPct val="120000"/>
               </a:lnSpc>
@@ -21611,7 +21390,7 @@
           <a:bodyPr wrap="square" lIns="0" tIns="0" rIns="0" bIns="0" rtlCol="0" anchor="t"/>
           <a:lstStyle/>
           <a:p>
-            <a:pPr algn="ctr" indent="0" marL="0">
+            <a:pPr marL="0" indent="0" algn="ctr">
               <a:lnSpc>
                 <a:spcPct val="120000"/>
               </a:lnSpc>
@@ -21648,6 +21427,7 @@
         <a:solidFill>
           <a:srgbClr val="FFFFFF"/>
         </a:solidFill>
+        <a:effectLst/>
       </p:bgPr>
     </p:bg>
     <p:spTree>
@@ -21685,7 +21465,7 @@
           <a:bodyPr wrap="square" lIns="0" tIns="0" rIns="0" bIns="0" rtlCol="0" anchor="t"/>
           <a:lstStyle/>
           <a:p>
-            <a:pPr algn="l" indent="0" marL="0">
+            <a:pPr marL="0" indent="0" algn="l">
               <a:lnSpc>
                 <a:spcPct val="130000"/>
               </a:lnSpc>
@@ -21847,7 +21627,7 @@
           <a:bodyPr wrap="square" lIns="0" tIns="0" rIns="0" bIns="0" rtlCol="0" anchor="t"/>
           <a:lstStyle/>
           <a:p>
-            <a:pPr algn="r" indent="0" marL="0">
+            <a:pPr marL="0" indent="0" algn="r">
               <a:lnSpc>
                 <a:spcPct val="120000"/>
               </a:lnSpc>
@@ -21909,7 +21689,7 @@
           <a:bodyPr wrap="square" lIns="0" tIns="0" rIns="0" bIns="0" rtlCol="0" anchor="t"/>
           <a:lstStyle/>
           <a:p>
-            <a:pPr algn="l" indent="0" marL="0">
+            <a:pPr marL="0" indent="0" algn="l">
               <a:lnSpc>
                 <a:spcPct val="120000"/>
               </a:lnSpc>
@@ -21951,7 +21731,7 @@
           <a:bodyPr wrap="square" lIns="0" tIns="0" rIns="0" bIns="0" rtlCol="0" anchor="t"/>
           <a:lstStyle/>
           <a:p>
-            <a:pPr algn="r" indent="0" marL="0">
+            <a:pPr marL="0" indent="0" algn="r">
               <a:lnSpc>
                 <a:spcPct val="120000"/>
               </a:lnSpc>
@@ -21993,7 +21773,7 @@
           <a:bodyPr wrap="square" lIns="0" tIns="0" rIns="0" bIns="0" rtlCol="0" anchor="t"/>
           <a:lstStyle/>
           <a:p>
-            <a:pPr algn="l" indent="0" marL="0">
+            <a:pPr marL="0" indent="0" algn="l">
               <a:lnSpc>
                 <a:spcPct val="120000"/>
               </a:lnSpc>
@@ -22080,7 +21860,7 @@
           <a:bodyPr wrap="square" lIns="0" tIns="0" rIns="0" bIns="0" rtlCol="0" anchor="t"/>
           <a:lstStyle/>
           <a:p>
-            <a:pPr algn="l" indent="0" marL="0">
+            <a:pPr marL="0" indent="0" algn="l">
               <a:lnSpc>
                 <a:spcPct val="120000"/>
               </a:lnSpc>
@@ -22122,7 +21902,7 @@
           <a:bodyPr wrap="square" lIns="0" tIns="0" rIns="0" bIns="0" rtlCol="0" anchor="t"/>
           <a:lstStyle/>
           <a:p>
-            <a:pPr algn="l" indent="0" marL="0">
+            <a:pPr marL="0" indent="0" algn="l">
               <a:lnSpc>
                 <a:spcPct val="135000"/>
               </a:lnSpc>
@@ -22142,7 +21922,7 @@
             <a:endParaRPr lang="en-US" sz="1500" dirty="0"/>
           </a:p>
           <a:p>
-            <a:pPr algn="l" indent="0" marL="0">
+            <a:pPr marL="0" indent="0" algn="l">
               <a:lnSpc>
                 <a:spcPct val="135000"/>
               </a:lnSpc>
@@ -22184,7 +21964,7 @@
           <a:bodyPr wrap="square" lIns="0" tIns="0" rIns="0" bIns="0" rtlCol="0" anchor="t"/>
           <a:lstStyle/>
           <a:p>
-            <a:pPr algn="l" indent="0" marL="0">
+            <a:pPr marL="0" indent="0" algn="l">
               <a:lnSpc>
                 <a:spcPct val="160000"/>
               </a:lnSpc>
@@ -22204,7 +21984,7 @@
             <a:endParaRPr lang="en-US" sz="1150" dirty="0"/>
           </a:p>
           <a:p>
-            <a:pPr algn="l" indent="0" marL="0">
+            <a:pPr marL="0" indent="0" algn="l">
               <a:lnSpc>
                 <a:spcPct val="160000"/>
               </a:lnSpc>
@@ -22224,7 +22004,7 @@
             <a:endParaRPr lang="en-US" sz="1150" dirty="0"/>
           </a:p>
           <a:p>
-            <a:pPr algn="l" indent="0" marL="0">
+            <a:pPr marL="0" indent="0" algn="l">
               <a:lnSpc>
                 <a:spcPct val="160000"/>
               </a:lnSpc>
@@ -22244,7 +22024,7 @@
             <a:endParaRPr lang="en-US" sz="1150" dirty="0"/>
           </a:p>
           <a:p>
-            <a:pPr algn="l" indent="0" marL="0">
+            <a:pPr marL="0" indent="0" algn="l">
               <a:lnSpc>
                 <a:spcPct val="160000"/>
               </a:lnSpc>
@@ -22286,7 +22066,7 @@
           <a:bodyPr wrap="square" lIns="0" tIns="0" rIns="0" bIns="0" rtlCol="0" anchor="t"/>
           <a:lstStyle/>
           <a:p>
-            <a:pPr algn="l" indent="0" marL="0">
+            <a:pPr marL="0" indent="0" algn="l">
               <a:lnSpc>
                 <a:spcPct val="160000"/>
               </a:lnSpc>
@@ -22306,7 +22086,7 @@
             <a:endParaRPr lang="en-US" sz="1150" dirty="0"/>
           </a:p>
           <a:p>
-            <a:pPr algn="l" indent="0" marL="0">
+            <a:pPr marL="0" indent="0" algn="l">
               <a:lnSpc>
                 <a:spcPct val="160000"/>
               </a:lnSpc>
@@ -22326,7 +22106,7 @@
             <a:endParaRPr lang="en-US" sz="1150" dirty="0"/>
           </a:p>
           <a:p>
-            <a:pPr algn="l" indent="0" marL="0">
+            <a:pPr marL="0" indent="0" algn="l">
               <a:lnSpc>
                 <a:spcPct val="160000"/>
               </a:lnSpc>
@@ -22413,7 +22193,7 @@
           <a:bodyPr wrap="square" lIns="0" tIns="0" rIns="0" bIns="0" rtlCol="0" anchor="t"/>
           <a:lstStyle/>
           <a:p>
-            <a:pPr algn="l" indent="0" marL="0">
+            <a:pPr marL="0" indent="0" algn="l">
               <a:lnSpc>
                 <a:spcPct val="120000"/>
               </a:lnSpc>
@@ -22455,7 +22235,7 @@
           <a:bodyPr wrap="square" lIns="0" tIns="0" rIns="0" bIns="0" rtlCol="0" anchor="t"/>
           <a:lstStyle/>
           <a:p>
-            <a:pPr algn="l" indent="0" marL="0">
+            <a:pPr marL="0" indent="0" algn="l">
               <a:lnSpc>
                 <a:spcPct val="135000"/>
               </a:lnSpc>
@@ -22475,7 +22255,7 @@
             <a:endParaRPr lang="en-US" sz="1500" dirty="0"/>
           </a:p>
           <a:p>
-            <a:pPr algn="l" indent="0" marL="0">
+            <a:pPr marL="0" indent="0" algn="l">
               <a:lnSpc>
                 <a:spcPct val="135000"/>
               </a:lnSpc>
@@ -22517,7 +22297,7 @@
           <a:bodyPr wrap="square" lIns="0" tIns="0" rIns="0" bIns="0" rtlCol="0" anchor="t"/>
           <a:lstStyle/>
           <a:p>
-            <a:pPr algn="l" indent="0" marL="0">
+            <a:pPr marL="0" indent="0" algn="l">
               <a:lnSpc>
                 <a:spcPct val="160000"/>
               </a:lnSpc>
@@ -22537,7 +22317,7 @@
             <a:endParaRPr lang="en-US" sz="1150" dirty="0"/>
           </a:p>
           <a:p>
-            <a:pPr algn="l" indent="0" marL="0">
+            <a:pPr marL="0" indent="0" algn="l">
               <a:lnSpc>
                 <a:spcPct val="160000"/>
               </a:lnSpc>
@@ -22557,7 +22337,7 @@
             <a:endParaRPr lang="en-US" sz="1150" dirty="0"/>
           </a:p>
           <a:p>
-            <a:pPr algn="l" indent="0" marL="0">
+            <a:pPr marL="0" indent="0" algn="l">
               <a:lnSpc>
                 <a:spcPct val="160000"/>
               </a:lnSpc>
@@ -22577,7 +22357,7 @@
             <a:endParaRPr lang="en-US" sz="1150" dirty="0"/>
           </a:p>
           <a:p>
-            <a:pPr algn="l" indent="0" marL="0">
+            <a:pPr marL="0" indent="0" algn="l">
               <a:lnSpc>
                 <a:spcPct val="160000"/>
               </a:lnSpc>
@@ -22619,7 +22399,7 @@
           <a:bodyPr wrap="square" lIns="0" tIns="0" rIns="0" bIns="0" rtlCol="0" anchor="t"/>
           <a:lstStyle/>
           <a:p>
-            <a:pPr algn="l" indent="0" marL="0">
+            <a:pPr marL="0" indent="0" algn="l">
               <a:lnSpc>
                 <a:spcPct val="160000"/>
               </a:lnSpc>
@@ -22639,7 +22419,7 @@
             <a:endParaRPr lang="en-US" sz="1150" dirty="0"/>
           </a:p>
           <a:p>
-            <a:pPr algn="l" indent="0" marL="0">
+            <a:pPr marL="0" indent="0" algn="l">
               <a:lnSpc>
                 <a:spcPct val="160000"/>
               </a:lnSpc>
@@ -22726,7 +22506,7 @@
           <a:bodyPr wrap="square" lIns="0" tIns="0" rIns="0" bIns="0" rtlCol="0" anchor="t"/>
           <a:lstStyle/>
           <a:p>
-            <a:pPr algn="l" indent="0" marL="0">
+            <a:pPr marL="0" indent="0" algn="l">
               <a:lnSpc>
                 <a:spcPct val="120000"/>
               </a:lnSpc>
@@ -22768,7 +22548,7 @@
           <a:bodyPr wrap="square" lIns="0" tIns="0" rIns="0" bIns="0" rtlCol="0" anchor="t"/>
           <a:lstStyle/>
           <a:p>
-            <a:pPr algn="l" indent="0" marL="0">
+            <a:pPr marL="0" indent="0" algn="l">
               <a:lnSpc>
                 <a:spcPct val="135000"/>
               </a:lnSpc>
@@ -22810,7 +22590,7 @@
           <a:bodyPr wrap="square" lIns="0" tIns="0" rIns="0" bIns="0" rtlCol="0" anchor="t"/>
           <a:lstStyle/>
           <a:p>
-            <a:pPr algn="l" indent="0" marL="0">
+            <a:pPr marL="0" indent="0" algn="l">
               <a:lnSpc>
                 <a:spcPct val="120000"/>
               </a:lnSpc>
@@ -22852,7 +22632,7 @@
           <a:bodyPr wrap="square" lIns="0" tIns="0" rIns="0" bIns="0" rtlCol="0" anchor="t"/>
           <a:lstStyle/>
           <a:p>
-            <a:pPr algn="l" indent="0" marL="0">
+            <a:pPr marL="0" indent="0" algn="l">
               <a:lnSpc>
                 <a:spcPct val="160000"/>
               </a:lnSpc>
@@ -22872,7 +22652,7 @@
             <a:endParaRPr lang="en-US" sz="1150" dirty="0"/>
           </a:p>
           <a:p>
-            <a:pPr algn="l" indent="0" marL="0">
+            <a:pPr marL="0" indent="0" algn="l">
               <a:lnSpc>
                 <a:spcPct val="160000"/>
               </a:lnSpc>
@@ -22892,7 +22672,7 @@
             <a:endParaRPr lang="en-US" sz="1150" dirty="0"/>
           </a:p>
           <a:p>
-            <a:pPr algn="l" indent="0" marL="0">
+            <a:pPr marL="0" indent="0" algn="l">
               <a:lnSpc>
                 <a:spcPct val="160000"/>
               </a:lnSpc>
@@ -22934,7 +22714,7 @@
           <a:bodyPr wrap="square" lIns="0" tIns="0" rIns="0" bIns="0" rtlCol="0" anchor="t"/>
           <a:lstStyle/>
           <a:p>
-            <a:pPr algn="l" indent="0" marL="0">
+            <a:pPr marL="0" indent="0" algn="l">
               <a:lnSpc>
                 <a:spcPct val="120000"/>
               </a:lnSpc>
@@ -22976,7 +22756,7 @@
           <a:bodyPr wrap="square" lIns="0" tIns="0" rIns="0" bIns="0" rtlCol="0" anchor="t"/>
           <a:lstStyle/>
           <a:p>
-            <a:pPr algn="l" indent="0" marL="0">
+            <a:pPr marL="0" indent="0" algn="l">
               <a:lnSpc>
                 <a:spcPct val="160000"/>
               </a:lnSpc>
@@ -22996,7 +22776,7 @@
             <a:endParaRPr lang="en-US" sz="1150" dirty="0"/>
           </a:p>
           <a:p>
-            <a:pPr algn="l" indent="0" marL="0">
+            <a:pPr marL="0" indent="0" algn="l">
               <a:lnSpc>
                 <a:spcPct val="160000"/>
               </a:lnSpc>
@@ -23038,7 +22818,7 @@
           <a:bodyPr wrap="square" lIns="0" tIns="0" rIns="0" bIns="0" rtlCol="0" anchor="t"/>
           <a:lstStyle/>
           <a:p>
-            <a:pPr algn="l" indent="0" marL="0">
+            <a:pPr marL="0" indent="0" algn="l">
               <a:lnSpc>
                 <a:spcPct val="120000"/>
               </a:lnSpc>
@@ -23080,7 +22860,7 @@
           <a:bodyPr wrap="square" lIns="0" tIns="0" rIns="0" bIns="0" rtlCol="0" anchor="t"/>
           <a:lstStyle/>
           <a:p>
-            <a:pPr algn="l" indent="0" marL="0">
+            <a:pPr marL="0" indent="0" algn="l">
               <a:lnSpc>
                 <a:spcPct val="160000"/>
               </a:lnSpc>
@@ -23100,7 +22880,7 @@
             <a:endParaRPr lang="en-US" sz="1150" dirty="0"/>
           </a:p>
           <a:p>
-            <a:pPr algn="l" indent="0" marL="0">
+            <a:pPr marL="0" indent="0" algn="l">
               <a:lnSpc>
                 <a:spcPct val="160000"/>
               </a:lnSpc>
@@ -23187,7 +22967,7 @@
           <a:bodyPr wrap="square" lIns="0" tIns="0" rIns="0" bIns="0" rtlCol="0" anchor="t"/>
           <a:lstStyle/>
           <a:p>
-            <a:pPr algn="l" indent="0" marL="0">
+            <a:pPr marL="0" indent="0" algn="l">
               <a:lnSpc>
                 <a:spcPct val="120000"/>
               </a:lnSpc>
@@ -23229,7 +23009,7 @@
           <a:bodyPr wrap="square" lIns="0" tIns="0" rIns="0" bIns="0" rtlCol="0" anchor="t"/>
           <a:lstStyle/>
           <a:p>
-            <a:pPr algn="l" indent="0" marL="0">
+            <a:pPr marL="0" indent="0" algn="l">
               <a:lnSpc>
                 <a:spcPct val="135000"/>
               </a:lnSpc>
@@ -23249,7 +23029,7 @@
             <a:endParaRPr lang="en-US" sz="1500" dirty="0"/>
           </a:p>
           <a:p>
-            <a:pPr algn="l" indent="0" marL="0">
+            <a:pPr marL="0" indent="0" algn="l">
               <a:lnSpc>
                 <a:spcPct val="135000"/>
               </a:lnSpc>
@@ -23291,7 +23071,7 @@
           <a:bodyPr wrap="square" lIns="0" tIns="0" rIns="0" bIns="0" rtlCol="0" anchor="t"/>
           <a:lstStyle/>
           <a:p>
-            <a:pPr algn="l" indent="0" marL="0">
+            <a:pPr marL="0" indent="0" algn="l">
               <a:lnSpc>
                 <a:spcPct val="120000"/>
               </a:lnSpc>
@@ -23333,7 +23113,7 @@
           <a:bodyPr wrap="square" lIns="0" tIns="0" rIns="0" bIns="0" rtlCol="0" anchor="t"/>
           <a:lstStyle/>
           <a:p>
-            <a:pPr algn="l" indent="0" marL="0">
+            <a:pPr marL="0" indent="0" algn="l">
               <a:lnSpc>
                 <a:spcPct val="160000"/>
               </a:lnSpc>
@@ -23353,7 +23133,7 @@
             <a:endParaRPr lang="en-US" sz="1150" dirty="0"/>
           </a:p>
           <a:p>
-            <a:pPr algn="l" indent="0" marL="0">
+            <a:pPr marL="0" indent="0" algn="l">
               <a:lnSpc>
                 <a:spcPct val="160000"/>
               </a:lnSpc>
@@ -23395,7 +23175,7 @@
           <a:bodyPr wrap="square" lIns="0" tIns="0" rIns="0" bIns="0" rtlCol="0" anchor="t"/>
           <a:lstStyle/>
           <a:p>
-            <a:pPr algn="l" indent="0" marL="0">
+            <a:pPr marL="0" indent="0" algn="l">
               <a:lnSpc>
                 <a:spcPct val="120000"/>
               </a:lnSpc>
@@ -23437,7 +23217,7 @@
           <a:bodyPr wrap="square" lIns="0" tIns="0" rIns="0" bIns="0" rtlCol="0" anchor="t"/>
           <a:lstStyle/>
           <a:p>
-            <a:pPr algn="l" indent="0" marL="0">
+            <a:pPr marL="0" indent="0" algn="l">
               <a:lnSpc>
                 <a:spcPct val="160000"/>
               </a:lnSpc>
@@ -23457,7 +23237,7 @@
             <a:endParaRPr lang="en-US" sz="1150" dirty="0"/>
           </a:p>
           <a:p>
-            <a:pPr algn="l" indent="0" marL="0">
+            <a:pPr marL="0" indent="0" algn="l">
               <a:lnSpc>
                 <a:spcPct val="160000"/>
               </a:lnSpc>
@@ -23499,7 +23279,7 @@
           <a:bodyPr wrap="square" lIns="0" tIns="0" rIns="0" bIns="0" rtlCol="0" anchor="t"/>
           <a:lstStyle/>
           <a:p>
-            <a:pPr algn="l" indent="0" marL="0">
+            <a:pPr marL="0" indent="0" algn="l">
               <a:lnSpc>
                 <a:spcPct val="120000"/>
               </a:lnSpc>
@@ -23541,7 +23321,7 @@
           <a:bodyPr wrap="square" lIns="0" tIns="0" rIns="0" bIns="0" rtlCol="0" anchor="t"/>
           <a:lstStyle/>
           <a:p>
-            <a:pPr algn="l" indent="0" marL="0">
+            <a:pPr marL="0" indent="0" algn="l">
               <a:lnSpc>
                 <a:spcPct val="160000"/>
               </a:lnSpc>
@@ -23561,7 +23341,7 @@
             <a:endParaRPr lang="en-US" sz="1150" dirty="0"/>
           </a:p>
           <a:p>
-            <a:pPr algn="l" indent="0" marL="0">
+            <a:pPr marL="0" indent="0" algn="l">
               <a:lnSpc>
                 <a:spcPct val="160000"/>
               </a:lnSpc>
@@ -23648,7 +23428,7 @@
           <a:bodyPr wrap="square" lIns="0" tIns="0" rIns="0" bIns="0" rtlCol="0" anchor="t"/>
           <a:lstStyle/>
           <a:p>
-            <a:pPr algn="l" indent="0" marL="0">
+            <a:pPr marL="0" indent="0" algn="l">
               <a:lnSpc>
                 <a:spcPct val="120000"/>
               </a:lnSpc>
@@ -23690,7 +23470,7 @@
           <a:bodyPr wrap="square" lIns="0" tIns="0" rIns="0" bIns="0" rtlCol="0" anchor="t"/>
           <a:lstStyle/>
           <a:p>
-            <a:pPr algn="l" indent="0" marL="0">
+            <a:pPr marL="0" indent="0" algn="l">
               <a:lnSpc>
                 <a:spcPct val="135000"/>
               </a:lnSpc>
@@ -23710,7 +23490,7 @@
             <a:endParaRPr lang="en-US" sz="1500" dirty="0"/>
           </a:p>
           <a:p>
-            <a:pPr algn="l" indent="0" marL="0">
+            <a:pPr marL="0" indent="0" algn="l">
               <a:lnSpc>
                 <a:spcPct val="135000"/>
               </a:lnSpc>
@@ -23752,7 +23532,7 @@
           <a:bodyPr wrap="square" lIns="0" tIns="0" rIns="0" bIns="0" rtlCol="0" anchor="t"/>
           <a:lstStyle/>
           <a:p>
-            <a:pPr algn="l" indent="0" marL="0">
+            <a:pPr marL="0" indent="0" algn="l">
               <a:lnSpc>
                 <a:spcPct val="160000"/>
               </a:lnSpc>
@@ -23772,7 +23552,7 @@
             <a:endParaRPr lang="en-US" sz="1150" dirty="0"/>
           </a:p>
           <a:p>
-            <a:pPr algn="l" indent="0" marL="0">
+            <a:pPr marL="0" indent="0" algn="l">
               <a:lnSpc>
                 <a:spcPct val="160000"/>
               </a:lnSpc>
@@ -23792,7 +23572,7 @@
             <a:endParaRPr lang="en-US" sz="1150" dirty="0"/>
           </a:p>
           <a:p>
-            <a:pPr algn="l" indent="0" marL="0">
+            <a:pPr marL="0" indent="0" algn="l">
               <a:lnSpc>
                 <a:spcPct val="160000"/>
               </a:lnSpc>
@@ -23834,7 +23614,7 @@
           <a:bodyPr wrap="square" lIns="0" tIns="0" rIns="0" bIns="0" rtlCol="0" anchor="t"/>
           <a:lstStyle/>
           <a:p>
-            <a:pPr algn="l" indent="0" marL="0">
+            <a:pPr marL="0" indent="0" algn="l">
               <a:lnSpc>
                 <a:spcPct val="160000"/>
               </a:lnSpc>
@@ -23854,7 +23634,7 @@
             <a:endParaRPr lang="en-US" sz="1150" dirty="0"/>
           </a:p>
           <a:p>
-            <a:pPr algn="l" indent="0" marL="0">
+            <a:pPr marL="0" indent="0" algn="l">
               <a:lnSpc>
                 <a:spcPct val="160000"/>
               </a:lnSpc>
@@ -23874,7 +23654,7 @@
             <a:endParaRPr lang="en-US" sz="1150" dirty="0"/>
           </a:p>
           <a:p>
-            <a:pPr algn="l" indent="0" marL="0">
+            <a:pPr marL="0" indent="0" algn="l">
               <a:lnSpc>
                 <a:spcPct val="160000"/>
               </a:lnSpc>
@@ -23916,7 +23696,7 @@
           <a:bodyPr wrap="square" lIns="0" tIns="0" rIns="0" bIns="0" rtlCol="0" anchor="t"/>
           <a:lstStyle/>
           <a:p>
-            <a:pPr algn="l" indent="0" marL="0">
+            <a:pPr marL="0" indent="0" algn="l">
               <a:lnSpc>
                 <a:spcPct val="160000"/>
               </a:lnSpc>
@@ -23936,7 +23716,7 @@
             <a:endParaRPr lang="en-US" sz="1150" dirty="0"/>
           </a:p>
           <a:p>
-            <a:pPr algn="l" indent="0" marL="0">
+            <a:pPr marL="0" indent="0" algn="l">
               <a:lnSpc>
                 <a:spcPct val="160000"/>
               </a:lnSpc>
@@ -23973,6 +23753,7 @@
         <a:solidFill>
           <a:srgbClr val="FFFFFF"/>
         </a:solidFill>
+        <a:effectLst/>
       </p:bgPr>
     </p:bg>
     <p:spTree>
@@ -24010,7 +23791,7 @@
           <a:bodyPr wrap="square" lIns="0" tIns="0" rIns="0" bIns="0" rtlCol="0" anchor="t"/>
           <a:lstStyle/>
           <a:p>
-            <a:pPr algn="l" indent="0" marL="0">
+            <a:pPr marL="0" indent="0" algn="l">
               <a:lnSpc>
                 <a:spcPct val="130000"/>
               </a:lnSpc>
@@ -24172,7 +23953,7 @@
           <a:bodyPr wrap="square" lIns="0" tIns="0" rIns="0" bIns="0" rtlCol="0" anchor="t"/>
           <a:lstStyle/>
           <a:p>
-            <a:pPr algn="r" indent="0" marL="0">
+            <a:pPr marL="0" indent="0" algn="r">
               <a:lnSpc>
                 <a:spcPct val="120000"/>
               </a:lnSpc>
@@ -24234,7 +24015,7 @@
           <a:bodyPr wrap="square" lIns="0" tIns="0" rIns="0" bIns="0" rtlCol="0" anchor="t"/>
           <a:lstStyle/>
           <a:p>
-            <a:pPr algn="l" indent="0" marL="0">
+            <a:pPr marL="0" indent="0" algn="l">
               <a:lnSpc>
                 <a:spcPct val="120000"/>
               </a:lnSpc>
@@ -24276,7 +24057,7 @@
           <a:bodyPr wrap="square" lIns="0" tIns="0" rIns="0" bIns="0" rtlCol="0" anchor="t"/>
           <a:lstStyle/>
           <a:p>
-            <a:pPr algn="r" indent="0" marL="0">
+            <a:pPr marL="0" indent="0" algn="r">
               <a:lnSpc>
                 <a:spcPct val="120000"/>
               </a:lnSpc>
@@ -24318,7 +24099,7 @@
           <a:bodyPr wrap="square" lIns="0" tIns="0" rIns="0" bIns="0" rtlCol="0" anchor="t"/>
           <a:lstStyle/>
           <a:p>
-            <a:pPr algn="l" indent="0" marL="0">
+            <a:pPr marL="0" indent="0" algn="l">
               <a:lnSpc>
                 <a:spcPct val="120000"/>
               </a:lnSpc>
@@ -24410,7 +24191,7 @@
           <a:bodyPr wrap="square" lIns="0" tIns="0" rIns="0" bIns="0" rtlCol="0" anchor="t"/>
           <a:lstStyle/>
           <a:p>
-            <a:pPr algn="ctr" indent="0" marL="0">
+            <a:pPr marL="0" indent="0" algn="ctr">
               <a:lnSpc>
                 <a:spcPct val="120000"/>
               </a:lnSpc>
@@ -24452,7 +24233,7 @@
           <a:bodyPr wrap="square" lIns="0" tIns="0" rIns="0" bIns="0" rtlCol="0" anchor="t"/>
           <a:lstStyle/>
           <a:p>
-            <a:pPr algn="l" indent="0" marL="0">
+            <a:pPr marL="0" indent="0" algn="l">
               <a:lnSpc>
                 <a:spcPct val="120000"/>
               </a:lnSpc>
@@ -24494,7 +24275,7 @@
           <a:bodyPr wrap="square" lIns="0" tIns="0" rIns="0" bIns="0" rtlCol="0" anchor="t"/>
           <a:lstStyle/>
           <a:p>
-            <a:pPr algn="r" indent="0" marL="0">
+            <a:pPr marL="0" indent="0" algn="r">
               <a:lnSpc>
                 <a:spcPct val="120000"/>
               </a:lnSpc>
@@ -24556,7 +24337,7 @@
           <a:bodyPr wrap="square" lIns="0" tIns="0" rIns="0" bIns="0" rtlCol="0" anchor="t"/>
           <a:lstStyle/>
           <a:p>
-            <a:pPr algn="ctr" indent="0" marL="0">
+            <a:pPr marL="0" indent="0" algn="ctr">
               <a:lnSpc>
                 <a:spcPct val="120000"/>
               </a:lnSpc>
@@ -24618,7 +24399,7 @@
           <a:bodyPr wrap="square" lIns="0" tIns="0" rIns="0" bIns="0" rtlCol="0" anchor="t"/>
           <a:lstStyle/>
           <a:p>
-            <a:pPr algn="l" indent="0" marL="0">
+            <a:pPr marL="0" indent="0" algn="l">
               <a:lnSpc>
                 <a:spcPct val="190000"/>
               </a:lnSpc>
@@ -24638,7 +24419,7 @@
             <a:endParaRPr lang="en-US" sz="1150" dirty="0"/>
           </a:p>
           <a:p>
-            <a:pPr algn="l" indent="0" marL="0">
+            <a:pPr marL="0" indent="0" algn="l">
               <a:lnSpc>
                 <a:spcPct val="190000"/>
               </a:lnSpc>
@@ -24658,7 +24439,7 @@
             <a:endParaRPr lang="en-US" sz="1150" dirty="0"/>
           </a:p>
           <a:p>
-            <a:pPr algn="l" indent="0" marL="0">
+            <a:pPr marL="0" indent="0" algn="l">
               <a:lnSpc>
                 <a:spcPct val="190000"/>
               </a:lnSpc>
@@ -24678,7 +24459,7 @@
             <a:endParaRPr lang="en-US" sz="1150" dirty="0"/>
           </a:p>
           <a:p>
-            <a:pPr algn="l" indent="0" marL="0">
+            <a:pPr marL="0" indent="0" algn="l">
               <a:lnSpc>
                 <a:spcPct val="190000"/>
               </a:lnSpc>
@@ -24698,7 +24479,7 @@
             <a:endParaRPr lang="en-US" sz="1150" dirty="0"/>
           </a:p>
           <a:p>
-            <a:pPr algn="l" indent="0" marL="0">
+            <a:pPr marL="0" indent="0" algn="l">
               <a:lnSpc>
                 <a:spcPct val="190000"/>
               </a:lnSpc>
@@ -24790,7 +24571,7 @@
           <a:bodyPr wrap="square" lIns="0" tIns="0" rIns="0" bIns="0" rtlCol="0" anchor="t"/>
           <a:lstStyle/>
           <a:p>
-            <a:pPr algn="ctr" indent="0" marL="0">
+            <a:pPr marL="0" indent="0" algn="ctr">
               <a:lnSpc>
                 <a:spcPct val="120000"/>
               </a:lnSpc>
@@ -24832,7 +24613,7 @@
           <a:bodyPr wrap="square" lIns="0" tIns="0" rIns="0" bIns="0" rtlCol="0" anchor="t"/>
           <a:lstStyle/>
           <a:p>
-            <a:pPr algn="l" indent="0" marL="0">
+            <a:pPr marL="0" indent="0" algn="l">
               <a:lnSpc>
                 <a:spcPct val="120000"/>
               </a:lnSpc>
@@ -24874,7 +24655,7 @@
           <a:bodyPr wrap="square" lIns="0" tIns="0" rIns="0" bIns="0" rtlCol="0" anchor="t"/>
           <a:lstStyle/>
           <a:p>
-            <a:pPr algn="r" indent="0" marL="0">
+            <a:pPr marL="0" indent="0" algn="r">
               <a:lnSpc>
                 <a:spcPct val="120000"/>
               </a:lnSpc>
@@ -24936,7 +24717,7 @@
           <a:bodyPr wrap="square" lIns="0" tIns="0" rIns="0" bIns="0" rtlCol="0" anchor="t"/>
           <a:lstStyle/>
           <a:p>
-            <a:pPr algn="ctr" indent="0" marL="0">
+            <a:pPr marL="0" indent="0" algn="ctr">
               <a:lnSpc>
                 <a:spcPct val="120000"/>
               </a:lnSpc>
@@ -24998,7 +24779,7 @@
           <a:bodyPr wrap="square" lIns="0" tIns="0" rIns="0" bIns="0" rtlCol="0" anchor="t"/>
           <a:lstStyle/>
           <a:p>
-            <a:pPr algn="l" indent="0" marL="0">
+            <a:pPr marL="0" indent="0" algn="l">
               <a:lnSpc>
                 <a:spcPct val="190000"/>
               </a:lnSpc>
@@ -25018,7 +24799,7 @@
             <a:endParaRPr lang="en-US" sz="1150" dirty="0"/>
           </a:p>
           <a:p>
-            <a:pPr algn="l" indent="0" marL="0">
+            <a:pPr marL="0" indent="0" algn="l">
               <a:lnSpc>
                 <a:spcPct val="190000"/>
               </a:lnSpc>
@@ -25038,7 +24819,7 @@
             <a:endParaRPr lang="en-US" sz="1150" dirty="0"/>
           </a:p>
           <a:p>
-            <a:pPr algn="l" indent="0" marL="0">
+            <a:pPr marL="0" indent="0" algn="l">
               <a:lnSpc>
                 <a:spcPct val="190000"/>
               </a:lnSpc>
@@ -25058,7 +24839,7 @@
             <a:endParaRPr lang="en-US" sz="1150" dirty="0"/>
           </a:p>
           <a:p>
-            <a:pPr algn="l" indent="0" marL="0">
+            <a:pPr marL="0" indent="0" algn="l">
               <a:lnSpc>
                 <a:spcPct val="190000"/>
               </a:lnSpc>
@@ -25078,7 +24859,7 @@
             <a:endParaRPr lang="en-US" sz="1150" dirty="0"/>
           </a:p>
           <a:p>
-            <a:pPr algn="l" indent="0" marL="0">
+            <a:pPr marL="0" indent="0" algn="l">
               <a:lnSpc>
                 <a:spcPct val="190000"/>
               </a:lnSpc>
@@ -25140,7 +24921,7 @@
           <a:bodyPr wrap="square" lIns="0" tIns="0" rIns="0" bIns="0" rtlCol="0" anchor="t"/>
           <a:lstStyle/>
           <a:p>
-            <a:pPr algn="l" indent="0" marL="0">
+            <a:pPr marL="0" indent="0" algn="l">
               <a:lnSpc>
                 <a:spcPct val="120000"/>
               </a:lnSpc>
@@ -25177,6 +24958,7 @@
         <a:solidFill>
           <a:srgbClr val="FFFFFF"/>
         </a:solidFill>
+        <a:effectLst/>
       </p:bgPr>
     </p:bg>
     <p:spTree>
@@ -25214,7 +24996,7 @@
           <a:bodyPr wrap="square" lIns="0" tIns="0" rIns="0" bIns="0" rtlCol="0" anchor="t"/>
           <a:lstStyle/>
           <a:p>
-            <a:pPr algn="l" indent="0" marL="0">
+            <a:pPr marL="0" indent="0" algn="l">
               <a:lnSpc>
                 <a:spcPct val="130000"/>
               </a:lnSpc>
@@ -25376,7 +25158,7 @@
           <a:bodyPr wrap="square" lIns="0" tIns="0" rIns="0" bIns="0" rtlCol="0" anchor="t"/>
           <a:lstStyle/>
           <a:p>
-            <a:pPr algn="r" indent="0" marL="0">
+            <a:pPr marL="0" indent="0" algn="r">
               <a:lnSpc>
                 <a:spcPct val="120000"/>
               </a:lnSpc>
@@ -25438,7 +25220,7 @@
           <a:bodyPr wrap="square" lIns="0" tIns="0" rIns="0" bIns="0" rtlCol="0" anchor="t"/>
           <a:lstStyle/>
           <a:p>
-            <a:pPr algn="l" indent="0" marL="0">
+            <a:pPr marL="0" indent="0" algn="l">
               <a:lnSpc>
                 <a:spcPct val="120000"/>
               </a:lnSpc>
@@ -25480,7 +25262,7 @@
           <a:bodyPr wrap="square" lIns="0" tIns="0" rIns="0" bIns="0" rtlCol="0" anchor="t"/>
           <a:lstStyle/>
           <a:p>
-            <a:pPr algn="r" indent="0" marL="0">
+            <a:pPr marL="0" indent="0" algn="r">
               <a:lnSpc>
                 <a:spcPct val="120000"/>
               </a:lnSpc>
@@ -25522,7 +25304,7 @@
           <a:bodyPr wrap="square" lIns="0" tIns="0" rIns="0" bIns="0" rtlCol="0" anchor="t"/>
           <a:lstStyle/>
           <a:p>
-            <a:pPr algn="l" indent="0" marL="0">
+            <a:pPr marL="0" indent="0" algn="l">
               <a:lnSpc>
                 <a:spcPct val="120000"/>
               </a:lnSpc>
@@ -25604,7 +25386,7 @@
           <a:bodyPr wrap="square" lIns="0" tIns="0" rIns="0" bIns="0" rtlCol="0" anchor="t"/>
           <a:lstStyle/>
           <a:p>
-            <a:pPr algn="ctr" indent="0" marL="0">
+            <a:pPr marL="0" indent="0" algn="ctr">
               <a:lnSpc>
                 <a:spcPct val="120000"/>
               </a:lnSpc>
@@ -25666,7 +25448,7 @@
           <a:bodyPr wrap="square" lIns="0" tIns="0" rIns="0" bIns="0" rtlCol="0" anchor="t"/>
           <a:lstStyle/>
           <a:p>
-            <a:pPr algn="ctr" indent="0" marL="0">
+            <a:pPr marL="0" indent="0" algn="ctr">
               <a:lnSpc>
                 <a:spcPct val="120000"/>
               </a:lnSpc>
@@ -25708,7 +25490,7 @@
           <a:bodyPr wrap="square" lIns="0" tIns="0" rIns="0" bIns="0" rtlCol="0" anchor="t"/>
           <a:lstStyle/>
           <a:p>
-            <a:pPr algn="ctr" indent="0" marL="0">
+            <a:pPr marL="0" indent="0" algn="ctr">
               <a:lnSpc>
                 <a:spcPct val="120000"/>
               </a:lnSpc>
@@ -25770,7 +25552,7 @@
           <a:bodyPr wrap="square" lIns="0" tIns="0" rIns="0" bIns="0" rtlCol="0" anchor="t"/>
           <a:lstStyle/>
           <a:p>
-            <a:pPr algn="ctr" indent="0" marL="0">
+            <a:pPr marL="0" indent="0" algn="ctr">
               <a:lnSpc>
                 <a:spcPct val="120000"/>
               </a:lnSpc>
@@ -25832,7 +25614,7 @@
           <a:bodyPr wrap="square" lIns="0" tIns="0" rIns="0" bIns="0" rtlCol="0" anchor="t"/>
           <a:lstStyle/>
           <a:p>
-            <a:pPr algn="ctr" indent="0" marL="0">
+            <a:pPr marL="0" indent="0" algn="ctr">
               <a:lnSpc>
                 <a:spcPct val="120000"/>
               </a:lnSpc>
@@ -25874,7 +25656,7 @@
           <a:bodyPr wrap="square" lIns="0" tIns="0" rIns="0" bIns="0" rtlCol="0" anchor="t"/>
           <a:lstStyle/>
           <a:p>
-            <a:pPr algn="ctr" indent="0" marL="0">
+            <a:pPr marL="0" indent="0" algn="ctr">
               <a:lnSpc>
                 <a:spcPct val="120000"/>
               </a:lnSpc>
@@ -25936,7 +25718,7 @@
           <a:bodyPr wrap="square" lIns="0" tIns="0" rIns="0" bIns="0" rtlCol="0" anchor="t"/>
           <a:lstStyle/>
           <a:p>
-            <a:pPr algn="ctr" indent="0" marL="0">
+            <a:pPr marL="0" indent="0" algn="ctr">
               <a:lnSpc>
                 <a:spcPct val="120000"/>
               </a:lnSpc>
@@ -25998,7 +25780,7 @@
           <a:bodyPr wrap="square" lIns="0" tIns="0" rIns="0" bIns="0" rtlCol="0" anchor="t"/>
           <a:lstStyle/>
           <a:p>
-            <a:pPr algn="ctr" indent="0" marL="0">
+            <a:pPr marL="0" indent="0" algn="ctr">
               <a:lnSpc>
                 <a:spcPct val="120000"/>
               </a:lnSpc>
@@ -26040,7 +25822,7 @@
           <a:bodyPr wrap="square" lIns="0" tIns="0" rIns="0" bIns="0" rtlCol="0" anchor="t"/>
           <a:lstStyle/>
           <a:p>
-            <a:pPr algn="ctr" indent="0" marL="0">
+            <a:pPr marL="0" indent="0" algn="ctr">
               <a:lnSpc>
                 <a:spcPct val="120000"/>
               </a:lnSpc>
@@ -26102,7 +25884,7 @@
           <a:bodyPr wrap="square" lIns="0" tIns="0" rIns="0" bIns="0" rtlCol="0" anchor="t"/>
           <a:lstStyle/>
           <a:p>
-            <a:pPr algn="ctr" indent="0" marL="0">
+            <a:pPr marL="0" indent="0" algn="ctr">
               <a:lnSpc>
                 <a:spcPct val="120000"/>
               </a:lnSpc>
@@ -26164,7 +25946,7 @@
           <a:bodyPr wrap="square" lIns="0" tIns="0" rIns="0" bIns="0" rtlCol="0" anchor="t"/>
           <a:lstStyle/>
           <a:p>
-            <a:pPr algn="ctr" indent="0" marL="0">
+            <a:pPr marL="0" indent="0" algn="ctr">
               <a:lnSpc>
                 <a:spcPct val="120000"/>
               </a:lnSpc>
@@ -26206,7 +25988,7 @@
           <a:bodyPr wrap="square" lIns="0" tIns="0" rIns="0" bIns="0" rtlCol="0" anchor="t"/>
           <a:lstStyle/>
           <a:p>
-            <a:pPr algn="ctr" indent="0" marL="0">
+            <a:pPr marL="0" indent="0" algn="ctr">
               <a:lnSpc>
                 <a:spcPct val="120000"/>
               </a:lnSpc>
@@ -26268,7 +26050,7 @@
           <a:bodyPr wrap="square" lIns="0" tIns="0" rIns="0" bIns="0" rtlCol="0" anchor="t"/>
           <a:lstStyle/>
           <a:p>
-            <a:pPr algn="ctr" indent="0" marL="0">
+            <a:pPr marL="0" indent="0" algn="ctr">
               <a:lnSpc>
                 <a:spcPct val="120000"/>
               </a:lnSpc>
@@ -26330,7 +26112,7 @@
           <a:bodyPr wrap="square" lIns="0" tIns="0" rIns="0" bIns="0" rtlCol="0" anchor="t"/>
           <a:lstStyle/>
           <a:p>
-            <a:pPr algn="ctr" indent="0" marL="0">
+            <a:pPr marL="0" indent="0" algn="ctr">
               <a:lnSpc>
                 <a:spcPct val="120000"/>
               </a:lnSpc>
@@ -26372,7 +26154,7 @@
           <a:bodyPr wrap="square" lIns="0" tIns="0" rIns="0" bIns="0" rtlCol="0" anchor="t"/>
           <a:lstStyle/>
           <a:p>
-            <a:pPr algn="ctr" indent="0" marL="0">
+            <a:pPr marL="0" indent="0" algn="ctr">
               <a:lnSpc>
                 <a:spcPct val="120000"/>
               </a:lnSpc>
@@ -26434,7 +26216,7 @@
           <a:bodyPr wrap="square" lIns="0" tIns="0" rIns="0" bIns="0" rtlCol="0" anchor="t"/>
           <a:lstStyle/>
           <a:p>
-            <a:pPr algn="ctr" indent="0" marL="0">
+            <a:pPr marL="0" indent="0" algn="ctr">
               <a:lnSpc>
                 <a:spcPct val="120000"/>
               </a:lnSpc>
@@ -26496,7 +26278,7 @@
           <a:bodyPr wrap="square" lIns="0" tIns="0" rIns="0" bIns="0" rtlCol="0" anchor="t"/>
           <a:lstStyle/>
           <a:p>
-            <a:pPr algn="ctr" indent="0" marL="0">
+            <a:pPr marL="0" indent="0" algn="ctr">
               <a:lnSpc>
                 <a:spcPct val="120000"/>
               </a:lnSpc>
@@ -26538,7 +26320,7 @@
           <a:bodyPr wrap="square" lIns="0" tIns="0" rIns="0" bIns="0" rtlCol="0" anchor="t"/>
           <a:lstStyle/>
           <a:p>
-            <a:pPr algn="ctr" indent="0" marL="0">
+            <a:pPr marL="0" indent="0" algn="ctr">
               <a:lnSpc>
                 <a:spcPct val="120000"/>
               </a:lnSpc>
@@ -26605,7 +26387,7 @@
           <a:bodyPr wrap="square" lIns="0" tIns="0" rIns="0" bIns="0" rtlCol="0" anchor="t"/>
           <a:lstStyle/>
           <a:p>
-            <a:pPr algn="ctr" indent="0" marL="0">
+            <a:pPr marL="0" indent="0" algn="ctr">
               <a:lnSpc>
                 <a:spcPct val="120000"/>
               </a:lnSpc>
@@ -26667,7 +26449,7 @@
           <a:bodyPr wrap="square" lIns="0" tIns="0" rIns="0" bIns="0" rtlCol="0" anchor="t"/>
           <a:lstStyle/>
           <a:p>
-            <a:pPr algn="ctr" indent="0" marL="0">
+            <a:pPr marL="0" indent="0" algn="ctr">
               <a:lnSpc>
                 <a:spcPct val="120000"/>
               </a:lnSpc>
@@ -26709,7 +26491,7 @@
           <a:bodyPr wrap="square" lIns="0" tIns="0" rIns="0" bIns="0" rtlCol="0" anchor="t"/>
           <a:lstStyle/>
           <a:p>
-            <a:pPr algn="ctr" indent="0" marL="0">
+            <a:pPr marL="0" indent="0" algn="ctr">
               <a:lnSpc>
                 <a:spcPct val="120000"/>
               </a:lnSpc>
@@ -26776,7 +26558,7 @@
           <a:bodyPr wrap="square" lIns="0" tIns="0" rIns="0" bIns="0" rtlCol="0" anchor="t"/>
           <a:lstStyle/>
           <a:p>
-            <a:pPr algn="ctr" indent="0" marL="0">
+            <a:pPr marL="0" indent="0" algn="ctr">
               <a:lnSpc>
                 <a:spcPct val="120000"/>
               </a:lnSpc>
@@ -26838,7 +26620,7 @@
           <a:bodyPr wrap="square" lIns="0" tIns="0" rIns="0" bIns="0" rtlCol="0" anchor="t"/>
           <a:lstStyle/>
           <a:p>
-            <a:pPr algn="ctr" indent="0" marL="0">
+            <a:pPr marL="0" indent="0" algn="ctr">
               <a:lnSpc>
                 <a:spcPct val="120000"/>
               </a:lnSpc>
@@ -26880,7 +26662,7 @@
           <a:bodyPr wrap="square" lIns="0" tIns="0" rIns="0" bIns="0" rtlCol="0" anchor="t"/>
           <a:lstStyle/>
           <a:p>
-            <a:pPr algn="ctr" indent="0" marL="0">
+            <a:pPr marL="0" indent="0" algn="ctr">
               <a:lnSpc>
                 <a:spcPct val="120000"/>
               </a:lnSpc>
@@ -26942,7 +26724,7 @@
           <a:bodyPr wrap="square" lIns="0" tIns="0" rIns="0" bIns="0" rtlCol="0" anchor="t"/>
           <a:lstStyle/>
           <a:p>
-            <a:pPr algn="l" indent="0" marL="0">
+            <a:pPr marL="0" indent="0" algn="l">
               <a:lnSpc>
                 <a:spcPct val="120000"/>
               </a:lnSpc>
@@ -26984,7 +26766,7 @@
           <a:bodyPr wrap="square" lIns="0" tIns="0" rIns="0" bIns="0" rtlCol="0" anchor="t"/>
           <a:lstStyle/>
           <a:p>
-            <a:pPr algn="r" indent="0" marL="0">
+            <a:pPr marL="0" indent="0" algn="r">
               <a:lnSpc>
                 <a:spcPct val="120000"/>
               </a:lnSpc>
@@ -27021,6 +26803,7 @@
         <a:solidFill>
           <a:srgbClr val="FFFFFF"/>
         </a:solidFill>
+        <a:effectLst/>
       </p:bgPr>
     </p:bg>
     <p:spTree>
@@ -27058,7 +26841,7 @@
           <a:bodyPr wrap="square" lIns="0" tIns="0" rIns="0" bIns="0" rtlCol="0" anchor="t"/>
           <a:lstStyle/>
           <a:p>
-            <a:pPr algn="l" indent="0" marL="0">
+            <a:pPr marL="0" indent="0" algn="l">
               <a:lnSpc>
                 <a:spcPct val="130000"/>
               </a:lnSpc>
@@ -27220,7 +27003,7 @@
           <a:bodyPr wrap="square" lIns="0" tIns="0" rIns="0" bIns="0" rtlCol="0" anchor="t"/>
           <a:lstStyle/>
           <a:p>
-            <a:pPr algn="r" indent="0" marL="0">
+            <a:pPr marL="0" indent="0" algn="r">
               <a:lnSpc>
                 <a:spcPct val="120000"/>
               </a:lnSpc>
@@ -27282,7 +27065,7 @@
           <a:bodyPr wrap="square" lIns="0" tIns="0" rIns="0" bIns="0" rtlCol="0" anchor="t"/>
           <a:lstStyle/>
           <a:p>
-            <a:pPr algn="l" indent="0" marL="0">
+            <a:pPr marL="0" indent="0" algn="l">
               <a:lnSpc>
                 <a:spcPct val="120000"/>
               </a:lnSpc>
@@ -27324,7 +27107,7 @@
           <a:bodyPr wrap="square" lIns="0" tIns="0" rIns="0" bIns="0" rtlCol="0" anchor="t"/>
           <a:lstStyle/>
           <a:p>
-            <a:pPr algn="r" indent="0" marL="0">
+            <a:pPr marL="0" indent="0" algn="r">
               <a:lnSpc>
                 <a:spcPct val="120000"/>
               </a:lnSpc>
@@ -27366,7 +27149,7 @@
           <a:bodyPr wrap="square" lIns="0" tIns="0" rIns="0" bIns="0" rtlCol="0" anchor="t"/>
           <a:lstStyle/>
           <a:p>
-            <a:pPr algn="l" indent="0" marL="0">
+            <a:pPr marL="0" indent="0" algn="l">
               <a:lnSpc>
                 <a:spcPct val="120000"/>
               </a:lnSpc>
@@ -27453,7 +27236,7 @@
           <a:bodyPr wrap="square" lIns="0" tIns="0" rIns="0" bIns="0" rtlCol="0" anchor="t"/>
           <a:lstStyle/>
           <a:p>
-            <a:pPr algn="l" indent="0" marL="0">
+            <a:pPr marL="0" indent="0" algn="l">
               <a:lnSpc>
                 <a:spcPct val="120000"/>
               </a:lnSpc>
@@ -27495,7 +27278,7 @@
           <a:bodyPr wrap="square" lIns="0" tIns="0" rIns="0" bIns="0" rtlCol="0" anchor="t"/>
           <a:lstStyle/>
           <a:p>
-            <a:pPr algn="l" indent="0" marL="0">
+            <a:pPr marL="0" indent="0" algn="l">
               <a:lnSpc>
                 <a:spcPct val="135000"/>
               </a:lnSpc>
@@ -27515,7 +27298,7 @@
             <a:endParaRPr lang="en-US" sz="1500" dirty="0"/>
           </a:p>
           <a:p>
-            <a:pPr algn="l" indent="0" marL="0">
+            <a:pPr marL="0" indent="0" algn="l">
               <a:lnSpc>
                 <a:spcPct val="135000"/>
               </a:lnSpc>
@@ -27557,7 +27340,7 @@
           <a:bodyPr wrap="square" lIns="0" tIns="0" rIns="0" bIns="0" rtlCol="0" anchor="t"/>
           <a:lstStyle/>
           <a:p>
-            <a:pPr algn="l" indent="0" marL="0">
+            <a:pPr marL="0" indent="0" algn="l">
               <a:lnSpc>
                 <a:spcPct val="160000"/>
               </a:lnSpc>
@@ -27577,7 +27360,7 @@
             <a:endParaRPr lang="en-US" sz="1150" dirty="0"/>
           </a:p>
           <a:p>
-            <a:pPr algn="l" indent="0" marL="0">
+            <a:pPr marL="0" indent="0" algn="l">
               <a:lnSpc>
                 <a:spcPct val="160000"/>
               </a:lnSpc>
@@ -27597,7 +27380,7 @@
             <a:endParaRPr lang="en-US" sz="1150" dirty="0"/>
           </a:p>
           <a:p>
-            <a:pPr algn="l" indent="0" marL="0">
+            <a:pPr marL="0" indent="0" algn="l">
               <a:lnSpc>
                 <a:spcPct val="160000"/>
               </a:lnSpc>
@@ -27617,7 +27400,7 @@
             <a:endParaRPr lang="en-US" sz="1150" dirty="0"/>
           </a:p>
           <a:p>
-            <a:pPr algn="l" indent="0" marL="0">
+            <a:pPr marL="0" indent="0" algn="l">
               <a:lnSpc>
                 <a:spcPct val="160000"/>
               </a:lnSpc>
@@ -27637,7 +27420,7 @@
             <a:endParaRPr lang="en-US" sz="1150" dirty="0"/>
           </a:p>
           <a:p>
-            <a:pPr algn="l" indent="0" marL="0">
+            <a:pPr marL="0" indent="0" algn="l">
               <a:lnSpc>
                 <a:spcPct val="160000"/>
               </a:lnSpc>
@@ -27724,7 +27507,7 @@
           <a:bodyPr wrap="square" lIns="0" tIns="0" rIns="0" bIns="0" rtlCol="0" anchor="t"/>
           <a:lstStyle/>
           <a:p>
-            <a:pPr algn="l" indent="0" marL="0">
+            <a:pPr marL="0" indent="0" algn="l">
               <a:lnSpc>
                 <a:spcPct val="120000"/>
               </a:lnSpc>
@@ -27766,7 +27549,7 @@
           <a:bodyPr wrap="square" lIns="0" tIns="0" rIns="0" bIns="0" rtlCol="0" anchor="t"/>
           <a:lstStyle/>
           <a:p>
-            <a:pPr algn="l" indent="0" marL="0">
+            <a:pPr marL="0" indent="0" algn="l">
               <a:lnSpc>
                 <a:spcPct val="135000"/>
               </a:lnSpc>
@@ -27786,7 +27569,7 @@
             <a:endParaRPr lang="en-US" sz="1500" dirty="0"/>
           </a:p>
           <a:p>
-            <a:pPr algn="l" indent="0" marL="0">
+            <a:pPr marL="0" indent="0" algn="l">
               <a:lnSpc>
                 <a:spcPct val="135000"/>
               </a:lnSpc>
@@ -27828,7 +27611,7 @@
           <a:bodyPr wrap="square" lIns="0" tIns="0" rIns="0" bIns="0" rtlCol="0" anchor="t"/>
           <a:lstStyle/>
           <a:p>
-            <a:pPr algn="l" indent="0" marL="0">
+            <a:pPr marL="0" indent="0" algn="l">
               <a:lnSpc>
                 <a:spcPct val="160000"/>
               </a:lnSpc>
@@ -27848,7 +27631,7 @@
             <a:endParaRPr lang="en-US" sz="1150" dirty="0"/>
           </a:p>
           <a:p>
-            <a:pPr algn="l" indent="0" marL="0">
+            <a:pPr marL="0" indent="0" algn="l">
               <a:lnSpc>
                 <a:spcPct val="160000"/>
               </a:lnSpc>
@@ -27868,7 +27651,7 @@
             <a:endParaRPr lang="en-US" sz="1150" dirty="0"/>
           </a:p>
           <a:p>
-            <a:pPr algn="l" indent="0" marL="0">
+            <a:pPr marL="0" indent="0" algn="l">
               <a:lnSpc>
                 <a:spcPct val="160000"/>
               </a:lnSpc>
@@ -27888,7 +27671,7 @@
             <a:endParaRPr lang="en-US" sz="1150" dirty="0"/>
           </a:p>
           <a:p>
-            <a:pPr algn="l" indent="0" marL="0">
+            <a:pPr marL="0" indent="0" algn="l">
               <a:lnSpc>
                 <a:spcPct val="160000"/>
               </a:lnSpc>
@@ -27908,7 +27691,7 @@
             <a:endParaRPr lang="en-US" sz="1150" dirty="0"/>
           </a:p>
           <a:p>
-            <a:pPr algn="l" indent="0" marL="0">
+            <a:pPr marL="0" indent="0" algn="l">
               <a:lnSpc>
                 <a:spcPct val="160000"/>
               </a:lnSpc>
@@ -27995,7 +27778,7 @@
           <a:bodyPr wrap="square" lIns="0" tIns="0" rIns="0" bIns="0" rtlCol="0" anchor="t"/>
           <a:lstStyle/>
           <a:p>
-            <a:pPr algn="l" indent="0" marL="0">
+            <a:pPr marL="0" indent="0" algn="l">
               <a:lnSpc>
                 <a:spcPct val="120000"/>
               </a:lnSpc>
@@ -28037,7 +27820,7 @@
           <a:bodyPr wrap="square" lIns="0" tIns="0" rIns="0" bIns="0" rtlCol="0" anchor="t"/>
           <a:lstStyle/>
           <a:p>
-            <a:pPr algn="l" indent="0" marL="0">
+            <a:pPr marL="0" indent="0" algn="l">
               <a:lnSpc>
                 <a:spcPct val="135000"/>
               </a:lnSpc>
@@ -28079,7 +27862,7 @@
           <a:bodyPr wrap="square" lIns="0" tIns="0" rIns="0" bIns="0" rtlCol="0" anchor="t"/>
           <a:lstStyle/>
           <a:p>
-            <a:pPr algn="l" indent="0" marL="0">
+            <a:pPr marL="0" indent="0" algn="l">
               <a:lnSpc>
                 <a:spcPct val="160000"/>
               </a:lnSpc>
@@ -28099,7 +27882,7 @@
             <a:endParaRPr lang="en-US" sz="1150" dirty="0"/>
           </a:p>
           <a:p>
-            <a:pPr algn="l" indent="0" marL="0">
+            <a:pPr marL="0" indent="0" algn="l">
               <a:lnSpc>
                 <a:spcPct val="160000"/>
               </a:lnSpc>
@@ -28119,7 +27902,7 @@
             <a:endParaRPr lang="en-US" sz="1150" dirty="0"/>
           </a:p>
           <a:p>
-            <a:pPr algn="l" indent="0" marL="0">
+            <a:pPr marL="0" indent="0" algn="l">
               <a:lnSpc>
                 <a:spcPct val="160000"/>
               </a:lnSpc>
@@ -28139,7 +27922,7 @@
             <a:endParaRPr lang="en-US" sz="1150" dirty="0"/>
           </a:p>
           <a:p>
-            <a:pPr algn="l" indent="0" marL="0">
+            <a:pPr marL="0" indent="0" algn="l">
               <a:lnSpc>
                 <a:spcPct val="160000"/>
               </a:lnSpc>
@@ -28159,7 +27942,7 @@
             <a:endParaRPr lang="en-US" sz="1150" dirty="0"/>
           </a:p>
           <a:p>
-            <a:pPr algn="l" indent="0" marL="0">
+            <a:pPr marL="0" indent="0" algn="l">
               <a:lnSpc>
                 <a:spcPct val="160000"/>
               </a:lnSpc>
@@ -28246,7 +28029,7 @@
           <a:bodyPr wrap="square" lIns="0" tIns="0" rIns="0" bIns="0" rtlCol="0" anchor="t"/>
           <a:lstStyle/>
           <a:p>
-            <a:pPr algn="l" indent="0" marL="0">
+            <a:pPr marL="0" indent="0" algn="l">
               <a:lnSpc>
                 <a:spcPct val="120000"/>
               </a:lnSpc>
@@ -28288,7 +28071,7 @@
           <a:bodyPr wrap="square" lIns="0" tIns="0" rIns="0" bIns="0" rtlCol="0" anchor="t"/>
           <a:lstStyle/>
           <a:p>
-            <a:pPr algn="l" indent="0" marL="0">
+            <a:pPr marL="0" indent="0" algn="l">
               <a:lnSpc>
                 <a:spcPct val="135000"/>
               </a:lnSpc>
@@ -28308,7 +28091,7 @@
             <a:endParaRPr lang="en-US" sz="1500" dirty="0"/>
           </a:p>
           <a:p>
-            <a:pPr algn="l" indent="0" marL="0">
+            <a:pPr marL="0" indent="0" algn="l">
               <a:lnSpc>
                 <a:spcPct val="135000"/>
               </a:lnSpc>
@@ -28350,7 +28133,7 @@
           <a:bodyPr wrap="square" lIns="0" tIns="0" rIns="0" bIns="0" rtlCol="0" anchor="t"/>
           <a:lstStyle/>
           <a:p>
-            <a:pPr algn="l" indent="0" marL="0">
+            <a:pPr marL="0" indent="0" algn="l">
               <a:lnSpc>
                 <a:spcPct val="160000"/>
               </a:lnSpc>
@@ -28370,7 +28153,7 @@
             <a:endParaRPr lang="en-US" sz="1150" dirty="0"/>
           </a:p>
           <a:p>
-            <a:pPr algn="l" indent="0" marL="0">
+            <a:pPr marL="0" indent="0" algn="l">
               <a:lnSpc>
                 <a:spcPct val="160000"/>
               </a:lnSpc>
@@ -28390,7 +28173,7 @@
             <a:endParaRPr lang="en-US" sz="1150" dirty="0"/>
           </a:p>
           <a:p>
-            <a:pPr algn="l" indent="0" marL="0">
+            <a:pPr marL="0" indent="0" algn="l">
               <a:lnSpc>
                 <a:spcPct val="160000"/>
               </a:lnSpc>
@@ -28410,7 +28193,7 @@
             <a:endParaRPr lang="en-US" sz="1150" dirty="0"/>
           </a:p>
           <a:p>
-            <a:pPr algn="l" indent="0" marL="0">
+            <a:pPr marL="0" indent="0" algn="l">
               <a:lnSpc>
                 <a:spcPct val="160000"/>
               </a:lnSpc>
@@ -28497,7 +28280,7 @@
           <a:bodyPr wrap="square" lIns="0" tIns="0" rIns="0" bIns="0" rtlCol="0" anchor="t"/>
           <a:lstStyle/>
           <a:p>
-            <a:pPr algn="l" indent="0" marL="0">
+            <a:pPr marL="0" indent="0" algn="l">
               <a:lnSpc>
                 <a:spcPct val="120000"/>
               </a:lnSpc>
@@ -28539,7 +28322,7 @@
           <a:bodyPr wrap="square" lIns="0" tIns="0" rIns="0" bIns="0" rtlCol="0" anchor="t"/>
           <a:lstStyle/>
           <a:p>
-            <a:pPr algn="l" indent="0" marL="0">
+            <a:pPr marL="0" indent="0" algn="l">
               <a:lnSpc>
                 <a:spcPct val="135000"/>
               </a:lnSpc>
@@ -28559,7 +28342,7 @@
             <a:endParaRPr lang="en-US" sz="1500" dirty="0"/>
           </a:p>
           <a:p>
-            <a:pPr algn="l" indent="0" marL="0">
+            <a:pPr marL="0" indent="0" algn="l">
               <a:lnSpc>
                 <a:spcPct val="135000"/>
               </a:lnSpc>
@@ -28601,7 +28384,7 @@
           <a:bodyPr wrap="square" lIns="0" tIns="0" rIns="0" bIns="0" rtlCol="0" anchor="t"/>
           <a:lstStyle/>
           <a:p>
-            <a:pPr algn="l" indent="0" marL="0">
+            <a:pPr marL="0" indent="0" algn="l">
               <a:lnSpc>
                 <a:spcPct val="160000"/>
               </a:lnSpc>
@@ -28621,7 +28404,7 @@
             <a:endParaRPr lang="en-US" sz="1150" dirty="0"/>
           </a:p>
           <a:p>
-            <a:pPr algn="l" indent="0" marL="0">
+            <a:pPr marL="0" indent="0" algn="l">
               <a:lnSpc>
                 <a:spcPct val="160000"/>
               </a:lnSpc>
@@ -28641,7 +28424,7 @@
             <a:endParaRPr lang="en-US" sz="1150" dirty="0"/>
           </a:p>
           <a:p>
-            <a:pPr algn="l" indent="0" marL="0">
+            <a:pPr marL="0" indent="0" algn="l">
               <a:lnSpc>
                 <a:spcPct val="160000"/>
               </a:lnSpc>
@@ -28661,7 +28444,7 @@
             <a:endParaRPr lang="en-US" sz="1150" dirty="0"/>
           </a:p>
           <a:p>
-            <a:pPr algn="l" indent="0" marL="0">
+            <a:pPr marL="0" indent="0" algn="l">
               <a:lnSpc>
                 <a:spcPct val="160000"/>
               </a:lnSpc>
@@ -28698,6 +28481,7 @@
         <a:solidFill>
           <a:srgbClr val="FFFFFF"/>
         </a:solidFill>
+        <a:effectLst/>
       </p:bgPr>
     </p:bg>
     <p:spTree>
@@ -28735,7 +28519,7 @@
           <a:bodyPr wrap="square" lIns="0" tIns="0" rIns="0" bIns="0" rtlCol="0" anchor="t"/>
           <a:lstStyle/>
           <a:p>
-            <a:pPr algn="l" indent="0" marL="0">
+            <a:pPr marL="0" indent="0" algn="l">
               <a:lnSpc>
                 <a:spcPct val="130000"/>
               </a:lnSpc>
@@ -28777,7 +28561,7 @@
           <a:bodyPr wrap="square" lIns="0" tIns="0" rIns="0" bIns="0" rtlCol="0" anchor="t"/>
           <a:lstStyle/>
           <a:p>
-            <a:pPr algn="l" indent="0" marL="0">
+            <a:pPr marL="0" indent="0" algn="l">
               <a:lnSpc>
                 <a:spcPct val="120000"/>
               </a:lnSpc>
@@ -28939,7 +28723,7 @@
           <a:bodyPr wrap="square" lIns="0" tIns="0" rIns="0" bIns="0" rtlCol="0" anchor="t"/>
           <a:lstStyle/>
           <a:p>
-            <a:pPr algn="r" indent="0" marL="0">
+            <a:pPr marL="0" indent="0" algn="r">
               <a:lnSpc>
                 <a:spcPct val="120000"/>
               </a:lnSpc>
@@ -29001,7 +28785,7 @@
           <a:bodyPr wrap="square" lIns="0" tIns="0" rIns="0" bIns="0" rtlCol="0" anchor="t"/>
           <a:lstStyle/>
           <a:p>
-            <a:pPr algn="l" indent="0" marL="0">
+            <a:pPr marL="0" indent="0" algn="l">
               <a:lnSpc>
                 <a:spcPct val="120000"/>
               </a:lnSpc>
@@ -29043,7 +28827,7 @@
           <a:bodyPr wrap="square" lIns="0" tIns="0" rIns="0" bIns="0" rtlCol="0" anchor="t"/>
           <a:lstStyle/>
           <a:p>
-            <a:pPr algn="r" indent="0" marL="0">
+            <a:pPr marL="0" indent="0" algn="r">
               <a:lnSpc>
                 <a:spcPct val="120000"/>
               </a:lnSpc>
@@ -29105,7 +28889,7 @@
           <a:bodyPr wrap="square" lIns="0" tIns="0" rIns="0" bIns="0" rtlCol="0" anchor="t"/>
           <a:lstStyle/>
           <a:p>
-            <a:pPr algn="l" indent="0" marL="0">
+            <a:pPr marL="0" indent="0" algn="l">
               <a:lnSpc>
                 <a:spcPct val="120000"/>
               </a:lnSpc>
@@ -29167,7 +28951,7 @@
           <a:bodyPr wrap="square" lIns="0" tIns="0" rIns="0" bIns="0" rtlCol="0" anchor="t"/>
           <a:lstStyle/>
           <a:p>
-            <a:pPr algn="l" indent="0" marL="0">
+            <a:pPr marL="0" indent="0" algn="l">
               <a:lnSpc>
                 <a:spcPct val="120000"/>
               </a:lnSpc>
@@ -29229,7 +29013,7 @@
           <a:bodyPr wrap="square" lIns="0" tIns="0" rIns="0" bIns="0" rtlCol="0" anchor="t"/>
           <a:lstStyle/>
           <a:p>
-            <a:pPr algn="l" indent="0" marL="0">
+            <a:pPr marL="0" indent="0" algn="l">
               <a:lnSpc>
                 <a:spcPct val="120000"/>
               </a:lnSpc>
@@ -29291,7 +29075,7 @@
           <a:bodyPr wrap="square" lIns="0" tIns="0" rIns="0" bIns="0" rtlCol="0" anchor="t"/>
           <a:lstStyle/>
           <a:p>
-            <a:pPr algn="l" indent="0" marL="0">
+            <a:pPr marL="0" indent="0" algn="l">
               <a:lnSpc>
                 <a:spcPct val="120000"/>
               </a:lnSpc>
@@ -29353,7 +29137,7 @@
           <a:bodyPr wrap="square" lIns="0" tIns="0" rIns="0" bIns="0" rtlCol="0" anchor="t"/>
           <a:lstStyle/>
           <a:p>
-            <a:pPr algn="l" indent="0" marL="0">
+            <a:pPr marL="0" indent="0" algn="l">
               <a:lnSpc>
                 <a:spcPct val="120000"/>
               </a:lnSpc>
@@ -29415,7 +29199,7 @@
           <a:bodyPr wrap="square" lIns="0" tIns="0" rIns="0" bIns="0" rtlCol="0" anchor="t"/>
           <a:lstStyle/>
           <a:p>
-            <a:pPr algn="l" indent="0" marL="0">
+            <a:pPr marL="0" indent="0" algn="l">
               <a:lnSpc>
                 <a:spcPct val="120000"/>
               </a:lnSpc>
@@ -29497,7 +29281,7 @@
           <a:bodyPr wrap="square" lIns="0" tIns="0" rIns="0" bIns="0" rtlCol="0" anchor="t"/>
           <a:lstStyle/>
           <a:p>
-            <a:pPr algn="l" indent="0" marL="0">
+            <a:pPr marL="0" indent="0" algn="l">
               <a:lnSpc>
                 <a:spcPct val="120000"/>
               </a:lnSpc>
@@ -29559,7 +29343,7 @@
           <a:bodyPr wrap="square" lIns="0" tIns="0" rIns="0" bIns="0" rtlCol="0" anchor="t"/>
           <a:lstStyle/>
           <a:p>
-            <a:pPr algn="l" indent="0" marL="0">
+            <a:pPr marL="0" indent="0" algn="l">
               <a:lnSpc>
                 <a:spcPct val="120000"/>
               </a:lnSpc>
@@ -29621,7 +29405,7 @@
           <a:bodyPr wrap="square" lIns="0" tIns="0" rIns="0" bIns="0" rtlCol="0" anchor="t"/>
           <a:lstStyle/>
           <a:p>
-            <a:pPr algn="l" indent="0" marL="0">
+            <a:pPr marL="0" indent="0" algn="l">
               <a:lnSpc>
                 <a:spcPct val="120000"/>
               </a:lnSpc>
@@ -29703,7 +29487,7 @@
           <a:bodyPr wrap="square" lIns="0" tIns="0" rIns="0" bIns="0" rtlCol="0" anchor="t"/>
           <a:lstStyle/>
           <a:p>
-            <a:pPr algn="l" indent="0" marL="0">
+            <a:pPr marL="0" indent="0" algn="l">
               <a:lnSpc>
                 <a:spcPct val="120000"/>
               </a:lnSpc>
@@ -29765,7 +29549,7 @@
           <a:bodyPr wrap="square" lIns="0" tIns="0" rIns="0" bIns="0" rtlCol="0" anchor="t"/>
           <a:lstStyle/>
           <a:p>
-            <a:pPr algn="l" indent="0" marL="0">
+            <a:pPr marL="0" indent="0" algn="l">
               <a:lnSpc>
                 <a:spcPct val="120000"/>
               </a:lnSpc>
@@ -29827,7 +29611,7 @@
           <a:bodyPr wrap="square" lIns="0" tIns="0" rIns="0" bIns="0" rtlCol="0" anchor="t"/>
           <a:lstStyle/>
           <a:p>
-            <a:pPr algn="l" indent="0" marL="0">
+            <a:pPr marL="0" indent="0" algn="l">
               <a:lnSpc>
                 <a:spcPct val="120000"/>
               </a:lnSpc>
@@ -29909,7 +29693,7 @@
           <a:bodyPr wrap="square" lIns="0" tIns="0" rIns="0" bIns="0" rtlCol="0" anchor="t"/>
           <a:lstStyle/>
           <a:p>
-            <a:pPr algn="l" indent="0" marL="0">
+            <a:pPr marL="0" indent="0" algn="l">
               <a:lnSpc>
                 <a:spcPct val="120000"/>
               </a:lnSpc>
@@ -29971,7 +29755,7 @@
           <a:bodyPr wrap="square" lIns="0" tIns="0" rIns="0" bIns="0" rtlCol="0" anchor="t"/>
           <a:lstStyle/>
           <a:p>
-            <a:pPr algn="l" indent="0" marL="0">
+            <a:pPr marL="0" indent="0" algn="l">
               <a:lnSpc>
                 <a:spcPct val="120000"/>
               </a:lnSpc>
@@ -30033,7 +29817,7 @@
           <a:bodyPr wrap="square" lIns="0" tIns="0" rIns="0" bIns="0" rtlCol="0" anchor="t"/>
           <a:lstStyle/>
           <a:p>
-            <a:pPr algn="l" indent="0" marL="0">
+            <a:pPr marL="0" indent="0" algn="l">
               <a:lnSpc>
                 <a:spcPct val="120000"/>
               </a:lnSpc>
@@ -30115,7 +29899,7 @@
           <a:bodyPr wrap="square" lIns="0" tIns="0" rIns="0" bIns="0" rtlCol="0" anchor="t"/>
           <a:lstStyle/>
           <a:p>
-            <a:pPr algn="l" indent="0" marL="0">
+            <a:pPr marL="0" indent="0" algn="l">
               <a:lnSpc>
                 <a:spcPct val="120000"/>
               </a:lnSpc>
@@ -30177,7 +29961,7 @@
           <a:bodyPr wrap="square" lIns="0" tIns="0" rIns="0" bIns="0" rtlCol="0" anchor="t"/>
           <a:lstStyle/>
           <a:p>
-            <a:pPr algn="l" indent="0" marL="0">
+            <a:pPr marL="0" indent="0" algn="l">
               <a:lnSpc>
                 <a:spcPct val="120000"/>
               </a:lnSpc>
@@ -30239,7 +30023,7 @@
           <a:bodyPr wrap="square" lIns="0" tIns="0" rIns="0" bIns="0" rtlCol="0" anchor="t"/>
           <a:lstStyle/>
           <a:p>
-            <a:pPr algn="l" indent="0" marL="0">
+            <a:pPr marL="0" indent="0" algn="l">
               <a:lnSpc>
                 <a:spcPct val="120000"/>
               </a:lnSpc>
@@ -30326,7 +30110,7 @@
           <a:bodyPr wrap="square" lIns="0" tIns="0" rIns="0" bIns="0" rtlCol="0" anchor="t"/>
           <a:lstStyle/>
           <a:p>
-            <a:pPr algn="l" indent="0" marL="0">
+            <a:pPr marL="0" indent="0" algn="l">
               <a:lnSpc>
                 <a:spcPct val="120000"/>
               </a:lnSpc>
@@ -30368,7 +30152,7 @@
           <a:bodyPr wrap="square" lIns="0" tIns="0" rIns="0" bIns="0" rtlCol="0" anchor="t"/>
           <a:lstStyle/>
           <a:p>
-            <a:pPr algn="l" indent="0" marL="0">
+            <a:pPr marL="0" indent="0" algn="l">
               <a:lnSpc>
                 <a:spcPct val="150000"/>
               </a:lnSpc>
@@ -30388,7 +30172,7 @@
             <a:endParaRPr lang="en-US" sz="1250" dirty="0"/>
           </a:p>
           <a:p>
-            <a:pPr algn="l" indent="0" marL="0">
+            <a:pPr marL="0" indent="0" algn="l">
               <a:lnSpc>
                 <a:spcPct val="150000"/>
               </a:lnSpc>
@@ -30425,6 +30209,7 @@
         <a:solidFill>
           <a:srgbClr val="FFFFFF"/>
         </a:solidFill>
+        <a:effectLst/>
       </p:bgPr>
     </p:bg>
     <p:spTree>
@@ -30462,7 +30247,7 @@
           <a:bodyPr wrap="square" lIns="0" tIns="0" rIns="0" bIns="0" rtlCol="0" anchor="t"/>
           <a:lstStyle/>
           <a:p>
-            <a:pPr algn="l" indent="0" marL="0">
+            <a:pPr marL="0" indent="0" algn="l">
               <a:lnSpc>
                 <a:spcPct val="130000"/>
               </a:lnSpc>
@@ -30504,7 +30289,7 @@
           <a:bodyPr wrap="square" lIns="0" tIns="0" rIns="0" bIns="0" rtlCol="0" anchor="t"/>
           <a:lstStyle/>
           <a:p>
-            <a:pPr algn="l" indent="0" marL="0">
+            <a:pPr marL="0" indent="0" algn="l">
               <a:lnSpc>
                 <a:spcPct val="120000"/>
               </a:lnSpc>
@@ -30666,7 +30451,7 @@
           <a:bodyPr wrap="square" lIns="0" tIns="0" rIns="0" bIns="0" rtlCol="0" anchor="t"/>
           <a:lstStyle/>
           <a:p>
-            <a:pPr algn="r" indent="0" marL="0">
+            <a:pPr marL="0" indent="0" algn="r">
               <a:lnSpc>
                 <a:spcPct val="120000"/>
               </a:lnSpc>
@@ -30728,7 +30513,7 @@
           <a:bodyPr wrap="square" lIns="0" tIns="0" rIns="0" bIns="0" rtlCol="0" anchor="t"/>
           <a:lstStyle/>
           <a:p>
-            <a:pPr algn="l" indent="0" marL="0">
+            <a:pPr marL="0" indent="0" algn="l">
               <a:lnSpc>
                 <a:spcPct val="120000"/>
               </a:lnSpc>
@@ -30770,7 +30555,7 @@
           <a:bodyPr wrap="square" lIns="0" tIns="0" rIns="0" bIns="0" rtlCol="0" anchor="t"/>
           <a:lstStyle/>
           <a:p>
-            <a:pPr algn="r" indent="0" marL="0">
+            <a:pPr marL="0" indent="0" algn="r">
               <a:lnSpc>
                 <a:spcPct val="120000"/>
               </a:lnSpc>
@@ -30837,7 +30622,7 @@
           <a:bodyPr wrap="square" lIns="0" tIns="0" rIns="0" bIns="0" rtlCol="0" anchor="t"/>
           <a:lstStyle/>
           <a:p>
-            <a:pPr algn="l" indent="0" marL="0">
+            <a:pPr marL="0" indent="0" algn="l">
               <a:lnSpc>
                 <a:spcPct val="120000"/>
               </a:lnSpc>
@@ -30879,7 +30664,7 @@
           <a:bodyPr wrap="square" lIns="0" tIns="0" rIns="0" bIns="0" rtlCol="0" anchor="t"/>
           <a:lstStyle/>
           <a:p>
-            <a:pPr algn="l" indent="0" marL="0">
+            <a:pPr marL="0" indent="0" algn="l">
               <a:lnSpc>
                 <a:spcPct val="150000"/>
               </a:lnSpc>
@@ -30899,7 +30684,7 @@
             <a:endParaRPr lang="en-US" sz="950" dirty="0"/>
           </a:p>
           <a:p>
-            <a:pPr algn="l" indent="0" marL="0">
+            <a:pPr marL="0" indent="0" algn="l">
               <a:lnSpc>
                 <a:spcPct val="150000"/>
               </a:lnSpc>
@@ -30966,7 +30751,7 @@
           <a:bodyPr wrap="square" lIns="0" tIns="0" rIns="0" bIns="0" rtlCol="0" anchor="t"/>
           <a:lstStyle/>
           <a:p>
-            <a:pPr algn="l" indent="0" marL="0">
+            <a:pPr marL="0" indent="0" algn="l">
               <a:lnSpc>
                 <a:spcPct val="120000"/>
               </a:lnSpc>
@@ -31008,7 +30793,7 @@
           <a:bodyPr wrap="square" lIns="0" tIns="0" rIns="0" bIns="0" rtlCol="0" anchor="t"/>
           <a:lstStyle/>
           <a:p>
-            <a:pPr algn="l" indent="0" marL="0">
+            <a:pPr marL="0" indent="0" algn="l">
               <a:lnSpc>
                 <a:spcPct val="150000"/>
               </a:lnSpc>
@@ -31028,7 +30813,7 @@
             <a:endParaRPr lang="en-US" sz="950" dirty="0"/>
           </a:p>
           <a:p>
-            <a:pPr algn="l" indent="0" marL="0">
+            <a:pPr marL="0" indent="0" algn="l">
               <a:lnSpc>
                 <a:spcPct val="150000"/>
               </a:lnSpc>
@@ -31187,7 +30972,7 @@
           <a:bodyPr wrap="square" lIns="0" tIns="0" rIns="0" bIns="0" rtlCol="0" anchor="t"/>
           <a:lstStyle/>
           <a:p>
-            <a:pPr algn="ctr" indent="0" marL="0">
+            <a:pPr marL="0" indent="0" algn="ctr">
               <a:lnSpc>
                 <a:spcPct val="120000"/>
               </a:lnSpc>
@@ -31272,7 +31057,7 @@
           <a:bodyPr wrap="square" lIns="0" tIns="0" rIns="0" bIns="0" rtlCol="0" anchor="t"/>
           <a:lstStyle/>
           <a:p>
-            <a:pPr algn="l" indent="0" marL="0">
+            <a:pPr marL="0" indent="0" algn="l">
               <a:lnSpc>
                 <a:spcPct val="120000"/>
               </a:lnSpc>
@@ -31314,7 +31099,7 @@
           <a:bodyPr wrap="square" lIns="0" tIns="0" rIns="0" bIns="0" rtlCol="0" anchor="t"/>
           <a:lstStyle/>
           <a:p>
-            <a:pPr algn="l" indent="0" marL="0">
+            <a:pPr marL="0" indent="0" algn="l">
               <a:lnSpc>
                 <a:spcPct val="150000"/>
               </a:lnSpc>
@@ -31334,7 +31119,7 @@
             <a:endParaRPr lang="en-US" sz="950" dirty="0"/>
           </a:p>
           <a:p>
-            <a:pPr algn="l" indent="0" marL="0">
+            <a:pPr marL="0" indent="0" algn="l">
               <a:lnSpc>
                 <a:spcPct val="150000"/>
               </a:lnSpc>
@@ -31419,7 +31204,7 @@
           <a:bodyPr wrap="square" lIns="0" tIns="0" rIns="0" bIns="0" rtlCol="0" anchor="t"/>
           <a:lstStyle/>
           <a:p>
-            <a:pPr algn="l" indent="0" marL="0">
+            <a:pPr marL="0" indent="0" algn="l">
               <a:lnSpc>
                 <a:spcPct val="120000"/>
               </a:lnSpc>
@@ -31461,7 +31246,7 @@
           <a:bodyPr wrap="square" lIns="0" tIns="0" rIns="0" bIns="0" rtlCol="0" anchor="t"/>
           <a:lstStyle/>
           <a:p>
-            <a:pPr algn="l" indent="0" marL="0">
+            <a:pPr marL="0" indent="0" algn="l">
               <a:lnSpc>
                 <a:spcPct val="120000"/>
               </a:lnSpc>
@@ -31498,6 +31283,7 @@
         <a:solidFill>
           <a:srgbClr val="FFFFFF"/>
         </a:solidFill>
+        <a:effectLst/>
       </p:bgPr>
     </p:bg>
     <p:spTree>
@@ -31535,7 +31321,7 @@
           <a:bodyPr wrap="square" lIns="0" tIns="0" rIns="0" bIns="0" rtlCol="0" anchor="t"/>
           <a:lstStyle/>
           <a:p>
-            <a:pPr algn="l" indent="0" marL="0">
+            <a:pPr marL="0" indent="0" algn="l">
               <a:lnSpc>
                 <a:spcPct val="120000"/>
               </a:lnSpc>
@@ -31697,7 +31483,7 @@
           <a:bodyPr wrap="square" lIns="0" tIns="0" rIns="0" bIns="0" rtlCol="0" anchor="t"/>
           <a:lstStyle/>
           <a:p>
-            <a:pPr algn="r" indent="0" marL="0">
+            <a:pPr marL="0" indent="0" algn="r">
               <a:lnSpc>
                 <a:spcPct val="120000"/>
               </a:lnSpc>
@@ -31759,7 +31545,7 @@
           <a:bodyPr wrap="square" lIns="0" tIns="0" rIns="0" bIns="0" rtlCol="0" anchor="t"/>
           <a:lstStyle/>
           <a:p>
-            <a:pPr algn="l" indent="0" marL="0">
+            <a:pPr marL="0" indent="0" algn="l">
               <a:lnSpc>
                 <a:spcPct val="120000"/>
               </a:lnSpc>
@@ -31801,7 +31587,7 @@
           <a:bodyPr wrap="square" lIns="0" tIns="0" rIns="0" bIns="0" rtlCol="0" anchor="t"/>
           <a:lstStyle/>
           <a:p>
-            <a:pPr algn="r" indent="0" marL="0">
+            <a:pPr marL="0" indent="0" algn="r">
               <a:lnSpc>
                 <a:spcPct val="120000"/>
               </a:lnSpc>
@@ -31888,7 +31674,7 @@
           <a:bodyPr wrap="square" lIns="0" tIns="0" rIns="0" bIns="0" rtlCol="0" anchor="t"/>
           <a:lstStyle/>
           <a:p>
-            <a:pPr algn="l" indent="0" marL="0">
+            <a:pPr marL="0" indent="0" algn="l">
               <a:lnSpc>
                 <a:spcPct val="120000"/>
               </a:lnSpc>
@@ -31930,7 +31716,7 @@
           <a:bodyPr wrap="square" lIns="0" tIns="0" rIns="0" bIns="0" rtlCol="0" anchor="t"/>
           <a:lstStyle/>
           <a:p>
-            <a:pPr algn="l" indent="0" marL="0">
+            <a:pPr marL="0" indent="0" algn="l">
               <a:lnSpc>
                 <a:spcPct val="120000"/>
               </a:lnSpc>
@@ -31972,7 +31758,7 @@
           <a:bodyPr wrap="square" lIns="0" tIns="0" rIns="0" bIns="0" rtlCol="0" anchor="t"/>
           <a:lstStyle/>
           <a:p>
-            <a:pPr algn="l" indent="0" marL="0">
+            <a:pPr marL="0" indent="0" algn="l">
               <a:lnSpc>
                 <a:spcPct val="120000"/>
               </a:lnSpc>
@@ -32014,7 +31800,7 @@
           <a:bodyPr wrap="square" lIns="0" tIns="0" rIns="0" bIns="0" rtlCol="0" anchor="t"/>
           <a:lstStyle/>
           <a:p>
-            <a:pPr algn="l" indent="0" marL="0">
+            <a:pPr marL="0" indent="0" algn="l">
               <a:lnSpc>
                 <a:spcPct val="120000"/>
               </a:lnSpc>
@@ -32056,7 +31842,7 @@
           <a:bodyPr wrap="square" lIns="0" tIns="0" rIns="0" bIns="0" rtlCol="0" anchor="t"/>
           <a:lstStyle/>
           <a:p>
-            <a:pPr algn="l" indent="0" marL="0">
+            <a:pPr marL="0" indent="0" algn="l">
               <a:lnSpc>
                 <a:spcPct val="120000"/>
               </a:lnSpc>
@@ -32143,7 +31929,7 @@
           <a:bodyPr wrap="square" lIns="0" tIns="0" rIns="0" bIns="0" rtlCol="0" anchor="t"/>
           <a:lstStyle/>
           <a:p>
-            <a:pPr algn="l" indent="0" marL="0">
+            <a:pPr marL="0" indent="0" algn="l">
               <a:lnSpc>
                 <a:spcPct val="120000"/>
               </a:lnSpc>
@@ -32185,7 +31971,7 @@
           <a:bodyPr wrap="square" lIns="0" tIns="0" rIns="0" bIns="0" rtlCol="0" anchor="t"/>
           <a:lstStyle/>
           <a:p>
-            <a:pPr algn="l" indent="0" marL="0">
+            <a:pPr marL="0" indent="0" algn="l">
               <a:lnSpc>
                 <a:spcPct val="120000"/>
               </a:lnSpc>
@@ -32227,7 +32013,7 @@
           <a:bodyPr wrap="square" lIns="0" tIns="0" rIns="0" bIns="0" rtlCol="0" anchor="t"/>
           <a:lstStyle/>
           <a:p>
-            <a:pPr algn="l" indent="0" marL="0">
+            <a:pPr marL="0" indent="0" algn="l">
               <a:lnSpc>
                 <a:spcPct val="120000"/>
               </a:lnSpc>
@@ -32269,7 +32055,7 @@
           <a:bodyPr wrap="square" lIns="0" tIns="0" rIns="0" bIns="0" rtlCol="0" anchor="t"/>
           <a:lstStyle/>
           <a:p>
-            <a:pPr algn="l" indent="0" marL="0">
+            <a:pPr marL="0" indent="0" algn="l">
               <a:lnSpc>
                 <a:spcPct val="120000"/>
               </a:lnSpc>
@@ -32311,7 +32097,7 @@
           <a:bodyPr wrap="square" lIns="0" tIns="0" rIns="0" bIns="0" rtlCol="0" anchor="t"/>
           <a:lstStyle/>
           <a:p>
-            <a:pPr algn="l" indent="0" marL="0">
+            <a:pPr marL="0" indent="0" algn="l">
               <a:lnSpc>
                 <a:spcPct val="120000"/>
               </a:lnSpc>
@@ -32353,7 +32139,7 @@
           <a:bodyPr wrap="square" lIns="0" tIns="0" rIns="0" bIns="0" rtlCol="0" anchor="t"/>
           <a:lstStyle/>
           <a:p>
-            <a:pPr algn="l" indent="0" marL="0">
+            <a:pPr marL="0" indent="0" algn="l">
               <a:lnSpc>
                 <a:spcPct val="120000"/>
               </a:lnSpc>
@@ -32395,7 +32181,7 @@
           <a:bodyPr wrap="square" lIns="0" tIns="0" rIns="0" bIns="0" rtlCol="0" anchor="t"/>
           <a:lstStyle/>
           <a:p>
-            <a:pPr algn="l" indent="0" marL="0">
+            <a:pPr marL="0" indent="0" algn="l">
               <a:lnSpc>
                 <a:spcPct val="120000"/>
               </a:lnSpc>
@@ -32482,7 +32268,7 @@
           <a:bodyPr wrap="square" lIns="0" tIns="0" rIns="0" bIns="0" rtlCol="0" anchor="t"/>
           <a:lstStyle/>
           <a:p>
-            <a:pPr algn="l" indent="0" marL="0">
+            <a:pPr marL="0" indent="0" algn="l">
               <a:lnSpc>
                 <a:spcPct val="120000"/>
               </a:lnSpc>
@@ -32524,7 +32310,7 @@
           <a:bodyPr wrap="square" lIns="0" tIns="0" rIns="0" bIns="0" rtlCol="0" anchor="t"/>
           <a:lstStyle/>
           <a:p>
-            <a:pPr algn="l" indent="0" marL="0">
+            <a:pPr marL="0" indent="0" algn="l">
               <a:lnSpc>
                 <a:spcPct val="120000"/>
               </a:lnSpc>
@@ -32566,7 +32352,7 @@
           <a:bodyPr wrap="square" lIns="0" tIns="0" rIns="0" bIns="0" rtlCol="0" anchor="t"/>
           <a:lstStyle/>
           <a:p>
-            <a:pPr algn="l" indent="0" marL="0">
+            <a:pPr marL="0" indent="0" algn="l">
               <a:lnSpc>
                 <a:spcPct val="120000"/>
               </a:lnSpc>
@@ -32608,7 +32394,7 @@
           <a:bodyPr wrap="square" lIns="0" tIns="0" rIns="0" bIns="0" rtlCol="0" anchor="t"/>
           <a:lstStyle/>
           <a:p>
-            <a:pPr algn="l" indent="0" marL="0">
+            <a:pPr marL="0" indent="0" algn="l">
               <a:lnSpc>
                 <a:spcPct val="120000"/>
               </a:lnSpc>
@@ -32650,7 +32436,7 @@
           <a:bodyPr wrap="square" lIns="0" tIns="0" rIns="0" bIns="0" rtlCol="0" anchor="t"/>
           <a:lstStyle/>
           <a:p>
-            <a:pPr algn="l" indent="0" marL="0">
+            <a:pPr marL="0" indent="0" algn="l">
               <a:lnSpc>
                 <a:spcPct val="120000"/>
               </a:lnSpc>
@@ -32692,7 +32478,7 @@
           <a:bodyPr wrap="square" lIns="0" tIns="0" rIns="0" bIns="0" rtlCol="0" anchor="t"/>
           <a:lstStyle/>
           <a:p>
-            <a:pPr algn="l" indent="0" marL="0">
+            <a:pPr marL="0" indent="0" algn="l">
               <a:lnSpc>
                 <a:spcPct val="120000"/>
               </a:lnSpc>
@@ -32779,7 +32565,7 @@
           <a:bodyPr wrap="square" lIns="0" tIns="0" rIns="0" bIns="0" rtlCol="0" anchor="t"/>
           <a:lstStyle/>
           <a:p>
-            <a:pPr algn="l" indent="0" marL="0">
+            <a:pPr marL="0" indent="0" algn="l">
               <a:lnSpc>
                 <a:spcPct val="120000"/>
               </a:lnSpc>
@@ -32821,7 +32607,7 @@
           <a:bodyPr wrap="square" lIns="0" tIns="0" rIns="0" bIns="0" rtlCol="0" anchor="t"/>
           <a:lstStyle/>
           <a:p>
-            <a:pPr algn="l" indent="0" marL="0">
+            <a:pPr marL="0" indent="0" algn="l">
               <a:lnSpc>
                 <a:spcPct val="120000"/>
               </a:lnSpc>
@@ -32863,7 +32649,7 @@
           <a:bodyPr wrap="square" lIns="0" tIns="0" rIns="0" bIns="0" rtlCol="0" anchor="t"/>
           <a:lstStyle/>
           <a:p>
-            <a:pPr algn="l" indent="0" marL="0">
+            <a:pPr marL="0" indent="0" algn="l">
               <a:lnSpc>
                 <a:spcPct val="120000"/>
               </a:lnSpc>
@@ -32905,7 +32691,7 @@
           <a:bodyPr wrap="square" lIns="0" tIns="0" rIns="0" bIns="0" rtlCol="0" anchor="t"/>
           <a:lstStyle/>
           <a:p>
-            <a:pPr algn="l" indent="0" marL="0">
+            <a:pPr marL="0" indent="0" algn="l">
               <a:lnSpc>
                 <a:spcPct val="120000"/>
               </a:lnSpc>
@@ -32947,7 +32733,7 @@
           <a:bodyPr wrap="square" lIns="0" tIns="0" rIns="0" bIns="0" rtlCol="0" anchor="t"/>
           <a:lstStyle/>
           <a:p>
-            <a:pPr algn="l" indent="0" marL="0">
+            <a:pPr marL="0" indent="0" algn="l">
               <a:lnSpc>
                 <a:spcPct val="120000"/>
               </a:lnSpc>
@@ -32989,7 +32775,7 @@
           <a:bodyPr wrap="square" lIns="0" tIns="0" rIns="0" bIns="0" rtlCol="0" anchor="t"/>
           <a:lstStyle/>
           <a:p>
-            <a:pPr algn="l" indent="0" marL="0">
+            <a:pPr marL="0" indent="0" algn="l">
               <a:lnSpc>
                 <a:spcPct val="120000"/>
               </a:lnSpc>
@@ -33031,7 +32817,7 @@
           <a:bodyPr wrap="square" lIns="0" tIns="0" rIns="0" bIns="0" rtlCol="0" anchor="t"/>
           <a:lstStyle/>
           <a:p>
-            <a:pPr algn="l" indent="0" marL="0">
+            <a:pPr marL="0" indent="0" algn="l">
               <a:lnSpc>
                 <a:spcPct val="120000"/>
               </a:lnSpc>
@@ -33118,7 +32904,7 @@
           <a:bodyPr wrap="square" lIns="0" tIns="0" rIns="0" bIns="0" rtlCol="0" anchor="t"/>
           <a:lstStyle/>
           <a:p>
-            <a:pPr algn="l" indent="0" marL="0">
+            <a:pPr marL="0" indent="0" algn="l">
               <a:lnSpc>
                 <a:spcPct val="120000"/>
               </a:lnSpc>
@@ -33160,7 +32946,7 @@
           <a:bodyPr wrap="square" lIns="0" tIns="0" rIns="0" bIns="0" rtlCol="0" anchor="t"/>
           <a:lstStyle/>
           <a:p>
-            <a:pPr algn="l" indent="0" marL="0">
+            <a:pPr marL="0" indent="0" algn="l">
               <a:lnSpc>
                 <a:spcPct val="120000"/>
               </a:lnSpc>
@@ -33202,7 +32988,7 @@
           <a:bodyPr wrap="square" lIns="0" tIns="0" rIns="0" bIns="0" rtlCol="0" anchor="t"/>
           <a:lstStyle/>
           <a:p>
-            <a:pPr algn="l" indent="0" marL="0">
+            <a:pPr marL="0" indent="0" algn="l">
               <a:lnSpc>
                 <a:spcPct val="120000"/>
               </a:lnSpc>
@@ -33244,7 +33030,7 @@
           <a:bodyPr wrap="square" lIns="0" tIns="0" rIns="0" bIns="0" rtlCol="0" anchor="t"/>
           <a:lstStyle/>
           <a:p>
-            <a:pPr algn="l" indent="0" marL="0">
+            <a:pPr marL="0" indent="0" algn="l">
               <a:lnSpc>
                 <a:spcPct val="120000"/>
               </a:lnSpc>
@@ -33286,7 +33072,7 @@
           <a:bodyPr wrap="square" lIns="0" tIns="0" rIns="0" bIns="0" rtlCol="0" anchor="t"/>
           <a:lstStyle/>
           <a:p>
-            <a:pPr algn="l" indent="0" marL="0">
+            <a:pPr marL="0" indent="0" algn="l">
               <a:lnSpc>
                 <a:spcPct val="120000"/>
               </a:lnSpc>
@@ -33328,7 +33114,7 @@
           <a:bodyPr wrap="square" lIns="0" tIns="0" rIns="0" bIns="0" rtlCol="0" anchor="t"/>
           <a:lstStyle/>
           <a:p>
-            <a:pPr algn="l" indent="0" marL="0">
+            <a:pPr marL="0" indent="0" algn="l">
               <a:lnSpc>
                 <a:spcPct val="120000"/>
               </a:lnSpc>
@@ -33415,7 +33201,7 @@
           <a:bodyPr wrap="square" lIns="0" tIns="0" rIns="0" bIns="0" rtlCol="0" anchor="t"/>
           <a:lstStyle/>
           <a:p>
-            <a:pPr algn="l" indent="0" marL="0">
+            <a:pPr marL="0" indent="0" algn="l">
               <a:lnSpc>
                 <a:spcPct val="120000"/>
               </a:lnSpc>
@@ -33457,7 +33243,7 @@
           <a:bodyPr wrap="square" lIns="0" tIns="0" rIns="0" bIns="0" rtlCol="0" anchor="t"/>
           <a:lstStyle/>
           <a:p>
-            <a:pPr algn="l" indent="0" marL="0">
+            <a:pPr marL="0" indent="0" algn="l">
               <a:lnSpc>
                 <a:spcPct val="120000"/>
               </a:lnSpc>
@@ -33499,7 +33285,7 @@
           <a:bodyPr wrap="square" lIns="0" tIns="0" rIns="0" bIns="0" rtlCol="0" anchor="t"/>
           <a:lstStyle/>
           <a:p>
-            <a:pPr algn="l" indent="0" marL="0">
+            <a:pPr marL="0" indent="0" algn="l">
               <a:lnSpc>
                 <a:spcPct val="120000"/>
               </a:lnSpc>
@@ -33541,7 +33327,7 @@
           <a:bodyPr wrap="square" lIns="0" tIns="0" rIns="0" bIns="0" rtlCol="0" anchor="t"/>
           <a:lstStyle/>
           <a:p>
-            <a:pPr algn="l" indent="0" marL="0">
+            <a:pPr marL="0" indent="0" algn="l">
               <a:lnSpc>
                 <a:spcPct val="120000"/>
               </a:lnSpc>
@@ -33583,7 +33369,7 @@
           <a:bodyPr wrap="square" lIns="0" tIns="0" rIns="0" bIns="0" rtlCol="0" anchor="t"/>
           <a:lstStyle/>
           <a:p>
-            <a:pPr algn="l" indent="0" marL="0">
+            <a:pPr marL="0" indent="0" algn="l">
               <a:lnSpc>
                 <a:spcPct val="120000"/>
               </a:lnSpc>
@@ -33625,7 +33411,7 @@
           <a:bodyPr wrap="square" lIns="0" tIns="0" rIns="0" bIns="0" rtlCol="0" anchor="t"/>
           <a:lstStyle/>
           <a:p>
-            <a:pPr algn="l" indent="0" marL="0">
+            <a:pPr marL="0" indent="0" algn="l">
               <a:lnSpc>
                 <a:spcPct val="120000"/>
               </a:lnSpc>
@@ -33667,7 +33453,7 @@
           <a:bodyPr wrap="square" lIns="0" tIns="0" rIns="0" bIns="0" rtlCol="0" anchor="t"/>
           <a:lstStyle/>
           <a:p>
-            <a:pPr algn="l" indent="0" marL="0">
+            <a:pPr marL="0" indent="0" algn="l">
               <a:lnSpc>
                 <a:spcPct val="120000"/>
               </a:lnSpc>
@@ -33754,7 +33540,7 @@
           <a:bodyPr wrap="square" lIns="0" tIns="0" rIns="0" bIns="0" rtlCol="0" anchor="t"/>
           <a:lstStyle/>
           <a:p>
-            <a:pPr algn="l" indent="0" marL="0">
+            <a:pPr marL="0" indent="0" algn="l">
               <a:lnSpc>
                 <a:spcPct val="120000"/>
               </a:lnSpc>
@@ -33796,7 +33582,7 @@
           <a:bodyPr wrap="square" lIns="0" tIns="0" rIns="0" bIns="0" rtlCol="0" anchor="t"/>
           <a:lstStyle/>
           <a:p>
-            <a:pPr algn="l" indent="0" marL="0">
+            <a:pPr marL="0" indent="0" algn="l">
               <a:lnSpc>
                 <a:spcPct val="120000"/>
               </a:lnSpc>
@@ -33838,7 +33624,7 @@
           <a:bodyPr wrap="square" lIns="0" tIns="0" rIns="0" bIns="0" rtlCol="0" anchor="t"/>
           <a:lstStyle/>
           <a:p>
-            <a:pPr algn="l" indent="0" marL="0">
+            <a:pPr marL="0" indent="0" algn="l">
               <a:lnSpc>
                 <a:spcPct val="120000"/>
               </a:lnSpc>
@@ -33880,7 +33666,7 @@
           <a:bodyPr wrap="square" lIns="0" tIns="0" rIns="0" bIns="0" rtlCol="0" anchor="t"/>
           <a:lstStyle/>
           <a:p>
-            <a:pPr algn="l" indent="0" marL="0">
+            <a:pPr marL="0" indent="0" algn="l">
               <a:lnSpc>
                 <a:spcPct val="120000"/>
               </a:lnSpc>
@@ -33922,7 +33708,7 @@
           <a:bodyPr wrap="square" lIns="0" tIns="0" rIns="0" bIns="0" rtlCol="0" anchor="t"/>
           <a:lstStyle/>
           <a:p>
-            <a:pPr algn="l" indent="0" marL="0">
+            <a:pPr marL="0" indent="0" algn="l">
               <a:lnSpc>
                 <a:spcPct val="120000"/>
               </a:lnSpc>
@@ -33964,7 +33750,7 @@
           <a:bodyPr wrap="square" lIns="0" tIns="0" rIns="0" bIns="0" rtlCol="0" anchor="t"/>
           <a:lstStyle/>
           <a:p>
-            <a:pPr algn="l" indent="0" marL="0">
+            <a:pPr marL="0" indent="0" algn="l">
               <a:lnSpc>
                 <a:spcPct val="120000"/>
               </a:lnSpc>
@@ -34006,7 +33792,7 @@
           <a:bodyPr wrap="square" lIns="0" tIns="0" rIns="0" bIns="0" rtlCol="0" anchor="t"/>
           <a:lstStyle/>
           <a:p>
-            <a:pPr algn="l" indent="0" marL="0">
+            <a:pPr marL="0" indent="0" algn="l">
               <a:lnSpc>
                 <a:spcPct val="120000"/>
               </a:lnSpc>
@@ -34048,7 +33834,7 @@
           <a:bodyPr wrap="square" lIns="0" tIns="0" rIns="0" bIns="0" rtlCol="0" anchor="t"/>
           <a:lstStyle/>
           <a:p>
-            <a:pPr algn="l" indent="0" marL="0">
+            <a:pPr marL="0" indent="0" algn="l">
               <a:lnSpc>
                 <a:spcPct val="120000"/>
               </a:lnSpc>
@@ -34135,7 +33921,7 @@
           <a:bodyPr wrap="square" lIns="0" tIns="0" rIns="0" bIns="0" rtlCol="0" anchor="t"/>
           <a:lstStyle/>
           <a:p>
-            <a:pPr algn="l" indent="0" marL="0">
+            <a:pPr marL="0" indent="0" algn="l">
               <a:lnSpc>
                 <a:spcPct val="120000"/>
               </a:lnSpc>
@@ -34177,7 +33963,7 @@
           <a:bodyPr wrap="square" lIns="0" tIns="0" rIns="0" bIns="0" rtlCol="0" anchor="t"/>
           <a:lstStyle/>
           <a:p>
-            <a:pPr algn="l" indent="0" marL="0">
+            <a:pPr marL="0" indent="0" algn="l">
               <a:lnSpc>
                 <a:spcPct val="120000"/>
               </a:lnSpc>
@@ -34219,7 +34005,7 @@
           <a:bodyPr wrap="square" lIns="0" tIns="0" rIns="0" bIns="0" rtlCol="0" anchor="t"/>
           <a:lstStyle/>
           <a:p>
-            <a:pPr algn="l" indent="0" marL="0">
+            <a:pPr marL="0" indent="0" algn="l">
               <a:lnSpc>
                 <a:spcPct val="120000"/>
               </a:lnSpc>
@@ -34261,7 +34047,7 @@
           <a:bodyPr wrap="square" lIns="0" tIns="0" rIns="0" bIns="0" rtlCol="0" anchor="t"/>
           <a:lstStyle/>
           <a:p>
-            <a:pPr algn="l" indent="0" marL="0">
+            <a:pPr marL="0" indent="0" algn="l">
               <a:lnSpc>
                 <a:spcPct val="120000"/>
               </a:lnSpc>
@@ -34303,7 +34089,7 @@
           <a:bodyPr wrap="square" lIns="0" tIns="0" rIns="0" bIns="0" rtlCol="0" anchor="t"/>
           <a:lstStyle/>
           <a:p>
-            <a:pPr algn="l" indent="0" marL="0">
+            <a:pPr marL="0" indent="0" algn="l">
               <a:lnSpc>
                 <a:spcPct val="120000"/>
               </a:lnSpc>
@@ -34345,7 +34131,7 @@
           <a:bodyPr wrap="square" lIns="0" tIns="0" rIns="0" bIns="0" rtlCol="0" anchor="t"/>
           <a:lstStyle/>
           <a:p>
-            <a:pPr algn="l" indent="0" marL="0">
+            <a:pPr marL="0" indent="0" algn="l">
               <a:lnSpc>
                 <a:spcPct val="120000"/>
               </a:lnSpc>
@@ -34387,7 +34173,7 @@
           <a:bodyPr wrap="square" lIns="0" tIns="0" rIns="0" bIns="0" rtlCol="0" anchor="t"/>
           <a:lstStyle/>
           <a:p>
-            <a:pPr algn="l" indent="0" marL="0">
+            <a:pPr marL="0" indent="0" algn="l">
               <a:lnSpc>
                 <a:spcPct val="120000"/>
               </a:lnSpc>
@@ -34474,7 +34260,7 @@
           <a:bodyPr wrap="square" lIns="0" tIns="0" rIns="0" bIns="0" rtlCol="0" anchor="t"/>
           <a:lstStyle/>
           <a:p>
-            <a:pPr algn="l" indent="0" marL="0">
+            <a:pPr marL="0" indent="0" algn="l">
               <a:lnSpc>
                 <a:spcPct val="120000"/>
               </a:lnSpc>
@@ -34516,7 +34302,7 @@
           <a:bodyPr wrap="square" lIns="0" tIns="0" rIns="0" bIns="0" rtlCol="0" anchor="t"/>
           <a:lstStyle/>
           <a:p>
-            <a:pPr algn="l" indent="0" marL="0">
+            <a:pPr marL="0" indent="0" algn="l">
               <a:lnSpc>
                 <a:spcPct val="120000"/>
               </a:lnSpc>
@@ -34558,7 +34344,7 @@
           <a:bodyPr wrap="square" lIns="0" tIns="0" rIns="0" bIns="0" rtlCol="0" anchor="t"/>
           <a:lstStyle/>
           <a:p>
-            <a:pPr algn="l" indent="0" marL="0">
+            <a:pPr marL="0" indent="0" algn="l">
               <a:lnSpc>
                 <a:spcPct val="120000"/>
               </a:lnSpc>
@@ -34600,7 +34386,7 @@
           <a:bodyPr wrap="square" lIns="0" tIns="0" rIns="0" bIns="0" rtlCol="0" anchor="t"/>
           <a:lstStyle/>
           <a:p>
-            <a:pPr algn="l" indent="0" marL="0">
+            <a:pPr marL="0" indent="0" algn="l">
               <a:lnSpc>
                 <a:spcPct val="120000"/>
               </a:lnSpc>
@@ -34642,7 +34428,7 @@
           <a:bodyPr wrap="square" lIns="0" tIns="0" rIns="0" bIns="0" rtlCol="0" anchor="t"/>
           <a:lstStyle/>
           <a:p>
-            <a:pPr algn="l" indent="0" marL="0">
+            <a:pPr marL="0" indent="0" algn="l">
               <a:lnSpc>
                 <a:spcPct val="120000"/>
               </a:lnSpc>
@@ -34684,7 +34470,7 @@
           <a:bodyPr wrap="square" lIns="0" tIns="0" rIns="0" bIns="0" rtlCol="0" anchor="t"/>
           <a:lstStyle/>
           <a:p>
-            <a:pPr algn="l" indent="0" marL="0">
+            <a:pPr marL="0" indent="0" algn="l">
               <a:lnSpc>
                 <a:spcPct val="120000"/>
               </a:lnSpc>
@@ -34726,7 +34512,7 @@
           <a:bodyPr wrap="square" lIns="0" tIns="0" rIns="0" bIns="0" rtlCol="0" anchor="t"/>
           <a:lstStyle/>
           <a:p>
-            <a:pPr algn="l" indent="0" marL="0">
+            <a:pPr marL="0" indent="0" algn="l">
               <a:lnSpc>
                 <a:spcPct val="120000"/>
               </a:lnSpc>
@@ -35021,7 +34807,7 @@
           <a:bodyPr wrap="square" lIns="0" tIns="0" rIns="0" bIns="0" rtlCol="0" anchor="t"/>
           <a:lstStyle/>
           <a:p>
-            <a:pPr algn="ctr" indent="0" marL="0">
+            <a:pPr marL="0" indent="0" algn="ctr">
               <a:lnSpc>
                 <a:spcPct val="120000"/>
               </a:lnSpc>
@@ -35063,7 +34849,7 @@
           <a:bodyPr wrap="square" lIns="0" tIns="0" rIns="0" bIns="0" rtlCol="0" anchor="t"/>
           <a:lstStyle/>
           <a:p>
-            <a:pPr algn="ctr" indent="0" marL="0">
+            <a:pPr marL="0" indent="0" algn="ctr">
               <a:lnSpc>
                 <a:spcPct val="120000"/>
               </a:lnSpc>
@@ -35385,4 +35171,299 @@
     </a:ext>
   </a:extLst>
 </a:theme>
+</file>
+
+<file path=ppt/theme/theme2.xml><?xml version="1.0" encoding="utf-8"?>
+<a:theme xmlns:a="http://schemas.openxmlformats.org/drawingml/2006/main" name="Office 테마">
+  <a:themeElements>
+    <a:clrScheme name="Office">
+      <a:dk1>
+        <a:sysClr val="windowText" lastClr="000000"/>
+      </a:dk1>
+      <a:lt1>
+        <a:sysClr val="window" lastClr="FFFFFF"/>
+      </a:lt1>
+      <a:dk2>
+        <a:srgbClr val="44546A"/>
+      </a:dk2>
+      <a:lt2>
+        <a:srgbClr val="E7E6E6"/>
+      </a:lt2>
+      <a:accent1>
+        <a:srgbClr val="4472C4"/>
+      </a:accent1>
+      <a:accent2>
+        <a:srgbClr val="ED7D31"/>
+      </a:accent2>
+      <a:accent3>
+        <a:srgbClr val="A5A5A5"/>
+      </a:accent3>
+      <a:accent4>
+        <a:srgbClr val="FFC000"/>
+      </a:accent4>
+      <a:accent5>
+        <a:srgbClr val="5B9BD5"/>
+      </a:accent5>
+      <a:accent6>
+        <a:srgbClr val="70AD47"/>
+      </a:accent6>
+      <a:hlink>
+        <a:srgbClr val="0563C1"/>
+      </a:hlink>
+      <a:folHlink>
+        <a:srgbClr val="954F72"/>
+      </a:folHlink>
+    </a:clrScheme>
+    <a:fontScheme name="Office">
+      <a:majorFont>
+        <a:latin typeface="맑은 고딕" panose="020F0302020204030204"/>
+        <a:ea typeface=""/>
+        <a:cs typeface=""/>
+        <a:font script="Jpan" typeface="游ゴシック Light"/>
+        <a:font script="Hang" typeface="맑은 고딕"/>
+        <a:font script="Hans" typeface="等线 Light"/>
+        <a:font script="Hant" typeface="新細明體"/>
+        <a:font script="Arab" typeface="Times New Roman"/>
+        <a:font script="Hebr" typeface="Times New Roman"/>
+        <a:font script="Thai" typeface="Angsana New"/>
+        <a:font script="Ethi" typeface="Nyala"/>
+        <a:font script="Beng" typeface="Vrinda"/>
+        <a:font script="Gujr" typeface="Shruti"/>
+        <a:font script="Khmr" typeface="MoolBoran"/>
+        <a:font script="Knda" typeface="Tunga"/>
+        <a:font script="Guru" typeface="Raavi"/>
+        <a:font script="Cans" typeface="Euphemia"/>
+        <a:font script="Cher" typeface="Plantagenet Cherokee"/>
+        <a:font script="Yiii" typeface="Microsoft Yi Baiti"/>
+        <a:font script="Tibt" typeface="Microsoft Himalaya"/>
+        <a:font script="Thaa" typeface="MV Boli"/>
+        <a:font script="Deva" typeface="Mangal"/>
+        <a:font script="Telu" typeface="Gautami"/>
+        <a:font script="Taml" typeface="Latha"/>
+        <a:font script="Syrc" typeface="Estrangelo Edessa"/>
+        <a:font script="Orya" typeface="Kalinga"/>
+        <a:font script="Mlym" typeface="Kartika"/>
+        <a:font script="Laoo" typeface="DokChampa"/>
+        <a:font script="Sinh" typeface="Iskoola Pota"/>
+        <a:font script="Mong" typeface="Mongolian Baiti"/>
+        <a:font script="Viet" typeface="Times New Roman"/>
+        <a:font script="Uigh" typeface="Microsoft Uighur"/>
+        <a:font script="Geor" typeface="Sylfaen"/>
+        <a:font script="Armn" typeface="Arial"/>
+        <a:font script="Bugi" typeface="Leelawadee UI"/>
+        <a:font script="Bopo" typeface="Microsoft JhengHei"/>
+        <a:font script="Java" typeface="Javanese Text"/>
+        <a:font script="Lisu" typeface="Segoe UI"/>
+        <a:font script="Mymr" typeface="Myanmar Text"/>
+        <a:font script="Nkoo" typeface="Ebrima"/>
+        <a:font script="Olck" typeface="Nirmala UI"/>
+        <a:font script="Osma" typeface="Ebrima"/>
+        <a:font script="Phag" typeface="Phagspa"/>
+        <a:font script="Syrn" typeface="Estrangelo Edessa"/>
+        <a:font script="Syrj" typeface="Estrangelo Edessa"/>
+        <a:font script="Syre" typeface="Estrangelo Edessa"/>
+        <a:font script="Sora" typeface="Nirmala UI"/>
+        <a:font script="Tale" typeface="Microsoft Tai Le"/>
+        <a:font script="Talu" typeface="Microsoft New Tai Lue"/>
+        <a:font script="Tfng" typeface="Ebrima"/>
+      </a:majorFont>
+      <a:minorFont>
+        <a:latin typeface="맑은 고딕" panose="020F0502020204030204"/>
+        <a:ea typeface=""/>
+        <a:cs typeface=""/>
+        <a:font script="Jpan" typeface="游ゴシック"/>
+        <a:font script="Hang" typeface="맑은 고딕"/>
+        <a:font script="Hans" typeface="等线"/>
+        <a:font script="Hant" typeface="新細明體"/>
+        <a:font script="Arab" typeface="Arial"/>
+        <a:font script="Hebr" typeface="Arial"/>
+        <a:font script="Thai" typeface="Cordia New"/>
+        <a:font script="Ethi" typeface="Nyala"/>
+        <a:font script="Beng" typeface="Vrinda"/>
+        <a:font script="Gujr" typeface="Shruti"/>
+        <a:font script="Khmr" typeface="DaunPenh"/>
+        <a:font script="Knda" typeface="Tunga"/>
+        <a:font script="Guru" typeface="Raavi"/>
+        <a:font script="Cans" typeface="Euphemia"/>
+        <a:font script="Cher" typeface="Plantagenet Cherokee"/>
+        <a:font script="Yiii" typeface="Microsoft Yi Baiti"/>
+        <a:font script="Tibt" typeface="Microsoft Himalaya"/>
+        <a:font script="Thaa" typeface="MV Boli"/>
+        <a:font script="Deva" typeface="Mangal"/>
+        <a:font script="Telu" typeface="Gautami"/>
+        <a:font script="Taml" typeface="Latha"/>
+        <a:font script="Syrc" typeface="Estrangelo Edessa"/>
+        <a:font script="Orya" typeface="Kalinga"/>
+        <a:font script="Mlym" typeface="Kartika"/>
+        <a:font script="Laoo" typeface="DokChampa"/>
+        <a:font script="Sinh" typeface="Iskoola Pota"/>
+        <a:font script="Mong" typeface="Mongolian Baiti"/>
+        <a:font script="Viet" typeface="Arial"/>
+        <a:font script="Uigh" typeface="Microsoft Uighur"/>
+        <a:font script="Geor" typeface="Sylfaen"/>
+        <a:font script="Armn" typeface="Arial"/>
+        <a:font script="Bugi" typeface="Leelawadee UI"/>
+        <a:font script="Bopo" typeface="Microsoft JhengHei"/>
+        <a:font script="Java" typeface="Javanese Text"/>
+        <a:font script="Lisu" typeface="Segoe UI"/>
+        <a:font script="Mymr" typeface="Myanmar Text"/>
+        <a:font script="Nkoo" typeface="Ebrima"/>
+        <a:font script="Olck" typeface="Nirmala UI"/>
+        <a:font script="Osma" typeface="Ebrima"/>
+        <a:font script="Phag" typeface="Phagspa"/>
+        <a:font script="Syrn" typeface="Estrangelo Edessa"/>
+        <a:font script="Syrj" typeface="Estrangelo Edessa"/>
+        <a:font script="Syre" typeface="Estrangelo Edessa"/>
+        <a:font script="Sora" typeface="Nirmala UI"/>
+        <a:font script="Tale" typeface="Microsoft Tai Le"/>
+        <a:font script="Talu" typeface="Microsoft New Tai Lue"/>
+        <a:font script="Tfng" typeface="Ebrima"/>
+      </a:minorFont>
+    </a:fontScheme>
+    <a:fmtScheme name="Office">
+      <a:fillStyleLst>
+        <a:solidFill>
+          <a:schemeClr val="phClr"/>
+        </a:solidFill>
+        <a:gradFill rotWithShape="1">
+          <a:gsLst>
+            <a:gs pos="0">
+              <a:schemeClr val="phClr">
+                <a:lumMod val="110000"/>
+                <a:satMod val="105000"/>
+                <a:tint val="67000"/>
+              </a:schemeClr>
+            </a:gs>
+            <a:gs pos="50000">
+              <a:schemeClr val="phClr">
+                <a:lumMod val="105000"/>
+                <a:satMod val="103000"/>
+                <a:tint val="73000"/>
+              </a:schemeClr>
+            </a:gs>
+            <a:gs pos="100000">
+              <a:schemeClr val="phClr">
+                <a:lumMod val="105000"/>
+                <a:satMod val="109000"/>
+                <a:tint val="81000"/>
+              </a:schemeClr>
+            </a:gs>
+          </a:gsLst>
+          <a:lin ang="5400000" scaled="0"/>
+        </a:gradFill>
+        <a:gradFill rotWithShape="1">
+          <a:gsLst>
+            <a:gs pos="0">
+              <a:schemeClr val="phClr">
+                <a:satMod val="103000"/>
+                <a:lumMod val="102000"/>
+                <a:tint val="94000"/>
+              </a:schemeClr>
+            </a:gs>
+            <a:gs pos="50000">
+              <a:schemeClr val="phClr">
+                <a:satMod val="110000"/>
+                <a:lumMod val="100000"/>
+                <a:shade val="100000"/>
+              </a:schemeClr>
+            </a:gs>
+            <a:gs pos="100000">
+              <a:schemeClr val="phClr">
+                <a:lumMod val="99000"/>
+                <a:satMod val="120000"/>
+                <a:shade val="78000"/>
+              </a:schemeClr>
+            </a:gs>
+          </a:gsLst>
+          <a:lin ang="5400000" scaled="0"/>
+        </a:gradFill>
+      </a:fillStyleLst>
+      <a:lnStyleLst>
+        <a:ln w="6350" cap="flat" cmpd="sng" algn="ctr">
+          <a:solidFill>
+            <a:schemeClr val="phClr"/>
+          </a:solidFill>
+          <a:prstDash val="solid"/>
+          <a:miter lim="800000"/>
+        </a:ln>
+        <a:ln w="12700" cap="flat" cmpd="sng" algn="ctr">
+          <a:solidFill>
+            <a:schemeClr val="phClr"/>
+          </a:solidFill>
+          <a:prstDash val="solid"/>
+          <a:miter lim="800000"/>
+        </a:ln>
+        <a:ln w="19050" cap="flat" cmpd="sng" algn="ctr">
+          <a:solidFill>
+            <a:schemeClr val="phClr"/>
+          </a:solidFill>
+          <a:prstDash val="solid"/>
+          <a:miter lim="800000"/>
+        </a:ln>
+      </a:lnStyleLst>
+      <a:effectStyleLst>
+        <a:effectStyle>
+          <a:effectLst/>
+        </a:effectStyle>
+        <a:effectStyle>
+          <a:effectLst/>
+        </a:effectStyle>
+        <a:effectStyle>
+          <a:effectLst>
+            <a:outerShdw blurRad="57150" dist="19050" dir="5400000" algn="ctr" rotWithShape="0">
+              <a:srgbClr val="000000">
+                <a:alpha val="63000"/>
+              </a:srgbClr>
+            </a:outerShdw>
+          </a:effectLst>
+        </a:effectStyle>
+      </a:effectStyleLst>
+      <a:bgFillStyleLst>
+        <a:solidFill>
+          <a:schemeClr val="phClr"/>
+        </a:solidFill>
+        <a:solidFill>
+          <a:schemeClr val="phClr">
+            <a:tint val="95000"/>
+            <a:satMod val="170000"/>
+          </a:schemeClr>
+        </a:solidFill>
+        <a:gradFill rotWithShape="1">
+          <a:gsLst>
+            <a:gs pos="0">
+              <a:schemeClr val="phClr">
+                <a:tint val="93000"/>
+                <a:satMod val="150000"/>
+                <a:shade val="98000"/>
+                <a:lumMod val="102000"/>
+              </a:schemeClr>
+            </a:gs>
+            <a:gs pos="50000">
+              <a:schemeClr val="phClr">
+                <a:tint val="98000"/>
+                <a:satMod val="130000"/>
+                <a:shade val="90000"/>
+                <a:lumMod val="103000"/>
+              </a:schemeClr>
+            </a:gs>
+            <a:gs pos="100000">
+              <a:schemeClr val="phClr">
+                <a:shade val="63000"/>
+                <a:satMod val="120000"/>
+              </a:schemeClr>
+            </a:gs>
+          </a:gsLst>
+          <a:lin ang="5400000" scaled="0"/>
+        </a:gradFill>
+      </a:bgFillStyleLst>
+    </a:fmtScheme>
+  </a:themeElements>
+  <a:objectDefaults/>
+  <a:extraClrSchemeLst/>
+  <a:extLst>
+    <a:ext uri="{05A4C25C-085E-4340-85A3-A5531E510DB2}">
+      <thm15:themeFamily xmlns:thm15="http://schemas.microsoft.com/office/thememl/2012/main" name="Office Theme" id="{62F939B6-93AF-4DB8-9C6B-D6C7DFDC589F}" vid="{4A3C46E8-61CC-4603-A589-7422A47A8E4A}"/>
+    </a:ext>
+  </a:extLst>
+</a:theme>
 </file>